--- a/slides/ros2-github-actions-workshop.pptx
+++ b/slides/ros2-github-actions-workshop.pptx
@@ -25,9 +25,10 @@
     <p:sldId id="273" r:id="rId19"/>
     <p:sldId id="274" r:id="rId20"/>
     <p:sldId id="275" r:id="rId21"/>
+    <p:sldId id="276" r:id="rId22"/>
   </p:sldIdLst>
   <p:notesMasterIdLst>
-    <p:notesMasterId r:id="rId22"/>
+    <p:notesMasterId r:id="rId23"/>
   </p:notesMasterIdLst>
   <p:sldSz cx="12192000" cy="6858000"/>
   <p:notesSz cx="6858000" cy="12192000"/>
@@ -873,7 +874,7 @@
           <a:p>
             <a:r>
               <a:rPr lang="en-US" dirty="0"/>
-              <a:t>Spend a full minute here. Open both files side by side. This is a DESIGN lesson that happens to also be a CI lesson.</a:t>
+              <a:t>This is the checklist for "NO TESTS RAN". All three must be present. Attendees will hit this when they copy the workflow to their own repo — knowing the list saves 30 minutes of debugging.</a:t>
             </a:r>
             <a:endParaRPr lang="en-US" dirty="0"/>
           </a:p>
@@ -961,7 +962,7 @@
           <a:p>
             <a:r>
               <a:rPr lang="en-US" dirty="0"/>
-              <a:t>SHOW THE DIFF BEFORE PUSHING. Ask the room. Let the silence sit. Someone usually gets it — then land the reverse point.</a:t>
+              <a:t>Spend a full minute here. Open both files side by side. This is a DESIGN lesson that happens to also be a CI lesson.</a:t>
             </a:r>
             <a:endParaRPr lang="en-US" dirty="0"/>
           </a:p>
@@ -1049,7 +1050,7 @@
           <a:p>
             <a:r>
               <a:rPr lang="en-US" dirty="0"/>
-              <a:t>Click Details, scroll to the assertion, read it aloud. Then ./demo/fix-it.sh, push, refresh, green, merge. Six minutes total.</a:t>
+              <a:t>SHOW THE DIFF BEFORE PUSHING. Ask the room. Let the silence sit. Someone usually gets it — then land the reverse point.</a:t>
             </a:r>
             <a:endParaRPr lang="en-US" dirty="0"/>
           </a:p>
@@ -1137,7 +1138,7 @@
           <a:p>
             <a:r>
               <a:rPr lang="en-US" dirty="0"/>
-              <a:t>Six minutes for this whole section. If you are behind, cut this slide entirely and go straight to branch protection.</a:t>
+              <a:t>Click Details, scroll to the assertion, read it aloud. Then ./demo/fix-it.sh, push, refresh, green, merge. Six minutes total.</a:t>
             </a:r>
             <a:endParaRPr lang="en-US" dirty="0"/>
           </a:p>
@@ -1225,7 +1226,7 @@
           <a:p>
             <a:r>
               <a:rPr lang="en-US" dirty="0"/>
-              <a:t>This is the slide with real organisational consequences. Say plainly: a permanently red main is worse than no CI, because people stop reading it.</a:t>
+              <a:t>Six minutes for this whole section. If you are behind, cut this slide entirely and go straight to branch protection.</a:t>
             </a:r>
             <a:endParaRPr lang="en-US" dirty="0"/>
           </a:p>
@@ -1313,7 +1314,7 @@
           <a:p>
             <a:r>
               <a:rPr lang="en-US" dirty="0"/>
-              <a:t>60 seconds. Do not demo any of this. It is a map of where they go next, not today's material.</a:t>
+              <a:t>This is the slide with real organisational consequences. Say plainly: a permanently red main is worse than no CI, because people stop reading it.</a:t>
             </a:r>
             <a:endParaRPr lang="en-US" dirty="0"/>
           </a:p>
@@ -1401,7 +1402,7 @@
           <a:p>
             <a:r>
               <a:rPr lang="en-US" dirty="0"/>
-              <a:t>Put the repo URL in chat again here. Offer to pair — say it like you mean it, and put a time on the calendar.</a:t>
+              <a:t>60 seconds. Do not demo any of this. It is a map of where they go next, not today's material.</a:t>
             </a:r>
             <a:endParaRPr lang="en-US" dirty="0"/>
           </a:p>
@@ -1577,7 +1578,7 @@
           <a:p>
             <a:r>
               <a:rPr lang="en-US" dirty="0"/>
-              <a:t>Leave this up for the whole 15 minutes of Q&amp;A. Repo URL stays on screen.</a:t>
+              <a:t>Put the repo URL in chat again here. Offer to pair — say it like you mean it, and put a time on the calendar.</a:t>
             </a:r>
             <a:endParaRPr lang="en-US" dirty="0"/>
           </a:p>
@@ -1601,6 +1602,94 @@
             <a:fld id="{F7021451-1387-4CA6-816F-3879F97B5CBC}" type="slidenum">
               <a:rPr lang="en-US"/>
               <a:t>20</a:t>
+            </a:fld>
+            <a:endParaRPr lang="en-US"/>
+          </a:p>
+        </p:txBody>
+      </p:sp>
+    </p:spTree>
+    <p:extLst>
+      <p:ext uri="{BB962C8B-B14F-4D97-AF65-F5344CB8AC3E}">
+        <p14:creationId xmlns:p14="http://schemas.microsoft.com/office/powerpoint/2010/main" val="1024086991"/>
+      </p:ext>
+    </p:extLst>
+  </p:cSld>
+  <p:clrMapOvr>
+    <a:masterClrMapping/>
+  </p:clrMapOvr>
+</p:notes>
+</file>
+
+<file path=ppt/notesSlides/notesSlide21.xml><?xml version="1.0" encoding="utf-8"?>
+<p:notes xmlns:a="http://schemas.openxmlformats.org/drawingml/2006/main" xmlns:r="http://schemas.openxmlformats.org/officeDocument/2006/relationships" xmlns:p="http://schemas.openxmlformats.org/presentationml/2006/main">
+  <p:cSld>
+    <p:spTree>
+      <p:nvGrpSpPr>
+        <p:cNvPr id="1" name=""/>
+        <p:cNvGrpSpPr/>
+        <p:nvPr/>
+      </p:nvGrpSpPr>
+      <p:grpSpPr>
+        <a:xfrm>
+          <a:off x="0" y="0"/>
+          <a:ext cx="0" cy="0"/>
+          <a:chOff x="0" y="0"/>
+          <a:chExt cx="0" cy="0"/>
+        </a:xfrm>
+      </p:grpSpPr>
+      <p:sp>
+        <p:nvSpPr>
+          <p:cNvPr id="2" name="Slide Image Placeholder 1"/>
+          <p:cNvSpPr>
+            <a:spLocks noGrp="1" noRot="1" noChangeAspect="1"/>
+          </p:cNvSpPr>
+          <p:nvPr>
+            <p:ph type="sldImg"/>
+          </p:nvPr>
+        </p:nvSpPr>
+        <p:spPr/>
+      </p:sp>
+      <p:sp>
+        <p:nvSpPr>
+          <p:cNvPr id="3" name="Notes Placeholder 2"/>
+          <p:cNvSpPr>
+            <a:spLocks noGrp="1"/>
+          </p:cNvSpPr>
+          <p:nvPr>
+            <p:ph type="body" idx="1"/>
+          </p:nvPr>
+        </p:nvSpPr>
+        <p:spPr/>
+        <p:txBody>
+          <a:bodyPr/>
+          <a:lstStyle/>
+          <a:p>
+            <a:r>
+              <a:rPr lang="en-US" dirty="0"/>
+              <a:t>Leave this up for the whole 15 minutes of Q&amp;A. Repo URL stays on screen.</a:t>
+            </a:r>
+            <a:endParaRPr lang="en-US" dirty="0"/>
+          </a:p>
+        </p:txBody>
+      </p:sp>
+      <p:sp>
+        <p:nvSpPr>
+          <p:cNvPr id="4" name="Slide Number Placeholder 3"/>
+          <p:cNvSpPr>
+            <a:spLocks noGrp="1"/>
+          </p:cNvSpPr>
+          <p:nvPr>
+            <p:ph type="sldNum" sz="quarter" idx="10"/>
+          </p:nvPr>
+        </p:nvSpPr>
+        <p:spPr/>
+        <p:txBody>
+          <a:bodyPr/>
+          <a:lstStyle/>
+          <a:p>
+            <a:fld id="{F7021451-1387-4CA6-816F-3879F97B5CBC}" type="slidenum">
+              <a:rPr lang="en-US"/>
+              <a:t>21</a:t>
             </a:fld>
             <a:endParaRPr lang="en-US"/>
           </a:p>
@@ -4381,6 +4470,639 @@
     <p:bg>
       <p:bgPr>
         <a:solidFill>
+          <a:srgbClr val="0E2233"/>
+        </a:solidFill>
+      </p:bgPr>
+    </p:bg>
+    <p:spTree>
+      <p:nvGrpSpPr>
+        <p:cNvPr id="1" name=""/>
+        <p:cNvGrpSpPr/>
+        <p:nvPr/>
+      </p:nvGrpSpPr>
+      <p:grpSpPr>
+        <a:xfrm>
+          <a:off x="0" y="0"/>
+          <a:ext cx="0" cy="0"/>
+          <a:chOff x="0" y="0"/>
+          <a:chExt cx="0" cy="0"/>
+        </a:xfrm>
+      </p:grpSpPr>
+      <p:sp>
+        <p:nvSpPr>
+          <p:cNvPr id="2" name="Text 0"/>
+          <p:cNvSpPr/>
+          <p:nvPr/>
+        </p:nvSpPr>
+        <p:spPr>
+          <a:xfrm>
+            <a:off x="640080" y="146304"/>
+            <a:ext cx="10911535" cy="274320"/>
+          </a:xfrm>
+          <a:prstGeom prst="rect">
+            <a:avLst/>
+          </a:prstGeom>
+          <a:noFill/>
+          <a:ln/>
+        </p:spPr>
+        <p:txBody>
+          <a:bodyPr wrap="square" lIns="0" tIns="0" rIns="0" bIns="0" rtlCol="0" anchor="ctr"/>
+          <a:lstStyle/>
+          <a:p>
+            <a:pPr indent="0" marL="0">
+              <a:buNone/>
+            </a:pPr>
+            <a:r>
+              <a:rPr lang="en-US" sz="1100" b="1" spc="200" kern="0" dirty="0">
+                <a:solidFill>
+                  <a:srgbClr val="92AEC1"/>
+                </a:solidFill>
+                <a:latin typeface="Calibri" pitchFamily="34" charset="0"/>
+                <a:ea typeface="Calibri" pitchFamily="34" charset="-122"/>
+                <a:cs typeface="Calibri" pitchFamily="34" charset="-120"/>
+              </a:rPr>
+              <a:t>LIVE  ·  02-ROS2-BUILD-TEST.YML</a:t>
+            </a:r>
+            <a:endParaRPr lang="en-US" sz="1100" dirty="0"/>
+          </a:p>
+        </p:txBody>
+      </p:sp>
+      <p:sp>
+        <p:nvSpPr>
+          <p:cNvPr id="3" name="Text 1"/>
+          <p:cNvSpPr/>
+          <p:nvPr/>
+        </p:nvSpPr>
+        <p:spPr>
+          <a:xfrm>
+            <a:off x="640080" y="411480"/>
+            <a:ext cx="10911535" cy="777240"/>
+          </a:xfrm>
+          <a:prstGeom prst="rect">
+            <a:avLst/>
+          </a:prstGeom>
+          <a:noFill/>
+          <a:ln/>
+        </p:spPr>
+        <p:txBody>
+          <a:bodyPr wrap="square" lIns="0" tIns="0" rIns="0" bIns="0" rtlCol="0" anchor="ctr"/>
+          <a:lstStyle/>
+          <a:p>
+            <a:pPr algn="l" indent="0" marL="0">
+              <a:buNone/>
+            </a:pPr>
+            <a:r>
+              <a:rPr lang="en-US" sz="3400" b="1" dirty="0">
+                <a:solidFill>
+                  <a:srgbClr val="E9F1F6"/>
+                </a:solidFill>
+                <a:latin typeface="Arial" pitchFamily="34" charset="0"/>
+                <a:ea typeface="Arial" pitchFamily="34" charset="-122"/>
+                <a:cs typeface="Arial" pitchFamily="34" charset="-120"/>
+              </a:rPr>
+              <a:t>colcon test: three things to get right</a:t>
+            </a:r>
+            <a:endParaRPr lang="en-US" sz="3400" dirty="0"/>
+          </a:p>
+        </p:txBody>
+      </p:sp>
+      <p:sp>
+        <p:nvSpPr>
+          <p:cNvPr id="4" name="Shape 2"/>
+          <p:cNvSpPr/>
+          <p:nvPr/>
+        </p:nvSpPr>
+        <p:spPr>
+          <a:xfrm>
+            <a:off x="640080" y="1600200"/>
+            <a:ext cx="10908792" cy="3067812"/>
+          </a:xfrm>
+          <a:prstGeom prst="roundRect">
+            <a:avLst>
+              <a:gd name="adj" fmla="val 2385"/>
+            </a:avLst>
+          </a:prstGeom>
+          <a:solidFill>
+            <a:srgbClr val="0E2233"/>
+          </a:solidFill>
+          <a:ln w="12700">
+            <a:solidFill>
+              <a:srgbClr val="2A4C66"/>
+            </a:solidFill>
+            <a:prstDash val="solid"/>
+          </a:ln>
+          <a:effectLst>
+            <a:outerShdw sx="100000" sy="100000" kx="0" ky="0" algn="bl" rotWithShape="0" blurRad="127000" dist="38100" dir="5400000">
+              <a:srgbClr val="0E2233">
+                <a:alpha val="18000"/>
+              </a:srgbClr>
+            </a:outerShdw>
+          </a:effectLst>
+        </p:spPr>
+      </p:sp>
+      <p:sp>
+        <p:nvSpPr>
+          <p:cNvPr id="5" name="Text 3"/>
+          <p:cNvSpPr/>
+          <p:nvPr/>
+        </p:nvSpPr>
+        <p:spPr>
+          <a:xfrm>
+            <a:off x="896112" y="1837944"/>
+            <a:ext cx="10396728" cy="2592324"/>
+          </a:xfrm>
+          <a:prstGeom prst="rect">
+            <a:avLst/>
+          </a:prstGeom>
+          <a:noFill/>
+          <a:ln/>
+        </p:spPr>
+        <p:txBody>
+          <a:bodyPr wrap="square" lIns="0" tIns="0" rIns="0" bIns="0" rtlCol="0" anchor="t"/>
+          <a:lstStyle/>
+          <a:p>
+            <a:pPr indent="0" marL="0">
+              <a:lnSpc>
+                <a:spcPts val="2268"/>
+              </a:lnSpc>
+              <a:buNone/>
+            </a:pPr>
+            <a:r>
+              <a:rPr lang="en-US" sz="1400" dirty="0">
+                <a:solidFill>
+                  <a:srgbClr val="92AEC1"/>
+                </a:solidFill>
+                <a:latin typeface="Courier New" pitchFamily="34" charset="0"/>
+                <a:ea typeface="Courier New" pitchFamily="34" charset="-122"/>
+                <a:cs typeface="Courier New" pitchFamily="34" charset="-120"/>
+              </a:rPr>
+              <a:t># 1  setup.py — tell colcon to use pytest, not unittest</a:t>
+            </a:r>
+            <a:endParaRPr lang="en-US" sz="1400" dirty="0"/>
+          </a:p>
+          <a:p>
+            <a:pPr indent="0" marL="0">
+              <a:lnSpc>
+                <a:spcPts val="2268"/>
+              </a:lnSpc>
+              <a:buNone/>
+            </a:pPr>
+            <a:r>
+              <a:rPr lang="en-US" sz="1400" b="1" dirty="0">
+                <a:solidFill>
+                  <a:srgbClr val="3BD68C"/>
+                </a:solidFill>
+                <a:latin typeface="Courier New" pitchFamily="34" charset="0"/>
+                <a:ea typeface="Courier New" pitchFamily="34" charset="-122"/>
+                <a:cs typeface="Courier New" pitchFamily="34" charset="-120"/>
+              </a:rPr>
+              <a:t>tests_require=['pytest'],</a:t>
+            </a:r>
+            <a:endParaRPr lang="en-US" sz="1400" dirty="0"/>
+          </a:p>
+          <a:p>
+            <a:pPr indent="0" marL="0">
+              <a:lnSpc>
+                <a:spcPts val="2268"/>
+              </a:lnSpc>
+              <a:buNone/>
+            </a:pPr>
+            <a:endParaRPr lang="en-US" sz="1400" dirty="0"/>
+          </a:p>
+          <a:p>
+            <a:pPr indent="0" marL="0">
+              <a:lnSpc>
+                <a:spcPts val="2268"/>
+              </a:lnSpc>
+              <a:buNone/>
+            </a:pPr>
+            <a:r>
+              <a:rPr lang="en-US" sz="1400" dirty="0">
+                <a:solidFill>
+                  <a:srgbClr val="92AEC1"/>
+                </a:solidFill>
+                <a:latin typeface="Courier New" pitchFamily="34" charset="0"/>
+                <a:ea typeface="Courier New" pitchFamily="34" charset="-122"/>
+                <a:cs typeface="Courier New" pitchFamily="34" charset="-120"/>
+              </a:rPr>
+              <a:t># 2  before colcon test — PYTHONPATH for the pytest subprocess</a:t>
+            </a:r>
+            <a:endParaRPr lang="en-US" sz="1400" dirty="0"/>
+          </a:p>
+          <a:p>
+            <a:pPr indent="0" marL="0">
+              <a:lnSpc>
+                <a:spcPts val="2268"/>
+              </a:lnSpc>
+              <a:buNone/>
+            </a:pPr>
+            <a:r>
+              <a:rPr lang="en-US" sz="1400" b="1" dirty="0">
+                <a:solidFill>
+                  <a:srgbClr val="3BD68C"/>
+                </a:solidFill>
+                <a:latin typeface="Courier New" pitchFamily="34" charset="0"/>
+                <a:ea typeface="Courier New" pitchFamily="34" charset="-122"/>
+                <a:cs typeface="Courier New" pitchFamily="34" charset="-120"/>
+              </a:rPr>
+              <a:t>source install/setup.bash</a:t>
+            </a:r>
+            <a:endParaRPr lang="en-US" sz="1400" dirty="0"/>
+          </a:p>
+          <a:p>
+            <a:pPr indent="0" marL="0">
+              <a:lnSpc>
+                <a:spcPts val="2268"/>
+              </a:lnSpc>
+              <a:buNone/>
+            </a:pPr>
+            <a:r>
+              <a:rPr lang="en-US" sz="1400" dirty="0">
+                <a:solidFill>
+                  <a:srgbClr val="E9F1F6"/>
+                </a:solidFill>
+                <a:latin typeface="Courier New" pitchFamily="34" charset="0"/>
+                <a:ea typeface="Courier New" pitchFamily="34" charset="-122"/>
+                <a:cs typeface="Courier New" pitchFamily="34" charset="-120"/>
+              </a:rPr>
+              <a:t>colcon test --packages-select turtle_guard --event-handlers console_direct+</a:t>
+            </a:r>
+            <a:endParaRPr lang="en-US" sz="1400" dirty="0"/>
+          </a:p>
+          <a:p>
+            <a:pPr indent="0" marL="0">
+              <a:lnSpc>
+                <a:spcPts val="2268"/>
+              </a:lnSpc>
+              <a:buNone/>
+            </a:pPr>
+            <a:endParaRPr lang="en-US" sz="1400" dirty="0"/>
+          </a:p>
+          <a:p>
+            <a:pPr indent="0" marL="0">
+              <a:lnSpc>
+                <a:spcPts val="2268"/>
+              </a:lnSpc>
+              <a:buNone/>
+            </a:pPr>
+            <a:r>
+              <a:rPr lang="en-US" sz="1400" dirty="0">
+                <a:solidFill>
+                  <a:srgbClr val="92AEC1"/>
+                </a:solidFill>
+                <a:latin typeface="Courier New" pitchFamily="34" charset="0"/>
+                <a:ea typeface="Courier New" pitchFamily="34" charset="-122"/>
+                <a:cs typeface="Courier New" pitchFamily="34" charset="-120"/>
+              </a:rPr>
+              <a:t># 3  after — colcon test exits 0 even when tests fail</a:t>
+            </a:r>
+            <a:endParaRPr lang="en-US" sz="1400" dirty="0"/>
+          </a:p>
+          <a:p>
+            <a:pPr indent="0" marL="0">
+              <a:lnSpc>
+                <a:spcPts val="2268"/>
+              </a:lnSpc>
+              <a:buNone/>
+            </a:pPr>
+            <a:r>
+              <a:rPr lang="en-US" sz="1400" b="1" dirty="0">
+                <a:solidFill>
+                  <a:srgbClr val="FF6B71"/>
+                </a:solidFill>
+                <a:latin typeface="Courier New" pitchFamily="34" charset="0"/>
+                <a:ea typeface="Courier New" pitchFamily="34" charset="-122"/>
+                <a:cs typeface="Courier New" pitchFamily="34" charset="-120"/>
+              </a:rPr>
+              <a:t>colcon test-result --verbose</a:t>
+            </a:r>
+            <a:endParaRPr lang="en-US" sz="1400" dirty="0"/>
+          </a:p>
+        </p:txBody>
+      </p:sp>
+      <p:sp>
+        <p:nvSpPr>
+          <p:cNvPr id="6" name="Shape 4"/>
+          <p:cNvSpPr/>
+          <p:nvPr/>
+        </p:nvSpPr>
+        <p:spPr>
+          <a:xfrm>
+            <a:off x="640080" y="4800600"/>
+            <a:ext cx="3429000" cy="1691640"/>
+          </a:xfrm>
+          <a:prstGeom prst="roundRect">
+            <a:avLst>
+              <a:gd name="adj" fmla="val 2703"/>
+            </a:avLst>
+          </a:prstGeom>
+          <a:solidFill>
+            <a:srgbClr val="17364C"/>
+          </a:solidFill>
+          <a:ln/>
+        </p:spPr>
+      </p:sp>
+      <p:sp>
+        <p:nvSpPr>
+          <p:cNvPr id="7" name="Text 5"/>
+          <p:cNvSpPr/>
+          <p:nvPr/>
+        </p:nvSpPr>
+        <p:spPr>
+          <a:xfrm>
+            <a:off x="896112" y="4974336"/>
+            <a:ext cx="2926080" cy="384048"/>
+          </a:xfrm>
+          <a:prstGeom prst="rect">
+            <a:avLst/>
+          </a:prstGeom>
+          <a:noFill/>
+          <a:ln/>
+        </p:spPr>
+        <p:txBody>
+          <a:bodyPr wrap="square" lIns="0" tIns="0" rIns="0" bIns="0" rtlCol="0" anchor="ctr"/>
+          <a:lstStyle/>
+          <a:p>
+            <a:pPr indent="0" marL="0">
+              <a:buNone/>
+            </a:pPr>
+            <a:r>
+              <a:rPr lang="en-US" sz="1500" b="1" dirty="0">
+                <a:solidFill>
+                  <a:srgbClr val="FF6B71"/>
+                </a:solidFill>
+                <a:latin typeface="Arial" pitchFamily="34" charset="0"/>
+                <a:ea typeface="Arial" pitchFamily="34" charset="-122"/>
+                <a:cs typeface="Arial" pitchFamily="34" charset="-120"/>
+              </a:rPr>
+              <a:t>Without ①</a:t>
+            </a:r>
+            <a:endParaRPr lang="en-US" sz="1500" dirty="0"/>
+          </a:p>
+        </p:txBody>
+      </p:sp>
+      <p:sp>
+        <p:nvSpPr>
+          <p:cNvPr id="8" name="Text 6"/>
+          <p:cNvSpPr/>
+          <p:nvPr/>
+        </p:nvSpPr>
+        <p:spPr>
+          <a:xfrm>
+            <a:off x="896112" y="5385816"/>
+            <a:ext cx="2926080" cy="1005840"/>
+          </a:xfrm>
+          <a:prstGeom prst="rect">
+            <a:avLst/>
+          </a:prstGeom>
+          <a:noFill/>
+          <a:ln/>
+        </p:spPr>
+        <p:txBody>
+          <a:bodyPr wrap="square" lIns="0" tIns="0" rIns="0" bIns="0" rtlCol="0" anchor="t"/>
+          <a:lstStyle/>
+          <a:p>
+            <a:pPr indent="0" marL="0">
+              <a:lnSpc>
+                <a:spcPts val="1900"/>
+              </a:lnSpc>
+              <a:buNone/>
+            </a:pPr>
+            <a:r>
+              <a:rPr lang="en-US" sz="1300" dirty="0">
+                <a:solidFill>
+                  <a:srgbClr val="92AEC1"/>
+                </a:solidFill>
+                <a:latin typeface="Calibri" pitchFamily="34" charset="0"/>
+                <a:ea typeface="Calibri" pitchFamily="34" charset="-122"/>
+                <a:cs typeface="Calibri" pitchFamily="34" charset="-120"/>
+              </a:rPr>
+              <a:t>Python 3.12 unittest exits code 5 with "NO TESTS RAN". Plain def test_*() functions are invisible to the unittest runner.</a:t>
+            </a:r>
+            <a:endParaRPr lang="en-US" sz="1300" dirty="0"/>
+          </a:p>
+        </p:txBody>
+      </p:sp>
+      <p:sp>
+        <p:nvSpPr>
+          <p:cNvPr id="9" name="Shape 7"/>
+          <p:cNvSpPr/>
+          <p:nvPr/>
+        </p:nvSpPr>
+        <p:spPr>
+          <a:xfrm>
+            <a:off x="4370832" y="4800600"/>
+            <a:ext cx="3429000" cy="1691640"/>
+          </a:xfrm>
+          <a:prstGeom prst="roundRect">
+            <a:avLst>
+              <a:gd name="adj" fmla="val 2703"/>
+            </a:avLst>
+          </a:prstGeom>
+          <a:solidFill>
+            <a:srgbClr val="17364C"/>
+          </a:solidFill>
+          <a:ln/>
+        </p:spPr>
+      </p:sp>
+      <p:sp>
+        <p:nvSpPr>
+          <p:cNvPr id="10" name="Text 8"/>
+          <p:cNvSpPr/>
+          <p:nvPr/>
+        </p:nvSpPr>
+        <p:spPr>
+          <a:xfrm>
+            <a:off x="4626864" y="4974336"/>
+            <a:ext cx="2926080" cy="384048"/>
+          </a:xfrm>
+          <a:prstGeom prst="rect">
+            <a:avLst/>
+          </a:prstGeom>
+          <a:noFill/>
+          <a:ln/>
+        </p:spPr>
+        <p:txBody>
+          <a:bodyPr wrap="square" lIns="0" tIns="0" rIns="0" bIns="0" rtlCol="0" anchor="ctr"/>
+          <a:lstStyle/>
+          <a:p>
+            <a:pPr indent="0" marL="0">
+              <a:buNone/>
+            </a:pPr>
+            <a:r>
+              <a:rPr lang="en-US" sz="1500" b="1" dirty="0">
+                <a:solidFill>
+                  <a:srgbClr val="FF6B71"/>
+                </a:solidFill>
+                <a:latin typeface="Arial" pitchFamily="34" charset="0"/>
+                <a:ea typeface="Arial" pitchFamily="34" charset="-122"/>
+                <a:cs typeface="Arial" pitchFamily="34" charset="-120"/>
+              </a:rPr>
+              <a:t>Without ②</a:t>
+            </a:r>
+            <a:endParaRPr lang="en-US" sz="1500" dirty="0"/>
+          </a:p>
+        </p:txBody>
+      </p:sp>
+      <p:sp>
+        <p:nvSpPr>
+          <p:cNvPr id="11" name="Text 9"/>
+          <p:cNvSpPr/>
+          <p:nvPr/>
+        </p:nvSpPr>
+        <p:spPr>
+          <a:xfrm>
+            <a:off x="4626864" y="5385816"/>
+            <a:ext cx="2926080" cy="1005840"/>
+          </a:xfrm>
+          <a:prstGeom prst="rect">
+            <a:avLst/>
+          </a:prstGeom>
+          <a:noFill/>
+          <a:ln/>
+        </p:spPr>
+        <p:txBody>
+          <a:bodyPr wrap="square" lIns="0" tIns="0" rIns="0" bIns="0" rtlCol="0" anchor="t"/>
+          <a:lstStyle/>
+          <a:p>
+            <a:pPr indent="0" marL="0">
+              <a:lnSpc>
+                <a:spcPts val="1900"/>
+              </a:lnSpc>
+              <a:buNone/>
+            </a:pPr>
+            <a:r>
+              <a:rPr lang="en-US" sz="1300" dirty="0">
+                <a:solidFill>
+                  <a:srgbClr val="92AEC1"/>
+                </a:solidFill>
+                <a:latin typeface="Calibri" pitchFamily="34" charset="0"/>
+                <a:ea typeface="Calibri" pitchFamily="34" charset="-122"/>
+                <a:cs typeface="Calibri" pitchFamily="34" charset="-120"/>
+              </a:rPr>
+              <a:t>The pytest subprocess has no PYTHONPATH, cannot import your package, and finds zero tests — silently.</a:t>
+            </a:r>
+            <a:endParaRPr lang="en-US" sz="1300" dirty="0"/>
+          </a:p>
+        </p:txBody>
+      </p:sp>
+      <p:sp>
+        <p:nvSpPr>
+          <p:cNvPr id="12" name="Shape 10"/>
+          <p:cNvSpPr/>
+          <p:nvPr/>
+        </p:nvSpPr>
+        <p:spPr>
+          <a:xfrm>
+            <a:off x="8101584" y="4800600"/>
+            <a:ext cx="3429000" cy="1691640"/>
+          </a:xfrm>
+          <a:prstGeom prst="roundRect">
+            <a:avLst>
+              <a:gd name="adj" fmla="val 2703"/>
+            </a:avLst>
+          </a:prstGeom>
+          <a:solidFill>
+            <a:srgbClr val="17364C"/>
+          </a:solidFill>
+          <a:ln/>
+        </p:spPr>
+      </p:sp>
+      <p:sp>
+        <p:nvSpPr>
+          <p:cNvPr id="13" name="Text 11"/>
+          <p:cNvSpPr/>
+          <p:nvPr/>
+        </p:nvSpPr>
+        <p:spPr>
+          <a:xfrm>
+            <a:off x="8357616" y="4974336"/>
+            <a:ext cx="2926080" cy="384048"/>
+          </a:xfrm>
+          <a:prstGeom prst="rect">
+            <a:avLst/>
+          </a:prstGeom>
+          <a:noFill/>
+          <a:ln/>
+        </p:spPr>
+        <p:txBody>
+          <a:bodyPr wrap="square" lIns="0" tIns="0" rIns="0" bIns="0" rtlCol="0" anchor="ctr"/>
+          <a:lstStyle/>
+          <a:p>
+            <a:pPr indent="0" marL="0">
+              <a:buNone/>
+            </a:pPr>
+            <a:r>
+              <a:rPr lang="en-US" sz="1500" b="1" dirty="0">
+                <a:solidFill>
+                  <a:srgbClr val="FF6B71"/>
+                </a:solidFill>
+                <a:latin typeface="Arial" pitchFamily="34" charset="0"/>
+                <a:ea typeface="Arial" pitchFamily="34" charset="-122"/>
+                <a:cs typeface="Arial" pitchFamily="34" charset="-120"/>
+              </a:rPr>
+              <a:t>Without ③</a:t>
+            </a:r>
+            <a:endParaRPr lang="en-US" sz="1500" dirty="0"/>
+          </a:p>
+        </p:txBody>
+      </p:sp>
+      <p:sp>
+        <p:nvSpPr>
+          <p:cNvPr id="14" name="Text 12"/>
+          <p:cNvSpPr/>
+          <p:nvPr/>
+        </p:nvSpPr>
+        <p:spPr>
+          <a:xfrm>
+            <a:off x="8357616" y="5385816"/>
+            <a:ext cx="2926080" cy="1005840"/>
+          </a:xfrm>
+          <a:prstGeom prst="rect">
+            <a:avLst/>
+          </a:prstGeom>
+          <a:noFill/>
+          <a:ln/>
+        </p:spPr>
+        <p:txBody>
+          <a:bodyPr wrap="square" lIns="0" tIns="0" rIns="0" bIns="0" rtlCol="0" anchor="t"/>
+          <a:lstStyle/>
+          <a:p>
+            <a:pPr indent="0" marL="0">
+              <a:lnSpc>
+                <a:spcPts val="1900"/>
+              </a:lnSpc>
+              <a:buNone/>
+            </a:pPr>
+            <a:r>
+              <a:rPr lang="en-US" sz="1300" dirty="0">
+                <a:solidFill>
+                  <a:srgbClr val="92AEC1"/>
+                </a:solidFill>
+                <a:latin typeface="Calibri" pitchFamily="34" charset="0"/>
+                <a:ea typeface="Calibri" pitchFamily="34" charset="-122"/>
+                <a:cs typeface="Calibri" pitchFamily="34" charset="-120"/>
+              </a:rPr>
+              <a:t>colcon test exits 0 even when tests fail. CI is permanently green and checks nothing.</a:t>
+            </a:r>
+            <a:endParaRPr lang="en-US" sz="1300" dirty="0"/>
+          </a:p>
+        </p:txBody>
+      </p:sp>
+    </p:spTree>
+  </p:cSld>
+  <p:clrMapOvr>
+    <a:masterClrMapping/>
+  </p:clrMapOvr>
+</p:sld>
+</file>
+
+<file path=ppt/slides/slide14.xml><?xml version="1.0" encoding="utf-8"?>
+<p:sld xmlns:a="http://schemas.openxmlformats.org/drawingml/2006/main" xmlns:r="http://schemas.openxmlformats.org/officeDocument/2006/relationships" xmlns:p="http://schemas.openxmlformats.org/presentationml/2006/main">
+  <p:cSld name="Slide 14">
+    <p:bg>
+      <p:bgPr>
+        <a:solidFill>
           <a:srgbClr val="FFFFFF"/>
         </a:solidFill>
       </p:bgPr>
@@ -5036,9 +5758,9 @@
 </p:sld>
 </file>
 
-<file path=ppt/slides/slide14.xml><?xml version="1.0" encoding="utf-8"?>
+<file path=ppt/slides/slide15.xml><?xml version="1.0" encoding="utf-8"?>
 <p:sld xmlns:a="http://schemas.openxmlformats.org/drawingml/2006/main" xmlns:r="http://schemas.openxmlformats.org/officeDocument/2006/relationships" xmlns:p="http://schemas.openxmlformats.org/presentationml/2006/main">
-  <p:cSld name="Slide 14">
+  <p:cSld name="Slide 15">
     <p:bg>
       <p:bgPr>
         <a:solidFill>
@@ -5545,467 +6267,6 @@
               <a:t>$ ./demo/break-it.sh   &amp;&amp;   git commit -am "simplify clamp"   &amp;&amp;   git push</a:t>
             </a:r>
             <a:endParaRPr lang="en-US" sz="1400" dirty="0"/>
-          </a:p>
-        </p:txBody>
-      </p:sp>
-    </p:spTree>
-  </p:cSld>
-  <p:clrMapOvr>
-    <a:masterClrMapping/>
-  </p:clrMapOvr>
-</p:sld>
-</file>
-
-<file path=ppt/slides/slide15.xml><?xml version="1.0" encoding="utf-8"?>
-<p:sld xmlns:a="http://schemas.openxmlformats.org/drawingml/2006/main" xmlns:r="http://schemas.openxmlformats.org/officeDocument/2006/relationships" xmlns:p="http://schemas.openxmlformats.org/presentationml/2006/main">
-  <p:cSld name="Slide 15">
-    <p:bg>
-      <p:bgPr>
-        <a:solidFill>
-          <a:srgbClr val="FFFFFF"/>
-        </a:solidFill>
-      </p:bgPr>
-    </p:bg>
-    <p:spTree>
-      <p:nvGrpSpPr>
-        <p:cNvPr id="1" name=""/>
-        <p:cNvGrpSpPr/>
-        <p:nvPr/>
-      </p:nvGrpSpPr>
-      <p:grpSpPr>
-        <a:xfrm>
-          <a:off x="0" y="0"/>
-          <a:ext cx="0" cy="0"/>
-          <a:chOff x="0" y="0"/>
-          <a:chExt cx="0" cy="0"/>
-        </a:xfrm>
-      </p:grpSpPr>
-      <p:sp>
-        <p:nvSpPr>
-          <p:cNvPr id="2" name="Text 0"/>
-          <p:cNvSpPr/>
-          <p:nvPr/>
-        </p:nvSpPr>
-        <p:spPr>
-          <a:xfrm>
-            <a:off x="640080" y="146304"/>
-            <a:ext cx="10911535" cy="274320"/>
-          </a:xfrm>
-          <a:prstGeom prst="rect">
-            <a:avLst/>
-          </a:prstGeom>
-          <a:noFill/>
-          <a:ln/>
-        </p:spPr>
-        <p:txBody>
-          <a:bodyPr wrap="square" lIns="0" tIns="0" rIns="0" bIns="0" rtlCol="0" anchor="ctr"/>
-          <a:lstStyle/>
-          <a:p>
-            <a:pPr indent="0" marL="0">
-              <a:buNone/>
-            </a:pPr>
-            <a:r>
-              <a:rPr lang="en-US" sz="1100" b="1" spc="200" kern="0" dirty="0">
-                <a:solidFill>
-                  <a:srgbClr val="5E7789"/>
-                </a:solidFill>
-                <a:latin typeface="Calibri" pitchFamily="34" charset="0"/>
-                <a:ea typeface="Calibri" pitchFamily="34" charset="-122"/>
-                <a:cs typeface="Calibri" pitchFamily="34" charset="-120"/>
-              </a:rPr>
-              <a:t>LIVE  ·  OPEN THE PULL REQUEST</a:t>
-            </a:r>
-            <a:endParaRPr lang="en-US" sz="1100" dirty="0"/>
-          </a:p>
-        </p:txBody>
-      </p:sp>
-      <p:sp>
-        <p:nvSpPr>
-          <p:cNvPr id="3" name="Text 1"/>
-          <p:cNvSpPr/>
-          <p:nvPr/>
-        </p:nvSpPr>
-        <p:spPr>
-          <a:xfrm>
-            <a:off x="640080" y="411480"/>
-            <a:ext cx="10911535" cy="777240"/>
-          </a:xfrm>
-          <a:prstGeom prst="rect">
-            <a:avLst/>
-          </a:prstGeom>
-          <a:noFill/>
-          <a:ln/>
-        </p:spPr>
-        <p:txBody>
-          <a:bodyPr wrap="square" lIns="0" tIns="0" rIns="0" bIns="0" rtlCol="0" anchor="ctr"/>
-          <a:lstStyle/>
-          <a:p>
-            <a:pPr algn="l" indent="0" marL="0">
-              <a:buNone/>
-            </a:pPr>
-            <a:r>
-              <a:rPr lang="en-US" sz="3400" b="1" dirty="0">
-                <a:solidFill>
-                  <a:srgbClr val="0E2233"/>
-                </a:solidFill>
-                <a:latin typeface="Arial" pitchFamily="34" charset="0"/>
-                <a:ea typeface="Arial" pitchFamily="34" charset="-122"/>
-                <a:cs typeface="Arial" pitchFamily="34" charset="-120"/>
-              </a:rPr>
-              <a:t>A good failure tells you what broke, in English</a:t>
-            </a:r>
-            <a:endParaRPr lang="en-US" sz="3400" dirty="0"/>
-          </a:p>
-        </p:txBody>
-      </p:sp>
-      <p:sp>
-        <p:nvSpPr>
-          <p:cNvPr id="4" name="Shape 2"/>
-          <p:cNvSpPr/>
-          <p:nvPr/>
-        </p:nvSpPr>
-        <p:spPr>
-          <a:xfrm>
-            <a:off x="640080" y="1645920"/>
-            <a:ext cx="10908792" cy="1627632"/>
-          </a:xfrm>
-          <a:prstGeom prst="roundRect">
-            <a:avLst>
-              <a:gd name="adj" fmla="val 4494"/>
-            </a:avLst>
-          </a:prstGeom>
-          <a:solidFill>
-            <a:srgbClr val="0E2233"/>
-          </a:solidFill>
-          <a:ln w="12700">
-            <a:solidFill>
-              <a:srgbClr val="2A4C66"/>
-            </a:solidFill>
-            <a:prstDash val="solid"/>
-          </a:ln>
-          <a:effectLst>
-            <a:outerShdw sx="100000" sy="100000" kx="0" ky="0" algn="bl" rotWithShape="0" blurRad="127000" dist="38100" dir="5400000">
-              <a:srgbClr val="0E2233">
-                <a:alpha val="18000"/>
-              </a:srgbClr>
-            </a:outerShdw>
-          </a:effectLst>
-        </p:spPr>
-      </p:sp>
-      <p:sp>
-        <p:nvSpPr>
-          <p:cNvPr id="5" name="Text 3"/>
-          <p:cNvSpPr/>
-          <p:nvPr/>
-        </p:nvSpPr>
-        <p:spPr>
-          <a:xfrm>
-            <a:off x="896112" y="1883664"/>
-            <a:ext cx="10396728" cy="1152144"/>
-          </a:xfrm>
-          <a:prstGeom prst="rect">
-            <a:avLst/>
-          </a:prstGeom>
-          <a:noFill/>
-          <a:ln/>
-        </p:spPr>
-        <p:txBody>
-          <a:bodyPr wrap="square" lIns="0" tIns="0" rIns="0" bIns="0" rtlCol="0" anchor="t"/>
-          <a:lstStyle/>
-          <a:p>
-            <a:pPr indent="0" marL="0">
-              <a:lnSpc>
-                <a:spcPts val="2268"/>
-              </a:lnSpc>
-              <a:buNone/>
-            </a:pPr>
-            <a:r>
-              <a:rPr lang="en-US" sz="1400" dirty="0">
-                <a:solidFill>
-                  <a:srgbClr val="FF6B71"/>
-                </a:solidFill>
-                <a:latin typeface="Courier New" pitchFamily="34" charset="0"/>
-                <a:ea typeface="Courier New" pitchFamily="34" charset="-122"/>
-                <a:cs typeface="Courier New" pitchFamily="34" charset="-120"/>
-              </a:rPr>
-              <a:t>FAILED test/test_safety.py::test_negative_value_is_saturated_symmetrically</a:t>
-            </a:r>
-            <a:endParaRPr lang="en-US" sz="1400" dirty="0"/>
-          </a:p>
-          <a:p>
-            <a:pPr indent="0" marL="0">
-              <a:lnSpc>
-                <a:spcPts val="2268"/>
-              </a:lnSpc>
-              <a:buNone/>
-            </a:pPr>
-            <a:r>
-              <a:rPr lang="en-US" sz="1400" dirty="0">
-                <a:solidFill>
-                  <a:srgbClr val="FF6B71"/>
-                </a:solidFill>
-                <a:latin typeface="Courier New" pitchFamily="34" charset="0"/>
-                <a:ea typeface="Courier New" pitchFamily="34" charset="-122"/>
-                <a:cs typeface="Courier New" pitchFamily="34" charset="-120"/>
-              </a:rPr>
-              <a:t>FAILED test/test_safety.py::test_clamp_twist_limits_both_axes_independently</a:t>
-            </a:r>
-            <a:endParaRPr lang="en-US" sz="1400" dirty="0"/>
-          </a:p>
-          <a:p>
-            <a:pPr indent="0" marL="0">
-              <a:lnSpc>
-                <a:spcPts val="2268"/>
-              </a:lnSpc>
-              <a:buNone/>
-            </a:pPr>
-            <a:endParaRPr lang="en-US" sz="1400" dirty="0"/>
-          </a:p>
-          <a:p>
-            <a:pPr indent="0" marL="0">
-              <a:lnSpc>
-                <a:spcPts val="2268"/>
-              </a:lnSpc>
-              <a:buNone/>
-            </a:pPr>
-            <a:r>
-              <a:rPr lang="en-US" sz="1400" dirty="0">
-                <a:solidFill>
-                  <a:srgbClr val="92AEC1"/>
-                </a:solidFill>
-                <a:latin typeface="Courier New" pitchFamily="34" charset="0"/>
-                <a:ea typeface="Courier New" pitchFamily="34" charset="-122"/>
-                <a:cs typeface="Courier New" pitchFamily="34" charset="-120"/>
-              </a:rPr>
-              <a:t>2 failed, 7 passed in 0.04s</a:t>
-            </a:r>
-            <a:endParaRPr lang="en-US" sz="1400" dirty="0"/>
-          </a:p>
-        </p:txBody>
-      </p:sp>
-      <p:sp>
-        <p:nvSpPr>
-          <p:cNvPr id="6" name="Shape 4"/>
-          <p:cNvSpPr/>
-          <p:nvPr/>
-        </p:nvSpPr>
-        <p:spPr>
-          <a:xfrm>
-            <a:off x="640080" y="3703320"/>
-            <a:ext cx="2286000" cy="384048"/>
-          </a:xfrm>
-          <a:prstGeom prst="roundRect">
-            <a:avLst>
-              <a:gd name="adj" fmla="val 119048"/>
-            </a:avLst>
-          </a:prstGeom>
-          <a:solidFill>
-            <a:srgbClr val="D9434B"/>
-          </a:solidFill>
-          <a:ln/>
-        </p:spPr>
-      </p:sp>
-      <p:sp>
-        <p:nvSpPr>
-          <p:cNvPr id="7" name="Text 5"/>
-          <p:cNvSpPr/>
-          <p:nvPr/>
-        </p:nvSpPr>
-        <p:spPr>
-          <a:xfrm>
-            <a:off x="640080" y="3703320"/>
-            <a:ext cx="2286000" cy="384048"/>
-          </a:xfrm>
-          <a:prstGeom prst="rect">
-            <a:avLst/>
-          </a:prstGeom>
-          <a:noFill/>
-          <a:ln/>
-        </p:spPr>
-        <p:txBody>
-          <a:bodyPr wrap="square" lIns="0" tIns="0" rIns="0" bIns="0" rtlCol="0" anchor="ctr"/>
-          <a:lstStyle/>
-          <a:p>
-            <a:pPr algn="ctr" indent="0" marL="0">
-              <a:buNone/>
-            </a:pPr>
-            <a:r>
-              <a:rPr lang="en-US" sz="1200" b="1" dirty="0">
-                <a:solidFill>
-                  <a:srgbClr val="FFFFFF"/>
-                </a:solidFill>
-                <a:latin typeface="Arial" pitchFamily="34" charset="0"/>
-                <a:ea typeface="Arial" pitchFamily="34" charset="-122"/>
-                <a:cs typeface="Arial" pitchFamily="34" charset="-120"/>
-              </a:rPr>
-              <a:t>✗  2 checks failed</a:t>
-            </a:r>
-            <a:endParaRPr lang="en-US" sz="1200" dirty="0"/>
-          </a:p>
-        </p:txBody>
-      </p:sp>
-      <p:sp>
-        <p:nvSpPr>
-          <p:cNvPr id="8" name="Text 6"/>
-          <p:cNvSpPr/>
-          <p:nvPr/>
-        </p:nvSpPr>
-        <p:spPr>
-          <a:xfrm>
-            <a:off x="3200400" y="3657600"/>
-            <a:ext cx="8321040" cy="777240"/>
-          </a:xfrm>
-          <a:prstGeom prst="rect">
-            <a:avLst/>
-          </a:prstGeom>
-          <a:noFill/>
-          <a:ln/>
-        </p:spPr>
-        <p:txBody>
-          <a:bodyPr wrap="square" lIns="0" tIns="0" rIns="0" bIns="0" rtlCol="0" anchor="ctr"/>
-          <a:lstStyle/>
-          <a:p>
-            <a:pPr indent="0" marL="0">
-              <a:lnSpc>
-                <a:spcPts val="2200"/>
-              </a:lnSpc>
-              <a:buNone/>
-            </a:pPr>
-            <a:r>
-              <a:rPr lang="en-US" sz="1500" i="1" dirty="0">
-                <a:solidFill>
-                  <a:srgbClr val="0E2233"/>
-                </a:solidFill>
-                <a:latin typeface="Calibri" pitchFamily="34" charset="0"/>
-                <a:ea typeface="Calibri" pitchFamily="34" charset="-122"/>
-                <a:cs typeface="Calibri" pitchFamily="34" charset="-120"/>
-              </a:rPr>
-              <a:t>It did not say "something broke". It named the behaviour that broke.</a:t>
-            </a:r>
-            <a:endParaRPr lang="en-US" sz="1500" dirty="0"/>
-          </a:p>
-          <a:p>
-            <a:pPr indent="0" marL="0">
-              <a:lnSpc>
-                <a:spcPts val="2200"/>
-              </a:lnSpc>
-              <a:buNone/>
-            </a:pPr>
-            <a:r>
-              <a:rPr lang="en-US" sz="1500" i="1" dirty="0">
-                <a:solidFill>
-                  <a:srgbClr val="0E2233"/>
-                </a:solidFill>
-                <a:latin typeface="Calibri" pitchFamily="34" charset="0"/>
-                <a:ea typeface="Calibri" pitchFamily="34" charset="-122"/>
-                <a:cs typeface="Calibri" pitchFamily="34" charset="-120"/>
-              </a:rPr>
-              <a:t>That is what a well-named test buys you.</a:t>
-            </a:r>
-            <a:endParaRPr lang="en-US" sz="1500" dirty="0"/>
-          </a:p>
-        </p:txBody>
-      </p:sp>
-      <p:sp>
-        <p:nvSpPr>
-          <p:cNvPr id="9" name="Shape 7"/>
-          <p:cNvSpPr/>
-          <p:nvPr/>
-        </p:nvSpPr>
-        <p:spPr>
-          <a:xfrm>
-            <a:off x="640080" y="4663440"/>
-            <a:ext cx="10911535" cy="1554480"/>
-          </a:xfrm>
-          <a:prstGeom prst="roundRect">
-            <a:avLst>
-              <a:gd name="adj" fmla="val 2941"/>
-            </a:avLst>
-          </a:prstGeom>
-          <a:solidFill>
-            <a:srgbClr val="EDF2F6"/>
-          </a:solidFill>
-          <a:ln/>
-        </p:spPr>
-      </p:sp>
-      <p:sp>
-        <p:nvSpPr>
-          <p:cNvPr id="10" name="Text 8"/>
-          <p:cNvSpPr/>
-          <p:nvPr/>
-        </p:nvSpPr>
-        <p:spPr>
-          <a:xfrm>
-            <a:off x="1005840" y="4846320"/>
-            <a:ext cx="10149840" cy="384048"/>
-          </a:xfrm>
-          <a:prstGeom prst="rect">
-            <a:avLst/>
-          </a:prstGeom>
-          <a:noFill/>
-          <a:ln/>
-        </p:spPr>
-        <p:txBody>
-          <a:bodyPr wrap="square" lIns="0" tIns="0" rIns="0" bIns="0" rtlCol="0" anchor="ctr"/>
-          <a:lstStyle/>
-          <a:p>
-            <a:pPr indent="0" marL="0">
-              <a:buNone/>
-            </a:pPr>
-            <a:r>
-              <a:rPr lang="en-US" sz="1800" b="1" dirty="0">
-                <a:solidFill>
-                  <a:srgbClr val="0E2233"/>
-                </a:solidFill>
-                <a:latin typeface="Arial" pitchFamily="34" charset="0"/>
-                <a:ea typeface="Arial" pitchFamily="34" charset="-122"/>
-                <a:cs typeface="Arial" pitchFamily="34" charset="-120"/>
-              </a:rPr>
-              <a:t>This is the moment CI is actually for.</a:t>
-            </a:r>
-            <a:endParaRPr lang="en-US" sz="1800" dirty="0"/>
-          </a:p>
-        </p:txBody>
-      </p:sp>
-      <p:sp>
-        <p:nvSpPr>
-          <p:cNvPr id="11" name="Text 9"/>
-          <p:cNvSpPr/>
-          <p:nvPr/>
-        </p:nvSpPr>
-        <p:spPr>
-          <a:xfrm>
-            <a:off x="1005840" y="5257800"/>
-            <a:ext cx="10149840" cy="777240"/>
-          </a:xfrm>
-          <a:prstGeom prst="rect">
-            <a:avLst/>
-          </a:prstGeom>
-          <a:noFill/>
-          <a:ln/>
-        </p:spPr>
-        <p:txBody>
-          <a:bodyPr wrap="square" lIns="0" tIns="0" rIns="0" bIns="0" rtlCol="0" anchor="t"/>
-          <a:lstStyle/>
-          <a:p>
-            <a:pPr indent="0" marL="0">
-              <a:lnSpc>
-                <a:spcPts val="2200"/>
-              </a:lnSpc>
-              <a:buNone/>
-            </a:pPr>
-            <a:r>
-              <a:rPr lang="en-US" sz="1500" dirty="0">
-                <a:solidFill>
-                  <a:srgbClr val="5E7789"/>
-                </a:solidFill>
-                <a:latin typeface="Calibri" pitchFamily="34" charset="0"/>
-                <a:ea typeface="Calibri" pitchFamily="34" charset="-122"/>
-                <a:cs typeface="Calibri" pitchFamily="34" charset="-120"/>
-              </a:rPr>
-              <a:t>Not after you merge — before. The check runs against the merged result, and you can make GitHub refuse the merge until it is green.</a:t>
-            </a:r>
-            <a:endParaRPr lang="en-US" sz="1500" dirty="0"/>
           </a:p>
         </p:txBody>
       </p:sp>
@@ -6074,7 +6335,7 @@
                 <a:ea typeface="Calibri" pitchFamily="34" charset="-122"/>
                 <a:cs typeface="Calibri" pitchFamily="34" charset="-120"/>
               </a:rPr>
-              <a:t>03-ROS2-CI-FULL.YML</a:t>
+              <a:t>LIVE  ·  OPEN THE PULL REQUEST</a:t>
             </a:r>
             <a:endParaRPr lang="en-US" sz="1100" dirty="0"/>
           </a:p>
@@ -6113,7 +6374,7 @@
                 <a:ea typeface="Arial" pitchFamily="34" charset="-122"/>
                 <a:cs typeface="Arial" pitchFamily="34" charset="-120"/>
               </a:rPr>
-              <a:t>What a pipeline looks like after a year</a:t>
+              <a:t>A good failure tells you what broke, in English</a:t>
             </a:r>
             <a:endParaRPr lang="en-US" sz="3400" dirty="0"/>
           </a:p>
@@ -6127,12 +6388,260 @@
         </p:nvSpPr>
         <p:spPr>
           <a:xfrm>
-            <a:off x="640080" y="1691640"/>
-            <a:ext cx="5349240" cy="2011680"/>
+            <a:off x="640080" y="1645920"/>
+            <a:ext cx="10908792" cy="1627632"/>
           </a:xfrm>
           <a:prstGeom prst="roundRect">
             <a:avLst>
-              <a:gd name="adj" fmla="val 2273"/>
+              <a:gd name="adj" fmla="val 4494"/>
+            </a:avLst>
+          </a:prstGeom>
+          <a:solidFill>
+            <a:srgbClr val="0E2233"/>
+          </a:solidFill>
+          <a:ln w="12700">
+            <a:solidFill>
+              <a:srgbClr val="2A4C66"/>
+            </a:solidFill>
+            <a:prstDash val="solid"/>
+          </a:ln>
+          <a:effectLst>
+            <a:outerShdw sx="100000" sy="100000" kx="0" ky="0" algn="bl" rotWithShape="0" blurRad="127000" dist="38100" dir="5400000">
+              <a:srgbClr val="0E2233">
+                <a:alpha val="18000"/>
+              </a:srgbClr>
+            </a:outerShdw>
+          </a:effectLst>
+        </p:spPr>
+      </p:sp>
+      <p:sp>
+        <p:nvSpPr>
+          <p:cNvPr id="5" name="Text 3"/>
+          <p:cNvSpPr/>
+          <p:nvPr/>
+        </p:nvSpPr>
+        <p:spPr>
+          <a:xfrm>
+            <a:off x="896112" y="1883664"/>
+            <a:ext cx="10396728" cy="1152144"/>
+          </a:xfrm>
+          <a:prstGeom prst="rect">
+            <a:avLst/>
+          </a:prstGeom>
+          <a:noFill/>
+          <a:ln/>
+        </p:spPr>
+        <p:txBody>
+          <a:bodyPr wrap="square" lIns="0" tIns="0" rIns="0" bIns="0" rtlCol="0" anchor="t"/>
+          <a:lstStyle/>
+          <a:p>
+            <a:pPr indent="0" marL="0">
+              <a:lnSpc>
+                <a:spcPts val="2268"/>
+              </a:lnSpc>
+              <a:buNone/>
+            </a:pPr>
+            <a:r>
+              <a:rPr lang="en-US" sz="1400" dirty="0">
+                <a:solidFill>
+                  <a:srgbClr val="FF6B71"/>
+                </a:solidFill>
+                <a:latin typeface="Courier New" pitchFamily="34" charset="0"/>
+                <a:ea typeface="Courier New" pitchFamily="34" charset="-122"/>
+                <a:cs typeface="Courier New" pitchFamily="34" charset="-120"/>
+              </a:rPr>
+              <a:t>FAILED test/test_safety.py::test_negative_value_is_saturated_symmetrically</a:t>
+            </a:r>
+            <a:endParaRPr lang="en-US" sz="1400" dirty="0"/>
+          </a:p>
+          <a:p>
+            <a:pPr indent="0" marL="0">
+              <a:lnSpc>
+                <a:spcPts val="2268"/>
+              </a:lnSpc>
+              <a:buNone/>
+            </a:pPr>
+            <a:r>
+              <a:rPr lang="en-US" sz="1400" dirty="0">
+                <a:solidFill>
+                  <a:srgbClr val="FF6B71"/>
+                </a:solidFill>
+                <a:latin typeface="Courier New" pitchFamily="34" charset="0"/>
+                <a:ea typeface="Courier New" pitchFamily="34" charset="-122"/>
+                <a:cs typeface="Courier New" pitchFamily="34" charset="-120"/>
+              </a:rPr>
+              <a:t>FAILED test/test_safety.py::test_clamp_twist_limits_both_axes_independently</a:t>
+            </a:r>
+            <a:endParaRPr lang="en-US" sz="1400" dirty="0"/>
+          </a:p>
+          <a:p>
+            <a:pPr indent="0" marL="0">
+              <a:lnSpc>
+                <a:spcPts val="2268"/>
+              </a:lnSpc>
+              <a:buNone/>
+            </a:pPr>
+            <a:endParaRPr lang="en-US" sz="1400" dirty="0"/>
+          </a:p>
+          <a:p>
+            <a:pPr indent="0" marL="0">
+              <a:lnSpc>
+                <a:spcPts val="2268"/>
+              </a:lnSpc>
+              <a:buNone/>
+            </a:pPr>
+            <a:r>
+              <a:rPr lang="en-US" sz="1400" dirty="0">
+                <a:solidFill>
+                  <a:srgbClr val="92AEC1"/>
+                </a:solidFill>
+                <a:latin typeface="Courier New" pitchFamily="34" charset="0"/>
+                <a:ea typeface="Courier New" pitchFamily="34" charset="-122"/>
+                <a:cs typeface="Courier New" pitchFamily="34" charset="-120"/>
+              </a:rPr>
+              <a:t>2 failed, 7 passed in 0.04s</a:t>
+            </a:r>
+            <a:endParaRPr lang="en-US" sz="1400" dirty="0"/>
+          </a:p>
+        </p:txBody>
+      </p:sp>
+      <p:sp>
+        <p:nvSpPr>
+          <p:cNvPr id="6" name="Shape 4"/>
+          <p:cNvSpPr/>
+          <p:nvPr/>
+        </p:nvSpPr>
+        <p:spPr>
+          <a:xfrm>
+            <a:off x="640080" y="3703320"/>
+            <a:ext cx="2286000" cy="384048"/>
+          </a:xfrm>
+          <a:prstGeom prst="roundRect">
+            <a:avLst>
+              <a:gd name="adj" fmla="val 119048"/>
+            </a:avLst>
+          </a:prstGeom>
+          <a:solidFill>
+            <a:srgbClr val="D9434B"/>
+          </a:solidFill>
+          <a:ln/>
+        </p:spPr>
+      </p:sp>
+      <p:sp>
+        <p:nvSpPr>
+          <p:cNvPr id="7" name="Text 5"/>
+          <p:cNvSpPr/>
+          <p:nvPr/>
+        </p:nvSpPr>
+        <p:spPr>
+          <a:xfrm>
+            <a:off x="640080" y="3703320"/>
+            <a:ext cx="2286000" cy="384048"/>
+          </a:xfrm>
+          <a:prstGeom prst="rect">
+            <a:avLst/>
+          </a:prstGeom>
+          <a:noFill/>
+          <a:ln/>
+        </p:spPr>
+        <p:txBody>
+          <a:bodyPr wrap="square" lIns="0" tIns="0" rIns="0" bIns="0" rtlCol="0" anchor="ctr"/>
+          <a:lstStyle/>
+          <a:p>
+            <a:pPr algn="ctr" indent="0" marL="0">
+              <a:buNone/>
+            </a:pPr>
+            <a:r>
+              <a:rPr lang="en-US" sz="1200" b="1" dirty="0">
+                <a:solidFill>
+                  <a:srgbClr val="FFFFFF"/>
+                </a:solidFill>
+                <a:latin typeface="Arial" pitchFamily="34" charset="0"/>
+                <a:ea typeface="Arial" pitchFamily="34" charset="-122"/>
+                <a:cs typeface="Arial" pitchFamily="34" charset="-120"/>
+              </a:rPr>
+              <a:t>✗  2 checks failed</a:t>
+            </a:r>
+            <a:endParaRPr lang="en-US" sz="1200" dirty="0"/>
+          </a:p>
+        </p:txBody>
+      </p:sp>
+      <p:sp>
+        <p:nvSpPr>
+          <p:cNvPr id="8" name="Text 6"/>
+          <p:cNvSpPr/>
+          <p:nvPr/>
+        </p:nvSpPr>
+        <p:spPr>
+          <a:xfrm>
+            <a:off x="3200400" y="3657600"/>
+            <a:ext cx="8321040" cy="777240"/>
+          </a:xfrm>
+          <a:prstGeom prst="rect">
+            <a:avLst/>
+          </a:prstGeom>
+          <a:noFill/>
+          <a:ln/>
+        </p:spPr>
+        <p:txBody>
+          <a:bodyPr wrap="square" lIns="0" tIns="0" rIns="0" bIns="0" rtlCol="0" anchor="ctr"/>
+          <a:lstStyle/>
+          <a:p>
+            <a:pPr indent="0" marL="0">
+              <a:lnSpc>
+                <a:spcPts val="2200"/>
+              </a:lnSpc>
+              <a:buNone/>
+            </a:pPr>
+            <a:r>
+              <a:rPr lang="en-US" sz="1500" i="1" dirty="0">
+                <a:solidFill>
+                  <a:srgbClr val="0E2233"/>
+                </a:solidFill>
+                <a:latin typeface="Calibri" pitchFamily="34" charset="0"/>
+                <a:ea typeface="Calibri" pitchFamily="34" charset="-122"/>
+                <a:cs typeface="Calibri" pitchFamily="34" charset="-120"/>
+              </a:rPr>
+              <a:t>It did not say "something broke". It named the behaviour that broke.</a:t>
+            </a:r>
+            <a:endParaRPr lang="en-US" sz="1500" dirty="0"/>
+          </a:p>
+          <a:p>
+            <a:pPr indent="0" marL="0">
+              <a:lnSpc>
+                <a:spcPts val="2200"/>
+              </a:lnSpc>
+              <a:buNone/>
+            </a:pPr>
+            <a:r>
+              <a:rPr lang="en-US" sz="1500" i="1" dirty="0">
+                <a:solidFill>
+                  <a:srgbClr val="0E2233"/>
+                </a:solidFill>
+                <a:latin typeface="Calibri" pitchFamily="34" charset="0"/>
+                <a:ea typeface="Calibri" pitchFamily="34" charset="-122"/>
+                <a:cs typeface="Calibri" pitchFamily="34" charset="-120"/>
+              </a:rPr>
+              <a:t>That is what a well-named test buys you.</a:t>
+            </a:r>
+            <a:endParaRPr lang="en-US" sz="1500" dirty="0"/>
+          </a:p>
+        </p:txBody>
+      </p:sp>
+      <p:sp>
+        <p:nvSpPr>
+          <p:cNvPr id="9" name="Shape 7"/>
+          <p:cNvSpPr/>
+          <p:nvPr/>
+        </p:nvSpPr>
+        <p:spPr>
+          <a:xfrm>
+            <a:off x="640080" y="4663440"/>
+            <a:ext cx="10911535" cy="1554480"/>
+          </a:xfrm>
+          <a:prstGeom prst="roundRect">
+            <a:avLst>
+              <a:gd name="adj" fmla="val 2941"/>
             </a:avLst>
           </a:prstGeom>
           <a:solidFill>
@@ -6143,97 +6652,38 @@
       </p:sp>
       <p:sp>
         <p:nvSpPr>
-          <p:cNvPr id="5" name="Shape 3"/>
-          <p:cNvSpPr/>
-          <p:nvPr/>
-        </p:nvSpPr>
-        <p:spPr>
-          <a:xfrm>
-            <a:off x="960120" y="1947672"/>
-            <a:ext cx="420624" cy="420624"/>
-          </a:xfrm>
-          <a:prstGeom prst="ellipse">
-            <a:avLst/>
-          </a:prstGeom>
-          <a:solidFill>
-            <a:srgbClr val="1FA971"/>
-          </a:solidFill>
-          <a:ln/>
-        </p:spPr>
-      </p:sp>
-      <p:sp>
-        <p:nvSpPr>
-          <p:cNvPr id="6" name="Text 4"/>
-          <p:cNvSpPr/>
-          <p:nvPr/>
-        </p:nvSpPr>
-        <p:spPr>
-          <a:xfrm>
-            <a:off x="960120" y="1947672"/>
-            <a:ext cx="420624" cy="420624"/>
-          </a:xfrm>
-          <a:prstGeom prst="rect">
-            <a:avLst/>
-          </a:prstGeom>
-          <a:noFill/>
-          <a:ln/>
-        </p:spPr>
-        <p:txBody>
-          <a:bodyPr wrap="square" lIns="0" tIns="0" rIns="0" bIns="0" rtlCol="0" anchor="ctr"/>
-          <a:lstStyle/>
-          <a:p>
-            <a:pPr algn="ctr" indent="0" marL="0">
-              <a:buNone/>
-            </a:pPr>
-            <a:r>
-              <a:rPr lang="en-US" sz="1500" b="1" dirty="0">
-                <a:solidFill>
-                  <a:srgbClr val="FFFFFF"/>
+          <p:cNvPr id="10" name="Text 8"/>
+          <p:cNvSpPr/>
+          <p:nvPr/>
+        </p:nvSpPr>
+        <p:spPr>
+          <a:xfrm>
+            <a:off x="1005840" y="4846320"/>
+            <a:ext cx="10149840" cy="384048"/>
+          </a:xfrm>
+          <a:prstGeom prst="rect">
+            <a:avLst/>
+          </a:prstGeom>
+          <a:noFill/>
+          <a:ln/>
+        </p:spPr>
+        <p:txBody>
+          <a:bodyPr wrap="square" lIns="0" tIns="0" rIns="0" bIns="0" rtlCol="0" anchor="ctr"/>
+          <a:lstStyle/>
+          <a:p>
+            <a:pPr indent="0" marL="0">
+              <a:buNone/>
+            </a:pPr>
+            <a:r>
+              <a:rPr lang="en-US" sz="1800" b="1" dirty="0">
+                <a:solidFill>
+                  <a:srgbClr val="0E2233"/>
                 </a:solidFill>
                 <a:latin typeface="Arial" pitchFamily="34" charset="0"/>
                 <a:ea typeface="Arial" pitchFamily="34" charset="-122"/>
                 <a:cs typeface="Arial" pitchFamily="34" charset="-120"/>
               </a:rPr>
-              <a:t>1</a:t>
-            </a:r>
-            <a:endParaRPr lang="en-US" sz="1500" dirty="0"/>
-          </a:p>
-        </p:txBody>
-      </p:sp>
-      <p:sp>
-        <p:nvSpPr>
-          <p:cNvPr id="7" name="Text 5"/>
-          <p:cNvSpPr/>
-          <p:nvPr/>
-        </p:nvSpPr>
-        <p:spPr>
-          <a:xfrm>
-            <a:off x="1554480" y="1929384"/>
-            <a:ext cx="4114800" cy="457200"/>
-          </a:xfrm>
-          <a:prstGeom prst="rect">
-            <a:avLst/>
-          </a:prstGeom>
-          <a:noFill/>
-          <a:ln/>
-        </p:spPr>
-        <p:txBody>
-          <a:bodyPr wrap="square" lIns="0" tIns="0" rIns="0" bIns="0" rtlCol="0" anchor="ctr"/>
-          <a:lstStyle/>
-          <a:p>
-            <a:pPr indent="0" marL="0">
-              <a:buNone/>
-            </a:pPr>
-            <a:r>
-              <a:rPr lang="en-US" sz="1800" b="1" dirty="0">
-                <a:solidFill>
-                  <a:srgbClr val="0E2233"/>
-                </a:solidFill>
-                <a:latin typeface="Arial" pitchFamily="34" charset="0"/>
-                <a:ea typeface="Arial" pitchFamily="34" charset="-122"/>
-                <a:cs typeface="Arial" pitchFamily="34" charset="-120"/>
-              </a:rPr>
-              <a:t>A separate lint job</a:t>
+              <a:t>This is the moment CI is actually for.</a:t>
             </a:r>
             <a:endParaRPr lang="en-US" sz="1800" dirty="0"/>
           </a:p>
@@ -6241,14 +6691,14 @@
       </p:sp>
       <p:sp>
         <p:nvSpPr>
-          <p:cNvPr id="8" name="Text 6"/>
-          <p:cNvSpPr/>
-          <p:nvPr/>
-        </p:nvSpPr>
-        <p:spPr>
-          <a:xfrm>
-            <a:off x="960120" y="2514600"/>
-            <a:ext cx="4709160" cy="1097280"/>
+          <p:cNvPr id="11" name="Text 9"/>
+          <p:cNvSpPr/>
+          <p:nvPr/>
+        </p:nvSpPr>
+        <p:spPr>
+          <a:xfrm>
+            <a:off x="1005840" y="5257800"/>
+            <a:ext cx="10149840" cy="777240"/>
           </a:xfrm>
           <a:prstGeom prst="rect">
             <a:avLst/>
@@ -6262,12 +6712,12 @@
           <a:p>
             <a:pPr indent="0" marL="0">
               <a:lnSpc>
-                <a:spcPts val="1900"/>
+                <a:spcPts val="2200"/>
               </a:lnSpc>
               <a:buNone/>
             </a:pPr>
             <a:r>
-              <a:rPr lang="en-US" sz="1350" dirty="0">
+              <a:rPr lang="en-US" sz="1500" dirty="0">
                 <a:solidFill>
                   <a:srgbClr val="5E7789"/>
                 </a:solidFill>
@@ -6275,534 +6725,9 @@
                 <a:ea typeface="Calibri" pitchFamily="34" charset="-122"/>
                 <a:cs typeface="Calibri" pitchFamily="34" charset="-120"/>
               </a:rPr>
-              <a:t>Runs in parallel with the build. Style feedback in 40 seconds instead of 6 minutes. Jobs are parallel by default — free speed.</a:t>
-            </a:r>
-            <a:endParaRPr lang="en-US" sz="1350" dirty="0"/>
-          </a:p>
-        </p:txBody>
-      </p:sp>
-      <p:sp>
-        <p:nvSpPr>
-          <p:cNvPr id="9" name="Shape 7"/>
-          <p:cNvSpPr/>
-          <p:nvPr/>
-        </p:nvSpPr>
-        <p:spPr>
-          <a:xfrm>
-            <a:off x="6217920" y="1691640"/>
-            <a:ext cx="5349240" cy="2011680"/>
-          </a:xfrm>
-          <a:prstGeom prst="roundRect">
-            <a:avLst>
-              <a:gd name="adj" fmla="val 2273"/>
-            </a:avLst>
-          </a:prstGeom>
-          <a:solidFill>
-            <a:srgbClr val="EDF2F6"/>
-          </a:solidFill>
-          <a:ln/>
-        </p:spPr>
-      </p:sp>
-      <p:sp>
-        <p:nvSpPr>
-          <p:cNvPr id="10" name="Shape 8"/>
-          <p:cNvSpPr/>
-          <p:nvPr/>
-        </p:nvSpPr>
-        <p:spPr>
-          <a:xfrm>
-            <a:off x="6537960" y="1947672"/>
-            <a:ext cx="420624" cy="420624"/>
-          </a:xfrm>
-          <a:prstGeom prst="ellipse">
-            <a:avLst/>
-          </a:prstGeom>
-          <a:solidFill>
-            <a:srgbClr val="1FA971"/>
-          </a:solidFill>
-          <a:ln/>
-        </p:spPr>
-      </p:sp>
-      <p:sp>
-        <p:nvSpPr>
-          <p:cNvPr id="11" name="Text 9"/>
-          <p:cNvSpPr/>
-          <p:nvPr/>
-        </p:nvSpPr>
-        <p:spPr>
-          <a:xfrm>
-            <a:off x="6537960" y="1947672"/>
-            <a:ext cx="420624" cy="420624"/>
-          </a:xfrm>
-          <a:prstGeom prst="rect">
-            <a:avLst/>
-          </a:prstGeom>
-          <a:noFill/>
-          <a:ln/>
-        </p:spPr>
-        <p:txBody>
-          <a:bodyPr wrap="square" lIns="0" tIns="0" rIns="0" bIns="0" rtlCol="0" anchor="ctr"/>
-          <a:lstStyle/>
-          <a:p>
-            <a:pPr algn="ctr" indent="0" marL="0">
-              <a:buNone/>
-            </a:pPr>
-            <a:r>
-              <a:rPr lang="en-US" sz="1500" b="1" dirty="0">
-                <a:solidFill>
-                  <a:srgbClr val="FFFFFF"/>
-                </a:solidFill>
-                <a:latin typeface="Arial" pitchFamily="34" charset="0"/>
-                <a:ea typeface="Arial" pitchFamily="34" charset="-122"/>
-                <a:cs typeface="Arial" pitchFamily="34" charset="-120"/>
-              </a:rPr>
-              <a:t>2</a:t>
+              <a:t>Not after you merge — before. The check runs against the merged result, and you can make GitHub refuse the merge until it is green.</a:t>
             </a:r>
             <a:endParaRPr lang="en-US" sz="1500" dirty="0"/>
-          </a:p>
-        </p:txBody>
-      </p:sp>
-      <p:sp>
-        <p:nvSpPr>
-          <p:cNvPr id="12" name="Text 10"/>
-          <p:cNvSpPr/>
-          <p:nvPr/>
-        </p:nvSpPr>
-        <p:spPr>
-          <a:xfrm>
-            <a:off x="7132320" y="1929384"/>
-            <a:ext cx="4114800" cy="457200"/>
-          </a:xfrm>
-          <a:prstGeom prst="rect">
-            <a:avLst/>
-          </a:prstGeom>
-          <a:noFill/>
-          <a:ln/>
-        </p:spPr>
-        <p:txBody>
-          <a:bodyPr wrap="square" lIns="0" tIns="0" rIns="0" bIns="0" rtlCol="0" anchor="ctr"/>
-          <a:lstStyle/>
-          <a:p>
-            <a:pPr indent="0" marL="0">
-              <a:buNone/>
-            </a:pPr>
-            <a:r>
-              <a:rPr lang="en-US" sz="1800" b="1" dirty="0">
-                <a:solidFill>
-                  <a:srgbClr val="0E2233"/>
-                </a:solidFill>
-                <a:latin typeface="Arial" pitchFamily="34" charset="0"/>
-                <a:ea typeface="Arial" pitchFamily="34" charset="-122"/>
-                <a:cs typeface="Arial" pitchFamily="34" charset="-120"/>
-              </a:rPr>
-              <a:t>A matrix</a:t>
-            </a:r>
-            <a:endParaRPr lang="en-US" sz="1800" dirty="0"/>
-          </a:p>
-        </p:txBody>
-      </p:sp>
-      <p:sp>
-        <p:nvSpPr>
-          <p:cNvPr id="13" name="Text 11"/>
-          <p:cNvSpPr/>
-          <p:nvPr/>
-        </p:nvSpPr>
-        <p:spPr>
-          <a:xfrm>
-            <a:off x="6537960" y="2514600"/>
-            <a:ext cx="4709160" cy="1097280"/>
-          </a:xfrm>
-          <a:prstGeom prst="rect">
-            <a:avLst/>
-          </a:prstGeom>
-          <a:noFill/>
-          <a:ln/>
-        </p:spPr>
-        <p:txBody>
-          <a:bodyPr wrap="square" lIns="0" tIns="0" rIns="0" bIns="0" rtlCol="0" anchor="t"/>
-          <a:lstStyle/>
-          <a:p>
-            <a:pPr indent="0" marL="0">
-              <a:lnSpc>
-                <a:spcPts val="1900"/>
-              </a:lnSpc>
-              <a:buNone/>
-            </a:pPr>
-            <a:r>
-              <a:rPr lang="en-US" sz="1350" dirty="0">
-                <a:solidFill>
-                  <a:srgbClr val="5E7789"/>
-                </a:solidFill>
-                <a:latin typeface="Calibri" pitchFamily="34" charset="0"/>
-                <a:ea typeface="Calibri" pitchFamily="34" charset="-122"/>
-                <a:cs typeface="Calibri" pitchFamily="34" charset="-120"/>
-              </a:rPr>
-              <a:t>One file, several ROS distros. This is how you find out you have broken the distro you are migrating to, before migration week.</a:t>
-            </a:r>
-            <a:endParaRPr lang="en-US" sz="1350" dirty="0"/>
-          </a:p>
-        </p:txBody>
-      </p:sp>
-      <p:sp>
-        <p:nvSpPr>
-          <p:cNvPr id="14" name="Shape 12"/>
-          <p:cNvSpPr/>
-          <p:nvPr/>
-        </p:nvSpPr>
-        <p:spPr>
-          <a:xfrm>
-            <a:off x="640080" y="3904488"/>
-            <a:ext cx="5349240" cy="2011680"/>
-          </a:xfrm>
-          <a:prstGeom prst="roundRect">
-            <a:avLst>
-              <a:gd name="adj" fmla="val 2273"/>
-            </a:avLst>
-          </a:prstGeom>
-          <a:solidFill>
-            <a:srgbClr val="EDF2F6"/>
-          </a:solidFill>
-          <a:ln/>
-        </p:spPr>
-      </p:sp>
-      <p:sp>
-        <p:nvSpPr>
-          <p:cNvPr id="15" name="Shape 13"/>
-          <p:cNvSpPr/>
-          <p:nvPr/>
-        </p:nvSpPr>
-        <p:spPr>
-          <a:xfrm>
-            <a:off x="960120" y="4160520"/>
-            <a:ext cx="420624" cy="420624"/>
-          </a:xfrm>
-          <a:prstGeom prst="ellipse">
-            <a:avLst/>
-          </a:prstGeom>
-          <a:solidFill>
-            <a:srgbClr val="1FA971"/>
-          </a:solidFill>
-          <a:ln/>
-        </p:spPr>
-      </p:sp>
-      <p:sp>
-        <p:nvSpPr>
-          <p:cNvPr id="16" name="Text 14"/>
-          <p:cNvSpPr/>
-          <p:nvPr/>
-        </p:nvSpPr>
-        <p:spPr>
-          <a:xfrm>
-            <a:off x="960120" y="4160520"/>
-            <a:ext cx="420624" cy="420624"/>
-          </a:xfrm>
-          <a:prstGeom prst="rect">
-            <a:avLst/>
-          </a:prstGeom>
-          <a:noFill/>
-          <a:ln/>
-        </p:spPr>
-        <p:txBody>
-          <a:bodyPr wrap="square" lIns="0" tIns="0" rIns="0" bIns="0" rtlCol="0" anchor="ctr"/>
-          <a:lstStyle/>
-          <a:p>
-            <a:pPr algn="ctr" indent="0" marL="0">
-              <a:buNone/>
-            </a:pPr>
-            <a:r>
-              <a:rPr lang="en-US" sz="1500" b="1" dirty="0">
-                <a:solidFill>
-                  <a:srgbClr val="FFFFFF"/>
-                </a:solidFill>
-                <a:latin typeface="Arial" pitchFamily="34" charset="0"/>
-                <a:ea typeface="Arial" pitchFamily="34" charset="-122"/>
-                <a:cs typeface="Arial" pitchFamily="34" charset="-120"/>
-              </a:rPr>
-              <a:t>3</a:t>
-            </a:r>
-            <a:endParaRPr lang="en-US" sz="1500" dirty="0"/>
-          </a:p>
-        </p:txBody>
-      </p:sp>
-      <p:sp>
-        <p:nvSpPr>
-          <p:cNvPr id="17" name="Text 15"/>
-          <p:cNvSpPr/>
-          <p:nvPr/>
-        </p:nvSpPr>
-        <p:spPr>
-          <a:xfrm>
-            <a:off x="1554480" y="4142232"/>
-            <a:ext cx="4114800" cy="457200"/>
-          </a:xfrm>
-          <a:prstGeom prst="rect">
-            <a:avLst/>
-          </a:prstGeom>
-          <a:noFill/>
-          <a:ln/>
-        </p:spPr>
-        <p:txBody>
-          <a:bodyPr wrap="square" lIns="0" tIns="0" rIns="0" bIns="0" rtlCol="0" anchor="ctr"/>
-          <a:lstStyle/>
-          <a:p>
-            <a:pPr indent="0" marL="0">
-              <a:buNone/>
-            </a:pPr>
-            <a:r>
-              <a:rPr lang="en-US" sz="1800" b="1" dirty="0">
-                <a:solidFill>
-                  <a:srgbClr val="0E2233"/>
-                </a:solidFill>
-                <a:latin typeface="Arial" pitchFamily="34" charset="0"/>
-                <a:ea typeface="Arial" pitchFamily="34" charset="-122"/>
-                <a:cs typeface="Arial" pitchFamily="34" charset="-120"/>
-              </a:rPr>
-              <a:t>Artifacts</a:t>
-            </a:r>
-            <a:endParaRPr lang="en-US" sz="1800" dirty="0"/>
-          </a:p>
-        </p:txBody>
-      </p:sp>
-      <p:sp>
-        <p:nvSpPr>
-          <p:cNvPr id="18" name="Text 16"/>
-          <p:cNvSpPr/>
-          <p:nvPr/>
-        </p:nvSpPr>
-        <p:spPr>
-          <a:xfrm>
-            <a:off x="960120" y="4727448"/>
-            <a:ext cx="4709160" cy="1097280"/>
-          </a:xfrm>
-          <a:prstGeom prst="rect">
-            <a:avLst/>
-          </a:prstGeom>
-          <a:noFill/>
-          <a:ln/>
-        </p:spPr>
-        <p:txBody>
-          <a:bodyPr wrap="square" lIns="0" tIns="0" rIns="0" bIns="0" rtlCol="0" anchor="t"/>
-          <a:lstStyle/>
-          <a:p>
-            <a:pPr indent="0" marL="0">
-              <a:lnSpc>
-                <a:spcPts val="1900"/>
-              </a:lnSpc>
-              <a:buNone/>
-            </a:pPr>
-            <a:r>
-              <a:rPr lang="en-US" sz="1350" dirty="0">
-                <a:solidFill>
-                  <a:srgbClr val="5E7789"/>
-                </a:solidFill>
-                <a:latin typeface="Calibri" pitchFamily="34" charset="0"/>
-                <a:ea typeface="Calibri" pitchFamily="34" charset="-122"/>
-                <a:cs typeface="Calibri" pitchFamily="34" charset="-120"/>
-              </a:rPr>
-              <a:t>upload-artifact with if: always() — the test XML is downloadable from the run page precisely when the run failed.</a:t>
-            </a:r>
-            <a:endParaRPr lang="en-US" sz="1350" dirty="0"/>
-          </a:p>
-        </p:txBody>
-      </p:sp>
-      <p:sp>
-        <p:nvSpPr>
-          <p:cNvPr id="19" name="Shape 17"/>
-          <p:cNvSpPr/>
-          <p:nvPr/>
-        </p:nvSpPr>
-        <p:spPr>
-          <a:xfrm>
-            <a:off x="6217920" y="3904488"/>
-            <a:ext cx="5349240" cy="2011680"/>
-          </a:xfrm>
-          <a:prstGeom prst="roundRect">
-            <a:avLst>
-              <a:gd name="adj" fmla="val 2273"/>
-            </a:avLst>
-          </a:prstGeom>
-          <a:solidFill>
-            <a:srgbClr val="EDF2F6"/>
-          </a:solidFill>
-          <a:ln/>
-        </p:spPr>
-      </p:sp>
-      <p:sp>
-        <p:nvSpPr>
-          <p:cNvPr id="20" name="Shape 18"/>
-          <p:cNvSpPr/>
-          <p:nvPr/>
-        </p:nvSpPr>
-        <p:spPr>
-          <a:xfrm>
-            <a:off x="6537960" y="4160520"/>
-            <a:ext cx="420624" cy="420624"/>
-          </a:xfrm>
-          <a:prstGeom prst="ellipse">
-            <a:avLst/>
-          </a:prstGeom>
-          <a:solidFill>
-            <a:srgbClr val="1FA971"/>
-          </a:solidFill>
-          <a:ln/>
-        </p:spPr>
-      </p:sp>
-      <p:sp>
-        <p:nvSpPr>
-          <p:cNvPr id="21" name="Text 19"/>
-          <p:cNvSpPr/>
-          <p:nvPr/>
-        </p:nvSpPr>
-        <p:spPr>
-          <a:xfrm>
-            <a:off x="6537960" y="4160520"/>
-            <a:ext cx="420624" cy="420624"/>
-          </a:xfrm>
-          <a:prstGeom prst="rect">
-            <a:avLst/>
-          </a:prstGeom>
-          <a:noFill/>
-          <a:ln/>
-        </p:spPr>
-        <p:txBody>
-          <a:bodyPr wrap="square" lIns="0" tIns="0" rIns="0" bIns="0" rtlCol="0" anchor="ctr"/>
-          <a:lstStyle/>
-          <a:p>
-            <a:pPr algn="ctr" indent="0" marL="0">
-              <a:buNone/>
-            </a:pPr>
-            <a:r>
-              <a:rPr lang="en-US" sz="1500" b="1" dirty="0">
-                <a:solidFill>
-                  <a:srgbClr val="FFFFFF"/>
-                </a:solidFill>
-                <a:latin typeface="Arial" pitchFamily="34" charset="0"/>
-                <a:ea typeface="Arial" pitchFamily="34" charset="-122"/>
-                <a:cs typeface="Arial" pitchFamily="34" charset="-120"/>
-              </a:rPr>
-              <a:t>4</a:t>
-            </a:r>
-            <a:endParaRPr lang="en-US" sz="1500" dirty="0"/>
-          </a:p>
-        </p:txBody>
-      </p:sp>
-      <p:sp>
-        <p:nvSpPr>
-          <p:cNvPr id="22" name="Text 20"/>
-          <p:cNvSpPr/>
-          <p:nvPr/>
-        </p:nvSpPr>
-        <p:spPr>
-          <a:xfrm>
-            <a:off x="7132320" y="4142232"/>
-            <a:ext cx="4114800" cy="457200"/>
-          </a:xfrm>
-          <a:prstGeom prst="rect">
-            <a:avLst/>
-          </a:prstGeom>
-          <a:noFill/>
-          <a:ln/>
-        </p:spPr>
-        <p:txBody>
-          <a:bodyPr wrap="square" lIns="0" tIns="0" rIns="0" bIns="0" rtlCol="0" anchor="ctr"/>
-          <a:lstStyle/>
-          <a:p>
-            <a:pPr indent="0" marL="0">
-              <a:buNone/>
-            </a:pPr>
-            <a:r>
-              <a:rPr lang="en-US" sz="1800" b="1" dirty="0">
-                <a:solidFill>
-                  <a:srgbClr val="0E2233"/>
-                </a:solidFill>
-                <a:latin typeface="Arial" pitchFamily="34" charset="0"/>
-                <a:ea typeface="Arial" pitchFamily="34" charset="-122"/>
-                <a:cs typeface="Arial" pitchFamily="34" charset="-120"/>
-              </a:rPr>
-              <a:t>Concurrency</a:t>
-            </a:r>
-            <a:endParaRPr lang="en-US" sz="1800" dirty="0"/>
-          </a:p>
-        </p:txBody>
-      </p:sp>
-      <p:sp>
-        <p:nvSpPr>
-          <p:cNvPr id="23" name="Text 21"/>
-          <p:cNvSpPr/>
-          <p:nvPr/>
-        </p:nvSpPr>
-        <p:spPr>
-          <a:xfrm>
-            <a:off x="6537960" y="4727448"/>
-            <a:ext cx="4709160" cy="1097280"/>
-          </a:xfrm>
-          <a:prstGeom prst="rect">
-            <a:avLst/>
-          </a:prstGeom>
-          <a:noFill/>
-          <a:ln/>
-        </p:spPr>
-        <p:txBody>
-          <a:bodyPr wrap="square" lIns="0" tIns="0" rIns="0" bIns="0" rtlCol="0" anchor="t"/>
-          <a:lstStyle/>
-          <a:p>
-            <a:pPr indent="0" marL="0">
-              <a:lnSpc>
-                <a:spcPts val="1900"/>
-              </a:lnSpc>
-              <a:buNone/>
-            </a:pPr>
-            <a:r>
-              <a:rPr lang="en-US" sz="1350" dirty="0">
-                <a:solidFill>
-                  <a:srgbClr val="5E7789"/>
-                </a:solidFill>
-                <a:latin typeface="Calibri" pitchFamily="34" charset="0"/>
-                <a:ea typeface="Calibri" pitchFamily="34" charset="-122"/>
-                <a:cs typeface="Calibri" pitchFamily="34" charset="-120"/>
-              </a:rPr>
-              <a:t>Push twice in a minute and the first run is cancelled instead of queueing. Saves minutes and patience.</a:t>
-            </a:r>
-            <a:endParaRPr lang="en-US" sz="1350" dirty="0"/>
-          </a:p>
-        </p:txBody>
-      </p:sp>
-      <p:sp>
-        <p:nvSpPr>
-          <p:cNvPr id="24" name="Text 22"/>
-          <p:cNvSpPr/>
-          <p:nvPr/>
-        </p:nvSpPr>
-        <p:spPr>
-          <a:xfrm>
-            <a:off x="640080" y="6144768"/>
-            <a:ext cx="10911535" cy="365760"/>
-          </a:xfrm>
-          <a:prstGeom prst="rect">
-            <a:avLst/>
-          </a:prstGeom>
-          <a:noFill/>
-          <a:ln/>
-        </p:spPr>
-        <p:txBody>
-          <a:bodyPr wrap="square" lIns="0" tIns="0" rIns="0" bIns="0" rtlCol="0" anchor="ctr"/>
-          <a:lstStyle/>
-          <a:p>
-            <a:pPr indent="0" marL="0">
-              <a:buNone/>
-            </a:pPr>
-            <a:r>
-              <a:rPr lang="en-US" sz="1250" i="1" dirty="0">
-                <a:solidFill>
-                  <a:srgbClr val="5E7789"/>
-                </a:solidFill>
-                <a:latin typeface="Calibri" pitchFamily="34" charset="0"/>
-                <a:ea typeface="Calibri" pitchFamily="34" charset="-122"/>
-                <a:cs typeface="Calibri" pitchFamily="34" charset="-120"/>
-              </a:rPr>
-              <a:t>Scroll the file, name the four. Do not read it line by line — you will run out of clock.</a:t>
-            </a:r>
-            <a:endParaRPr lang="en-US" sz="1250" dirty="0"/>
           </a:p>
         </p:txBody>
       </p:sp>
@@ -6817,6 +6742,803 @@
 <file path=ppt/slides/slide17.xml><?xml version="1.0" encoding="utf-8"?>
 <p:sld xmlns:a="http://schemas.openxmlformats.org/drawingml/2006/main" xmlns:r="http://schemas.openxmlformats.org/officeDocument/2006/relationships" xmlns:p="http://schemas.openxmlformats.org/presentationml/2006/main">
   <p:cSld name="Slide 17">
+    <p:bg>
+      <p:bgPr>
+        <a:solidFill>
+          <a:srgbClr val="FFFFFF"/>
+        </a:solidFill>
+      </p:bgPr>
+    </p:bg>
+    <p:spTree>
+      <p:nvGrpSpPr>
+        <p:cNvPr id="1" name=""/>
+        <p:cNvGrpSpPr/>
+        <p:nvPr/>
+      </p:nvGrpSpPr>
+      <p:grpSpPr>
+        <a:xfrm>
+          <a:off x="0" y="0"/>
+          <a:ext cx="0" cy="0"/>
+          <a:chOff x="0" y="0"/>
+          <a:chExt cx="0" cy="0"/>
+        </a:xfrm>
+      </p:grpSpPr>
+      <p:sp>
+        <p:nvSpPr>
+          <p:cNvPr id="2" name="Text 0"/>
+          <p:cNvSpPr/>
+          <p:nvPr/>
+        </p:nvSpPr>
+        <p:spPr>
+          <a:xfrm>
+            <a:off x="640080" y="146304"/>
+            <a:ext cx="10911535" cy="274320"/>
+          </a:xfrm>
+          <a:prstGeom prst="rect">
+            <a:avLst/>
+          </a:prstGeom>
+          <a:noFill/>
+          <a:ln/>
+        </p:spPr>
+        <p:txBody>
+          <a:bodyPr wrap="square" lIns="0" tIns="0" rIns="0" bIns="0" rtlCol="0" anchor="ctr"/>
+          <a:lstStyle/>
+          <a:p>
+            <a:pPr indent="0" marL="0">
+              <a:buNone/>
+            </a:pPr>
+            <a:r>
+              <a:rPr lang="en-US" sz="1100" b="1" spc="200" kern="0" dirty="0">
+                <a:solidFill>
+                  <a:srgbClr val="5E7789"/>
+                </a:solidFill>
+                <a:latin typeface="Calibri" pitchFamily="34" charset="0"/>
+                <a:ea typeface="Calibri" pitchFamily="34" charset="-122"/>
+                <a:cs typeface="Calibri" pitchFamily="34" charset="-120"/>
+              </a:rPr>
+              <a:t>03-ROS2-CI-FULL.YML</a:t>
+            </a:r>
+            <a:endParaRPr lang="en-US" sz="1100" dirty="0"/>
+          </a:p>
+        </p:txBody>
+      </p:sp>
+      <p:sp>
+        <p:nvSpPr>
+          <p:cNvPr id="3" name="Text 1"/>
+          <p:cNvSpPr/>
+          <p:nvPr/>
+        </p:nvSpPr>
+        <p:spPr>
+          <a:xfrm>
+            <a:off x="640080" y="411480"/>
+            <a:ext cx="10911535" cy="777240"/>
+          </a:xfrm>
+          <a:prstGeom prst="rect">
+            <a:avLst/>
+          </a:prstGeom>
+          <a:noFill/>
+          <a:ln/>
+        </p:spPr>
+        <p:txBody>
+          <a:bodyPr wrap="square" lIns="0" tIns="0" rIns="0" bIns="0" rtlCol="0" anchor="ctr"/>
+          <a:lstStyle/>
+          <a:p>
+            <a:pPr algn="l" indent="0" marL="0">
+              <a:buNone/>
+            </a:pPr>
+            <a:r>
+              <a:rPr lang="en-US" sz="3400" b="1" dirty="0">
+                <a:solidFill>
+                  <a:srgbClr val="0E2233"/>
+                </a:solidFill>
+                <a:latin typeface="Arial" pitchFamily="34" charset="0"/>
+                <a:ea typeface="Arial" pitchFamily="34" charset="-122"/>
+                <a:cs typeface="Arial" pitchFamily="34" charset="-120"/>
+              </a:rPr>
+              <a:t>What a pipeline looks like after a year</a:t>
+            </a:r>
+            <a:endParaRPr lang="en-US" sz="3400" dirty="0"/>
+          </a:p>
+        </p:txBody>
+      </p:sp>
+      <p:sp>
+        <p:nvSpPr>
+          <p:cNvPr id="4" name="Shape 2"/>
+          <p:cNvSpPr/>
+          <p:nvPr/>
+        </p:nvSpPr>
+        <p:spPr>
+          <a:xfrm>
+            <a:off x="640080" y="1691640"/>
+            <a:ext cx="5349240" cy="2011680"/>
+          </a:xfrm>
+          <a:prstGeom prst="roundRect">
+            <a:avLst>
+              <a:gd name="adj" fmla="val 2273"/>
+            </a:avLst>
+          </a:prstGeom>
+          <a:solidFill>
+            <a:srgbClr val="EDF2F6"/>
+          </a:solidFill>
+          <a:ln/>
+        </p:spPr>
+      </p:sp>
+      <p:sp>
+        <p:nvSpPr>
+          <p:cNvPr id="5" name="Shape 3"/>
+          <p:cNvSpPr/>
+          <p:nvPr/>
+        </p:nvSpPr>
+        <p:spPr>
+          <a:xfrm>
+            <a:off x="960120" y="1947672"/>
+            <a:ext cx="420624" cy="420624"/>
+          </a:xfrm>
+          <a:prstGeom prst="ellipse">
+            <a:avLst/>
+          </a:prstGeom>
+          <a:solidFill>
+            <a:srgbClr val="1FA971"/>
+          </a:solidFill>
+          <a:ln/>
+        </p:spPr>
+      </p:sp>
+      <p:sp>
+        <p:nvSpPr>
+          <p:cNvPr id="6" name="Text 4"/>
+          <p:cNvSpPr/>
+          <p:nvPr/>
+        </p:nvSpPr>
+        <p:spPr>
+          <a:xfrm>
+            <a:off x="960120" y="1947672"/>
+            <a:ext cx="420624" cy="420624"/>
+          </a:xfrm>
+          <a:prstGeom prst="rect">
+            <a:avLst/>
+          </a:prstGeom>
+          <a:noFill/>
+          <a:ln/>
+        </p:spPr>
+        <p:txBody>
+          <a:bodyPr wrap="square" lIns="0" tIns="0" rIns="0" bIns="0" rtlCol="0" anchor="ctr"/>
+          <a:lstStyle/>
+          <a:p>
+            <a:pPr algn="ctr" indent="0" marL="0">
+              <a:buNone/>
+            </a:pPr>
+            <a:r>
+              <a:rPr lang="en-US" sz="1500" b="1" dirty="0">
+                <a:solidFill>
+                  <a:srgbClr val="FFFFFF"/>
+                </a:solidFill>
+                <a:latin typeface="Arial" pitchFamily="34" charset="0"/>
+                <a:ea typeface="Arial" pitchFamily="34" charset="-122"/>
+                <a:cs typeface="Arial" pitchFamily="34" charset="-120"/>
+              </a:rPr>
+              <a:t>1</a:t>
+            </a:r>
+            <a:endParaRPr lang="en-US" sz="1500" dirty="0"/>
+          </a:p>
+        </p:txBody>
+      </p:sp>
+      <p:sp>
+        <p:nvSpPr>
+          <p:cNvPr id="7" name="Text 5"/>
+          <p:cNvSpPr/>
+          <p:nvPr/>
+        </p:nvSpPr>
+        <p:spPr>
+          <a:xfrm>
+            <a:off x="1554480" y="1929384"/>
+            <a:ext cx="4114800" cy="457200"/>
+          </a:xfrm>
+          <a:prstGeom prst="rect">
+            <a:avLst/>
+          </a:prstGeom>
+          <a:noFill/>
+          <a:ln/>
+        </p:spPr>
+        <p:txBody>
+          <a:bodyPr wrap="square" lIns="0" tIns="0" rIns="0" bIns="0" rtlCol="0" anchor="ctr"/>
+          <a:lstStyle/>
+          <a:p>
+            <a:pPr indent="0" marL="0">
+              <a:buNone/>
+            </a:pPr>
+            <a:r>
+              <a:rPr lang="en-US" sz="1800" b="1" dirty="0">
+                <a:solidFill>
+                  <a:srgbClr val="0E2233"/>
+                </a:solidFill>
+                <a:latin typeface="Arial" pitchFamily="34" charset="0"/>
+                <a:ea typeface="Arial" pitchFamily="34" charset="-122"/>
+                <a:cs typeface="Arial" pitchFamily="34" charset="-120"/>
+              </a:rPr>
+              <a:t>A separate lint job</a:t>
+            </a:r>
+            <a:endParaRPr lang="en-US" sz="1800" dirty="0"/>
+          </a:p>
+        </p:txBody>
+      </p:sp>
+      <p:sp>
+        <p:nvSpPr>
+          <p:cNvPr id="8" name="Text 6"/>
+          <p:cNvSpPr/>
+          <p:nvPr/>
+        </p:nvSpPr>
+        <p:spPr>
+          <a:xfrm>
+            <a:off x="960120" y="2514600"/>
+            <a:ext cx="4709160" cy="1097280"/>
+          </a:xfrm>
+          <a:prstGeom prst="rect">
+            <a:avLst/>
+          </a:prstGeom>
+          <a:noFill/>
+          <a:ln/>
+        </p:spPr>
+        <p:txBody>
+          <a:bodyPr wrap="square" lIns="0" tIns="0" rIns="0" bIns="0" rtlCol="0" anchor="t"/>
+          <a:lstStyle/>
+          <a:p>
+            <a:pPr indent="0" marL="0">
+              <a:lnSpc>
+                <a:spcPts val="1900"/>
+              </a:lnSpc>
+              <a:buNone/>
+            </a:pPr>
+            <a:r>
+              <a:rPr lang="en-US" sz="1350" dirty="0">
+                <a:solidFill>
+                  <a:srgbClr val="5E7789"/>
+                </a:solidFill>
+                <a:latin typeface="Calibri" pitchFamily="34" charset="0"/>
+                <a:ea typeface="Calibri" pitchFamily="34" charset="-122"/>
+                <a:cs typeface="Calibri" pitchFamily="34" charset="-120"/>
+              </a:rPr>
+              <a:t>Runs in parallel with the build. Style feedback in 40 seconds instead of 6 minutes. Jobs are parallel by default — free speed.</a:t>
+            </a:r>
+            <a:endParaRPr lang="en-US" sz="1350" dirty="0"/>
+          </a:p>
+        </p:txBody>
+      </p:sp>
+      <p:sp>
+        <p:nvSpPr>
+          <p:cNvPr id="9" name="Shape 7"/>
+          <p:cNvSpPr/>
+          <p:nvPr/>
+        </p:nvSpPr>
+        <p:spPr>
+          <a:xfrm>
+            <a:off x="6217920" y="1691640"/>
+            <a:ext cx="5349240" cy="2011680"/>
+          </a:xfrm>
+          <a:prstGeom prst="roundRect">
+            <a:avLst>
+              <a:gd name="adj" fmla="val 2273"/>
+            </a:avLst>
+          </a:prstGeom>
+          <a:solidFill>
+            <a:srgbClr val="EDF2F6"/>
+          </a:solidFill>
+          <a:ln/>
+        </p:spPr>
+      </p:sp>
+      <p:sp>
+        <p:nvSpPr>
+          <p:cNvPr id="10" name="Shape 8"/>
+          <p:cNvSpPr/>
+          <p:nvPr/>
+        </p:nvSpPr>
+        <p:spPr>
+          <a:xfrm>
+            <a:off x="6537960" y="1947672"/>
+            <a:ext cx="420624" cy="420624"/>
+          </a:xfrm>
+          <a:prstGeom prst="ellipse">
+            <a:avLst/>
+          </a:prstGeom>
+          <a:solidFill>
+            <a:srgbClr val="1FA971"/>
+          </a:solidFill>
+          <a:ln/>
+        </p:spPr>
+      </p:sp>
+      <p:sp>
+        <p:nvSpPr>
+          <p:cNvPr id="11" name="Text 9"/>
+          <p:cNvSpPr/>
+          <p:nvPr/>
+        </p:nvSpPr>
+        <p:spPr>
+          <a:xfrm>
+            <a:off x="6537960" y="1947672"/>
+            <a:ext cx="420624" cy="420624"/>
+          </a:xfrm>
+          <a:prstGeom prst="rect">
+            <a:avLst/>
+          </a:prstGeom>
+          <a:noFill/>
+          <a:ln/>
+        </p:spPr>
+        <p:txBody>
+          <a:bodyPr wrap="square" lIns="0" tIns="0" rIns="0" bIns="0" rtlCol="0" anchor="ctr"/>
+          <a:lstStyle/>
+          <a:p>
+            <a:pPr algn="ctr" indent="0" marL="0">
+              <a:buNone/>
+            </a:pPr>
+            <a:r>
+              <a:rPr lang="en-US" sz="1500" b="1" dirty="0">
+                <a:solidFill>
+                  <a:srgbClr val="FFFFFF"/>
+                </a:solidFill>
+                <a:latin typeface="Arial" pitchFamily="34" charset="0"/>
+                <a:ea typeface="Arial" pitchFamily="34" charset="-122"/>
+                <a:cs typeface="Arial" pitchFamily="34" charset="-120"/>
+              </a:rPr>
+              <a:t>2</a:t>
+            </a:r>
+            <a:endParaRPr lang="en-US" sz="1500" dirty="0"/>
+          </a:p>
+        </p:txBody>
+      </p:sp>
+      <p:sp>
+        <p:nvSpPr>
+          <p:cNvPr id="12" name="Text 10"/>
+          <p:cNvSpPr/>
+          <p:nvPr/>
+        </p:nvSpPr>
+        <p:spPr>
+          <a:xfrm>
+            <a:off x="7132320" y="1929384"/>
+            <a:ext cx="4114800" cy="457200"/>
+          </a:xfrm>
+          <a:prstGeom prst="rect">
+            <a:avLst/>
+          </a:prstGeom>
+          <a:noFill/>
+          <a:ln/>
+        </p:spPr>
+        <p:txBody>
+          <a:bodyPr wrap="square" lIns="0" tIns="0" rIns="0" bIns="0" rtlCol="0" anchor="ctr"/>
+          <a:lstStyle/>
+          <a:p>
+            <a:pPr indent="0" marL="0">
+              <a:buNone/>
+            </a:pPr>
+            <a:r>
+              <a:rPr lang="en-US" sz="1800" b="1" dirty="0">
+                <a:solidFill>
+                  <a:srgbClr val="0E2233"/>
+                </a:solidFill>
+                <a:latin typeface="Arial" pitchFamily="34" charset="0"/>
+                <a:ea typeface="Arial" pitchFamily="34" charset="-122"/>
+                <a:cs typeface="Arial" pitchFamily="34" charset="-120"/>
+              </a:rPr>
+              <a:t>A matrix</a:t>
+            </a:r>
+            <a:endParaRPr lang="en-US" sz="1800" dirty="0"/>
+          </a:p>
+        </p:txBody>
+      </p:sp>
+      <p:sp>
+        <p:nvSpPr>
+          <p:cNvPr id="13" name="Text 11"/>
+          <p:cNvSpPr/>
+          <p:nvPr/>
+        </p:nvSpPr>
+        <p:spPr>
+          <a:xfrm>
+            <a:off x="6537960" y="2514600"/>
+            <a:ext cx="4709160" cy="1097280"/>
+          </a:xfrm>
+          <a:prstGeom prst="rect">
+            <a:avLst/>
+          </a:prstGeom>
+          <a:noFill/>
+          <a:ln/>
+        </p:spPr>
+        <p:txBody>
+          <a:bodyPr wrap="square" lIns="0" tIns="0" rIns="0" bIns="0" rtlCol="0" anchor="t"/>
+          <a:lstStyle/>
+          <a:p>
+            <a:pPr indent="0" marL="0">
+              <a:lnSpc>
+                <a:spcPts val="1900"/>
+              </a:lnSpc>
+              <a:buNone/>
+            </a:pPr>
+            <a:r>
+              <a:rPr lang="en-US" sz="1350" dirty="0">
+                <a:solidFill>
+                  <a:srgbClr val="5E7789"/>
+                </a:solidFill>
+                <a:latin typeface="Calibri" pitchFamily="34" charset="0"/>
+                <a:ea typeface="Calibri" pitchFamily="34" charset="-122"/>
+                <a:cs typeface="Calibri" pitchFamily="34" charset="-120"/>
+              </a:rPr>
+              <a:t>One file, several ROS distros. This is how you find out you have broken the distro you are migrating to, before migration week.</a:t>
+            </a:r>
+            <a:endParaRPr lang="en-US" sz="1350" dirty="0"/>
+          </a:p>
+        </p:txBody>
+      </p:sp>
+      <p:sp>
+        <p:nvSpPr>
+          <p:cNvPr id="14" name="Shape 12"/>
+          <p:cNvSpPr/>
+          <p:nvPr/>
+        </p:nvSpPr>
+        <p:spPr>
+          <a:xfrm>
+            <a:off x="640080" y="3904488"/>
+            <a:ext cx="5349240" cy="2011680"/>
+          </a:xfrm>
+          <a:prstGeom prst="roundRect">
+            <a:avLst>
+              <a:gd name="adj" fmla="val 2273"/>
+            </a:avLst>
+          </a:prstGeom>
+          <a:solidFill>
+            <a:srgbClr val="EDF2F6"/>
+          </a:solidFill>
+          <a:ln/>
+        </p:spPr>
+      </p:sp>
+      <p:sp>
+        <p:nvSpPr>
+          <p:cNvPr id="15" name="Shape 13"/>
+          <p:cNvSpPr/>
+          <p:nvPr/>
+        </p:nvSpPr>
+        <p:spPr>
+          <a:xfrm>
+            <a:off x="960120" y="4160520"/>
+            <a:ext cx="420624" cy="420624"/>
+          </a:xfrm>
+          <a:prstGeom prst="ellipse">
+            <a:avLst/>
+          </a:prstGeom>
+          <a:solidFill>
+            <a:srgbClr val="1FA971"/>
+          </a:solidFill>
+          <a:ln/>
+        </p:spPr>
+      </p:sp>
+      <p:sp>
+        <p:nvSpPr>
+          <p:cNvPr id="16" name="Text 14"/>
+          <p:cNvSpPr/>
+          <p:nvPr/>
+        </p:nvSpPr>
+        <p:spPr>
+          <a:xfrm>
+            <a:off x="960120" y="4160520"/>
+            <a:ext cx="420624" cy="420624"/>
+          </a:xfrm>
+          <a:prstGeom prst="rect">
+            <a:avLst/>
+          </a:prstGeom>
+          <a:noFill/>
+          <a:ln/>
+        </p:spPr>
+        <p:txBody>
+          <a:bodyPr wrap="square" lIns="0" tIns="0" rIns="0" bIns="0" rtlCol="0" anchor="ctr"/>
+          <a:lstStyle/>
+          <a:p>
+            <a:pPr algn="ctr" indent="0" marL="0">
+              <a:buNone/>
+            </a:pPr>
+            <a:r>
+              <a:rPr lang="en-US" sz="1500" b="1" dirty="0">
+                <a:solidFill>
+                  <a:srgbClr val="FFFFFF"/>
+                </a:solidFill>
+                <a:latin typeface="Arial" pitchFamily="34" charset="0"/>
+                <a:ea typeface="Arial" pitchFamily="34" charset="-122"/>
+                <a:cs typeface="Arial" pitchFamily="34" charset="-120"/>
+              </a:rPr>
+              <a:t>3</a:t>
+            </a:r>
+            <a:endParaRPr lang="en-US" sz="1500" dirty="0"/>
+          </a:p>
+        </p:txBody>
+      </p:sp>
+      <p:sp>
+        <p:nvSpPr>
+          <p:cNvPr id="17" name="Text 15"/>
+          <p:cNvSpPr/>
+          <p:nvPr/>
+        </p:nvSpPr>
+        <p:spPr>
+          <a:xfrm>
+            <a:off x="1554480" y="4142232"/>
+            <a:ext cx="4114800" cy="457200"/>
+          </a:xfrm>
+          <a:prstGeom prst="rect">
+            <a:avLst/>
+          </a:prstGeom>
+          <a:noFill/>
+          <a:ln/>
+        </p:spPr>
+        <p:txBody>
+          <a:bodyPr wrap="square" lIns="0" tIns="0" rIns="0" bIns="0" rtlCol="0" anchor="ctr"/>
+          <a:lstStyle/>
+          <a:p>
+            <a:pPr indent="0" marL="0">
+              <a:buNone/>
+            </a:pPr>
+            <a:r>
+              <a:rPr lang="en-US" sz="1800" b="1" dirty="0">
+                <a:solidFill>
+                  <a:srgbClr val="0E2233"/>
+                </a:solidFill>
+                <a:latin typeface="Arial" pitchFamily="34" charset="0"/>
+                <a:ea typeface="Arial" pitchFamily="34" charset="-122"/>
+                <a:cs typeface="Arial" pitchFamily="34" charset="-120"/>
+              </a:rPr>
+              <a:t>Artifacts</a:t>
+            </a:r>
+            <a:endParaRPr lang="en-US" sz="1800" dirty="0"/>
+          </a:p>
+        </p:txBody>
+      </p:sp>
+      <p:sp>
+        <p:nvSpPr>
+          <p:cNvPr id="18" name="Text 16"/>
+          <p:cNvSpPr/>
+          <p:nvPr/>
+        </p:nvSpPr>
+        <p:spPr>
+          <a:xfrm>
+            <a:off x="960120" y="4727448"/>
+            <a:ext cx="4709160" cy="1097280"/>
+          </a:xfrm>
+          <a:prstGeom prst="rect">
+            <a:avLst/>
+          </a:prstGeom>
+          <a:noFill/>
+          <a:ln/>
+        </p:spPr>
+        <p:txBody>
+          <a:bodyPr wrap="square" lIns="0" tIns="0" rIns="0" bIns="0" rtlCol="0" anchor="t"/>
+          <a:lstStyle/>
+          <a:p>
+            <a:pPr indent="0" marL="0">
+              <a:lnSpc>
+                <a:spcPts val="1900"/>
+              </a:lnSpc>
+              <a:buNone/>
+            </a:pPr>
+            <a:r>
+              <a:rPr lang="en-US" sz="1350" dirty="0">
+                <a:solidFill>
+                  <a:srgbClr val="5E7789"/>
+                </a:solidFill>
+                <a:latin typeface="Calibri" pitchFamily="34" charset="0"/>
+                <a:ea typeface="Calibri" pitchFamily="34" charset="-122"/>
+                <a:cs typeface="Calibri" pitchFamily="34" charset="-120"/>
+              </a:rPr>
+              <a:t>upload-artifact with if: always() — the test XML is downloadable from the run page precisely when the run failed.</a:t>
+            </a:r>
+            <a:endParaRPr lang="en-US" sz="1350" dirty="0"/>
+          </a:p>
+        </p:txBody>
+      </p:sp>
+      <p:sp>
+        <p:nvSpPr>
+          <p:cNvPr id="19" name="Shape 17"/>
+          <p:cNvSpPr/>
+          <p:nvPr/>
+        </p:nvSpPr>
+        <p:spPr>
+          <a:xfrm>
+            <a:off x="6217920" y="3904488"/>
+            <a:ext cx="5349240" cy="2011680"/>
+          </a:xfrm>
+          <a:prstGeom prst="roundRect">
+            <a:avLst>
+              <a:gd name="adj" fmla="val 2273"/>
+            </a:avLst>
+          </a:prstGeom>
+          <a:solidFill>
+            <a:srgbClr val="EDF2F6"/>
+          </a:solidFill>
+          <a:ln/>
+        </p:spPr>
+      </p:sp>
+      <p:sp>
+        <p:nvSpPr>
+          <p:cNvPr id="20" name="Shape 18"/>
+          <p:cNvSpPr/>
+          <p:nvPr/>
+        </p:nvSpPr>
+        <p:spPr>
+          <a:xfrm>
+            <a:off x="6537960" y="4160520"/>
+            <a:ext cx="420624" cy="420624"/>
+          </a:xfrm>
+          <a:prstGeom prst="ellipse">
+            <a:avLst/>
+          </a:prstGeom>
+          <a:solidFill>
+            <a:srgbClr val="1FA971"/>
+          </a:solidFill>
+          <a:ln/>
+        </p:spPr>
+      </p:sp>
+      <p:sp>
+        <p:nvSpPr>
+          <p:cNvPr id="21" name="Text 19"/>
+          <p:cNvSpPr/>
+          <p:nvPr/>
+        </p:nvSpPr>
+        <p:spPr>
+          <a:xfrm>
+            <a:off x="6537960" y="4160520"/>
+            <a:ext cx="420624" cy="420624"/>
+          </a:xfrm>
+          <a:prstGeom prst="rect">
+            <a:avLst/>
+          </a:prstGeom>
+          <a:noFill/>
+          <a:ln/>
+        </p:spPr>
+        <p:txBody>
+          <a:bodyPr wrap="square" lIns="0" tIns="0" rIns="0" bIns="0" rtlCol="0" anchor="ctr"/>
+          <a:lstStyle/>
+          <a:p>
+            <a:pPr algn="ctr" indent="0" marL="0">
+              <a:buNone/>
+            </a:pPr>
+            <a:r>
+              <a:rPr lang="en-US" sz="1500" b="1" dirty="0">
+                <a:solidFill>
+                  <a:srgbClr val="FFFFFF"/>
+                </a:solidFill>
+                <a:latin typeface="Arial" pitchFamily="34" charset="0"/>
+                <a:ea typeface="Arial" pitchFamily="34" charset="-122"/>
+                <a:cs typeface="Arial" pitchFamily="34" charset="-120"/>
+              </a:rPr>
+              <a:t>4</a:t>
+            </a:r>
+            <a:endParaRPr lang="en-US" sz="1500" dirty="0"/>
+          </a:p>
+        </p:txBody>
+      </p:sp>
+      <p:sp>
+        <p:nvSpPr>
+          <p:cNvPr id="22" name="Text 20"/>
+          <p:cNvSpPr/>
+          <p:nvPr/>
+        </p:nvSpPr>
+        <p:spPr>
+          <a:xfrm>
+            <a:off x="7132320" y="4142232"/>
+            <a:ext cx="4114800" cy="457200"/>
+          </a:xfrm>
+          <a:prstGeom prst="rect">
+            <a:avLst/>
+          </a:prstGeom>
+          <a:noFill/>
+          <a:ln/>
+        </p:spPr>
+        <p:txBody>
+          <a:bodyPr wrap="square" lIns="0" tIns="0" rIns="0" bIns="0" rtlCol="0" anchor="ctr"/>
+          <a:lstStyle/>
+          <a:p>
+            <a:pPr indent="0" marL="0">
+              <a:buNone/>
+            </a:pPr>
+            <a:r>
+              <a:rPr lang="en-US" sz="1800" b="1" dirty="0">
+                <a:solidFill>
+                  <a:srgbClr val="0E2233"/>
+                </a:solidFill>
+                <a:latin typeface="Arial" pitchFamily="34" charset="0"/>
+                <a:ea typeface="Arial" pitchFamily="34" charset="-122"/>
+                <a:cs typeface="Arial" pitchFamily="34" charset="-120"/>
+              </a:rPr>
+              <a:t>Concurrency</a:t>
+            </a:r>
+            <a:endParaRPr lang="en-US" sz="1800" dirty="0"/>
+          </a:p>
+        </p:txBody>
+      </p:sp>
+      <p:sp>
+        <p:nvSpPr>
+          <p:cNvPr id="23" name="Text 21"/>
+          <p:cNvSpPr/>
+          <p:nvPr/>
+        </p:nvSpPr>
+        <p:spPr>
+          <a:xfrm>
+            <a:off x="6537960" y="4727448"/>
+            <a:ext cx="4709160" cy="1097280"/>
+          </a:xfrm>
+          <a:prstGeom prst="rect">
+            <a:avLst/>
+          </a:prstGeom>
+          <a:noFill/>
+          <a:ln/>
+        </p:spPr>
+        <p:txBody>
+          <a:bodyPr wrap="square" lIns="0" tIns="0" rIns="0" bIns="0" rtlCol="0" anchor="t"/>
+          <a:lstStyle/>
+          <a:p>
+            <a:pPr indent="0" marL="0">
+              <a:lnSpc>
+                <a:spcPts val="1900"/>
+              </a:lnSpc>
+              <a:buNone/>
+            </a:pPr>
+            <a:r>
+              <a:rPr lang="en-US" sz="1350" dirty="0">
+                <a:solidFill>
+                  <a:srgbClr val="5E7789"/>
+                </a:solidFill>
+                <a:latin typeface="Calibri" pitchFamily="34" charset="0"/>
+                <a:ea typeface="Calibri" pitchFamily="34" charset="-122"/>
+                <a:cs typeface="Calibri" pitchFamily="34" charset="-120"/>
+              </a:rPr>
+              <a:t>Push twice in a minute and the first run is cancelled instead of queueing. Saves minutes and patience.</a:t>
+            </a:r>
+            <a:endParaRPr lang="en-US" sz="1350" dirty="0"/>
+          </a:p>
+        </p:txBody>
+      </p:sp>
+      <p:sp>
+        <p:nvSpPr>
+          <p:cNvPr id="24" name="Text 22"/>
+          <p:cNvSpPr/>
+          <p:nvPr/>
+        </p:nvSpPr>
+        <p:spPr>
+          <a:xfrm>
+            <a:off x="640080" y="6144768"/>
+            <a:ext cx="10911535" cy="365760"/>
+          </a:xfrm>
+          <a:prstGeom prst="rect">
+            <a:avLst/>
+          </a:prstGeom>
+          <a:noFill/>
+          <a:ln/>
+        </p:spPr>
+        <p:txBody>
+          <a:bodyPr wrap="square" lIns="0" tIns="0" rIns="0" bIns="0" rtlCol="0" anchor="ctr"/>
+          <a:lstStyle/>
+          <a:p>
+            <a:pPr indent="0" marL="0">
+              <a:buNone/>
+            </a:pPr>
+            <a:r>
+              <a:rPr lang="en-US" sz="1250" i="1" dirty="0">
+                <a:solidFill>
+                  <a:srgbClr val="5E7789"/>
+                </a:solidFill>
+                <a:latin typeface="Calibri" pitchFamily="34" charset="0"/>
+                <a:ea typeface="Calibri" pitchFamily="34" charset="-122"/>
+                <a:cs typeface="Calibri" pitchFamily="34" charset="-120"/>
+              </a:rPr>
+              <a:t>Scroll the file, name the four. Do not read it line by line — you will run out of clock.</a:t>
+            </a:r>
+            <a:endParaRPr lang="en-US" sz="1250" dirty="0"/>
+          </a:p>
+        </p:txBody>
+      </p:sp>
+    </p:spTree>
+  </p:cSld>
+  <p:clrMapOvr>
+    <a:masterClrMapping/>
+  </p:clrMapOvr>
+</p:sld>
+</file>
+
+<file path=ppt/slides/slide18.xml><?xml version="1.0" encoding="utf-8"?>
+<p:sld xmlns:a="http://schemas.openxmlformats.org/drawingml/2006/main" xmlns:r="http://schemas.openxmlformats.org/officeDocument/2006/relationships" xmlns:p="http://schemas.openxmlformats.org/presentationml/2006/main">
+  <p:cSld name="Slide 18">
     <p:bg>
       <p:bgPr>
         <a:solidFill>
@@ -7277,641 +7999,6 @@
               <a:t>Point the rule at the one "CI passed" job, not at every matrix leg — then you never have to update the required-checks list when the matrix changes.</a:t>
             </a:r>
             <a:endParaRPr lang="en-US" sz="1400" dirty="0"/>
-          </a:p>
-        </p:txBody>
-      </p:sp>
-    </p:spTree>
-  </p:cSld>
-  <p:clrMapOvr>
-    <a:masterClrMapping/>
-  </p:clrMapOvr>
-</p:sld>
-</file>
-
-<file path=ppt/slides/slide18.xml><?xml version="1.0" encoding="utf-8"?>
-<p:sld xmlns:a="http://schemas.openxmlformats.org/drawingml/2006/main" xmlns:r="http://schemas.openxmlformats.org/officeDocument/2006/relationships" xmlns:p="http://schemas.openxmlformats.org/presentationml/2006/main">
-  <p:cSld name="Slide 18">
-    <p:bg>
-      <p:bgPr>
-        <a:solidFill>
-          <a:srgbClr val="FFFFFF"/>
-        </a:solidFill>
-      </p:bgPr>
-    </p:bg>
-    <p:spTree>
-      <p:nvGrpSpPr>
-        <p:cNvPr id="1" name=""/>
-        <p:cNvGrpSpPr/>
-        <p:nvPr/>
-      </p:nvGrpSpPr>
-      <p:grpSpPr>
-        <a:xfrm>
-          <a:off x="0" y="0"/>
-          <a:ext cx="0" cy="0"/>
-          <a:chOff x="0" y="0"/>
-          <a:chExt cx="0" cy="0"/>
-        </a:xfrm>
-      </p:grpSpPr>
-      <p:sp>
-        <p:nvSpPr>
-          <p:cNvPr id="2" name="Text 0"/>
-          <p:cNvSpPr/>
-          <p:nvPr/>
-        </p:nvSpPr>
-        <p:spPr>
-          <a:xfrm>
-            <a:off x="640080" y="146304"/>
-            <a:ext cx="10911535" cy="274320"/>
-          </a:xfrm>
-          <a:prstGeom prst="rect">
-            <a:avLst/>
-          </a:prstGeom>
-          <a:noFill/>
-          <a:ln/>
-        </p:spPr>
-        <p:txBody>
-          <a:bodyPr wrap="square" lIns="0" tIns="0" rIns="0" bIns="0" rtlCol="0" anchor="ctr"/>
-          <a:lstStyle/>
-          <a:p>
-            <a:pPr indent="0" marL="0">
-              <a:buNone/>
-            </a:pPr>
-            <a:r>
-              <a:rPr lang="en-US" sz="1100" b="1" spc="200" kern="0" dirty="0">
-                <a:solidFill>
-                  <a:srgbClr val="5E7789"/>
-                </a:solidFill>
-                <a:latin typeface="Calibri" pitchFamily="34" charset="0"/>
-                <a:ea typeface="Calibri" pitchFamily="34" charset="-122"/>
-                <a:cs typeface="Calibri" pitchFamily="34" charset="-120"/>
-              </a:rPr>
-              <a:t>THE LAST 5 MINUTES</a:t>
-            </a:r>
-            <a:endParaRPr lang="en-US" sz="1100" dirty="0"/>
-          </a:p>
-        </p:txBody>
-      </p:sp>
-      <p:sp>
-        <p:nvSpPr>
-          <p:cNvPr id="3" name="Text 1"/>
-          <p:cNvSpPr/>
-          <p:nvPr/>
-        </p:nvSpPr>
-        <p:spPr>
-          <a:xfrm>
-            <a:off x="640080" y="411480"/>
-            <a:ext cx="10911535" cy="777240"/>
-          </a:xfrm>
-          <a:prstGeom prst="rect">
-            <a:avLst/>
-          </a:prstGeom>
-          <a:noFill/>
-          <a:ln/>
-        </p:spPr>
-        <p:txBody>
-          <a:bodyPr wrap="square" lIns="0" tIns="0" rIns="0" bIns="0" rtlCol="0" anchor="ctr"/>
-          <a:lstStyle/>
-          <a:p>
-            <a:pPr algn="l" indent="0" marL="0">
-              <a:buNone/>
-            </a:pPr>
-            <a:r>
-              <a:rPr lang="en-US" sz="3400" b="1" dirty="0">
-                <a:solidFill>
-                  <a:srgbClr val="0E2233"/>
-                </a:solidFill>
-                <a:latin typeface="Arial" pitchFamily="34" charset="0"/>
-                <a:ea typeface="Arial" pitchFamily="34" charset="-122"/>
-                <a:cs typeface="Arial" pitchFamily="34" charset="-120"/>
-              </a:rPr>
-              <a:t>Where the "CD" hooks on later</a:t>
-            </a:r>
-            <a:endParaRPr lang="en-US" sz="3400" dirty="0"/>
-          </a:p>
-        </p:txBody>
-      </p:sp>
-      <p:sp>
-        <p:nvSpPr>
-          <p:cNvPr id="4" name="Shape 2"/>
-          <p:cNvSpPr/>
-          <p:nvPr/>
-        </p:nvSpPr>
-        <p:spPr>
-          <a:xfrm>
-            <a:off x="640080" y="1691640"/>
-            <a:ext cx="10911535" cy="1325880"/>
-          </a:xfrm>
-          <a:prstGeom prst="roundRect">
-            <a:avLst>
-              <a:gd name="adj" fmla="val 3448"/>
-            </a:avLst>
-          </a:prstGeom>
-          <a:solidFill>
-            <a:srgbClr val="EDF2F6"/>
-          </a:solidFill>
-          <a:ln/>
-        </p:spPr>
-      </p:sp>
-      <p:sp>
-        <p:nvSpPr>
-          <p:cNvPr id="5" name="Shape 3"/>
-          <p:cNvSpPr/>
-          <p:nvPr/>
-        </p:nvSpPr>
-        <p:spPr>
-          <a:xfrm>
-            <a:off x="932688" y="2130552"/>
-            <a:ext cx="420624" cy="420624"/>
-          </a:xfrm>
-          <a:prstGeom prst="ellipse">
-            <a:avLst/>
-          </a:prstGeom>
-          <a:solidFill>
-            <a:srgbClr val="D98B2B"/>
-          </a:solidFill>
-          <a:ln/>
-        </p:spPr>
-      </p:sp>
-      <p:sp>
-        <p:nvSpPr>
-          <p:cNvPr id="6" name="Text 4"/>
-          <p:cNvSpPr/>
-          <p:nvPr/>
-        </p:nvSpPr>
-        <p:spPr>
-          <a:xfrm>
-            <a:off x="932688" y="2130552"/>
-            <a:ext cx="420624" cy="420624"/>
-          </a:xfrm>
-          <a:prstGeom prst="rect">
-            <a:avLst/>
-          </a:prstGeom>
-          <a:noFill/>
-          <a:ln/>
-        </p:spPr>
-        <p:txBody>
-          <a:bodyPr wrap="square" lIns="0" tIns="0" rIns="0" bIns="0" rtlCol="0" anchor="ctr"/>
-          <a:lstStyle/>
-          <a:p>
-            <a:pPr algn="ctr" indent="0" marL="0">
-              <a:buNone/>
-            </a:pPr>
-            <a:r>
-              <a:rPr lang="en-US" sz="1500" b="1" dirty="0">
-                <a:solidFill>
-                  <a:srgbClr val="FFFFFF"/>
-                </a:solidFill>
-                <a:latin typeface="Arial" pitchFamily="34" charset="0"/>
-                <a:ea typeface="Arial" pitchFamily="34" charset="-122"/>
-                <a:cs typeface="Arial" pitchFamily="34" charset="-120"/>
-              </a:rPr>
-              <a:t>1</a:t>
-            </a:r>
-            <a:endParaRPr lang="en-US" sz="1500" dirty="0"/>
-          </a:p>
-        </p:txBody>
-      </p:sp>
-      <p:sp>
-        <p:nvSpPr>
-          <p:cNvPr id="7" name="Text 5"/>
-          <p:cNvSpPr/>
-          <p:nvPr/>
-        </p:nvSpPr>
-        <p:spPr>
-          <a:xfrm>
-            <a:off x="1554480" y="1874520"/>
-            <a:ext cx="3291840" cy="411480"/>
-          </a:xfrm>
-          <a:prstGeom prst="rect">
-            <a:avLst/>
-          </a:prstGeom>
-          <a:noFill/>
-          <a:ln/>
-        </p:spPr>
-        <p:txBody>
-          <a:bodyPr wrap="square" lIns="0" tIns="0" rIns="0" bIns="0" rtlCol="0" anchor="ctr"/>
-          <a:lstStyle/>
-          <a:p>
-            <a:pPr indent="0" marL="0">
-              <a:buNone/>
-            </a:pPr>
-            <a:r>
-              <a:rPr lang="en-US" sz="1700" b="1" dirty="0">
-                <a:solidFill>
-                  <a:srgbClr val="0E2233"/>
-                </a:solidFill>
-                <a:latin typeface="Arial" pitchFamily="34" charset="0"/>
-                <a:ea typeface="Arial" pitchFamily="34" charset="-122"/>
-                <a:cs typeface="Arial" pitchFamily="34" charset="-120"/>
-              </a:rPr>
-              <a:t>Publish a container</a:t>
-            </a:r>
-            <a:endParaRPr lang="en-US" sz="1700" dirty="0"/>
-          </a:p>
-        </p:txBody>
-      </p:sp>
-      <p:sp>
-        <p:nvSpPr>
-          <p:cNvPr id="8" name="Text 6"/>
-          <p:cNvSpPr/>
-          <p:nvPr/>
-        </p:nvSpPr>
-        <p:spPr>
-          <a:xfrm>
-            <a:off x="1554480" y="2295144"/>
-            <a:ext cx="9326880" cy="594360"/>
-          </a:xfrm>
-          <a:prstGeom prst="rect">
-            <a:avLst/>
-          </a:prstGeom>
-          <a:noFill/>
-          <a:ln/>
-        </p:spPr>
-        <p:txBody>
-          <a:bodyPr wrap="square" lIns="0" tIns="0" rIns="0" bIns="0" rtlCol="0" anchor="t"/>
-          <a:lstStyle/>
-          <a:p>
-            <a:pPr indent="0" marL="0">
-              <a:lnSpc>
-                <a:spcPts val="2000"/>
-              </a:lnSpc>
-              <a:buNone/>
-            </a:pPr>
-            <a:r>
-              <a:rPr lang="en-US" sz="1400" dirty="0">
-                <a:solidFill>
-                  <a:srgbClr val="5E7789"/>
-                </a:solidFill>
-                <a:latin typeface="Calibri" pitchFamily="34" charset="0"/>
-                <a:ea typeface="Calibri" pitchFamily="34" charset="-122"/>
-                <a:cs typeface="Calibri" pitchFamily="34" charset="-120"/>
-              </a:rPr>
-              <a:t>Build a Docker image of the workspace and push it to GHCR when you tag a release. Now everyone runs the same environment.</a:t>
-            </a:r>
-            <a:endParaRPr lang="en-US" sz="1400" dirty="0"/>
-          </a:p>
-        </p:txBody>
-      </p:sp>
-      <p:sp>
-        <p:nvSpPr>
-          <p:cNvPr id="9" name="Shape 7"/>
-          <p:cNvSpPr/>
-          <p:nvPr/>
-        </p:nvSpPr>
-        <p:spPr>
-          <a:xfrm>
-            <a:off x="640080" y="3172968"/>
-            <a:ext cx="10911535" cy="1325880"/>
-          </a:xfrm>
-          <a:prstGeom prst="roundRect">
-            <a:avLst>
-              <a:gd name="adj" fmla="val 3448"/>
-            </a:avLst>
-          </a:prstGeom>
-          <a:solidFill>
-            <a:srgbClr val="EDF2F6"/>
-          </a:solidFill>
-          <a:ln/>
-        </p:spPr>
-      </p:sp>
-      <p:sp>
-        <p:nvSpPr>
-          <p:cNvPr id="10" name="Shape 8"/>
-          <p:cNvSpPr/>
-          <p:nvPr/>
-        </p:nvSpPr>
-        <p:spPr>
-          <a:xfrm>
-            <a:off x="932688" y="3611880"/>
-            <a:ext cx="420624" cy="420624"/>
-          </a:xfrm>
-          <a:prstGeom prst="ellipse">
-            <a:avLst/>
-          </a:prstGeom>
-          <a:solidFill>
-            <a:srgbClr val="D98B2B"/>
-          </a:solidFill>
-          <a:ln/>
-        </p:spPr>
-      </p:sp>
-      <p:sp>
-        <p:nvSpPr>
-          <p:cNvPr id="11" name="Text 9"/>
-          <p:cNvSpPr/>
-          <p:nvPr/>
-        </p:nvSpPr>
-        <p:spPr>
-          <a:xfrm>
-            <a:off x="932688" y="3611880"/>
-            <a:ext cx="420624" cy="420624"/>
-          </a:xfrm>
-          <a:prstGeom prst="rect">
-            <a:avLst/>
-          </a:prstGeom>
-          <a:noFill/>
-          <a:ln/>
-        </p:spPr>
-        <p:txBody>
-          <a:bodyPr wrap="square" lIns="0" tIns="0" rIns="0" bIns="0" rtlCol="0" anchor="ctr"/>
-          <a:lstStyle/>
-          <a:p>
-            <a:pPr algn="ctr" indent="0" marL="0">
-              <a:buNone/>
-            </a:pPr>
-            <a:r>
-              <a:rPr lang="en-US" sz="1500" b="1" dirty="0">
-                <a:solidFill>
-                  <a:srgbClr val="FFFFFF"/>
-                </a:solidFill>
-                <a:latin typeface="Arial" pitchFamily="34" charset="0"/>
-                <a:ea typeface="Arial" pitchFamily="34" charset="-122"/>
-                <a:cs typeface="Arial" pitchFamily="34" charset="-120"/>
-              </a:rPr>
-              <a:t>2</a:t>
-            </a:r>
-            <a:endParaRPr lang="en-US" sz="1500" dirty="0"/>
-          </a:p>
-        </p:txBody>
-      </p:sp>
-      <p:sp>
-        <p:nvSpPr>
-          <p:cNvPr id="12" name="Text 10"/>
-          <p:cNvSpPr/>
-          <p:nvPr/>
-        </p:nvSpPr>
-        <p:spPr>
-          <a:xfrm>
-            <a:off x="1554480" y="3355848"/>
-            <a:ext cx="3291840" cy="411480"/>
-          </a:xfrm>
-          <a:prstGeom prst="rect">
-            <a:avLst/>
-          </a:prstGeom>
-          <a:noFill/>
-          <a:ln/>
-        </p:spPr>
-        <p:txBody>
-          <a:bodyPr wrap="square" lIns="0" tIns="0" rIns="0" bIns="0" rtlCol="0" anchor="ctr"/>
-          <a:lstStyle/>
-          <a:p>
-            <a:pPr indent="0" marL="0">
-              <a:buNone/>
-            </a:pPr>
-            <a:r>
-              <a:rPr lang="en-US" sz="1700" b="1" dirty="0">
-                <a:solidFill>
-                  <a:srgbClr val="0E2233"/>
-                </a:solidFill>
-                <a:latin typeface="Arial" pitchFamily="34" charset="0"/>
-                <a:ea typeface="Arial" pitchFamily="34" charset="-122"/>
-                <a:cs typeface="Arial" pitchFamily="34" charset="-120"/>
-              </a:rPr>
-              <a:t>Cut a release</a:t>
-            </a:r>
-            <a:endParaRPr lang="en-US" sz="1700" dirty="0"/>
-          </a:p>
-        </p:txBody>
-      </p:sp>
-      <p:sp>
-        <p:nvSpPr>
-          <p:cNvPr id="13" name="Text 11"/>
-          <p:cNvSpPr/>
-          <p:nvPr/>
-        </p:nvSpPr>
-        <p:spPr>
-          <a:xfrm>
-            <a:off x="1554480" y="3776472"/>
-            <a:ext cx="9326880" cy="594360"/>
-          </a:xfrm>
-          <a:prstGeom prst="rect">
-            <a:avLst/>
-          </a:prstGeom>
-          <a:noFill/>
-          <a:ln/>
-        </p:spPr>
-        <p:txBody>
-          <a:bodyPr wrap="square" lIns="0" tIns="0" rIns="0" bIns="0" rtlCol="0" anchor="t"/>
-          <a:lstStyle/>
-          <a:p>
-            <a:pPr indent="0" marL="0">
-              <a:lnSpc>
-                <a:spcPts val="2000"/>
-              </a:lnSpc>
-              <a:buNone/>
-            </a:pPr>
-            <a:r>
-              <a:rPr lang="en-US" sz="1400" dirty="0">
-                <a:solidFill>
-                  <a:srgbClr val="5E7789"/>
-                </a:solidFill>
-                <a:latin typeface="Calibri" pitchFamily="34" charset="0"/>
-                <a:ea typeface="Calibri" pitchFamily="34" charset="-122"/>
-                <a:cs typeface="Calibri" pitchFamily="34" charset="-120"/>
-              </a:rPr>
-              <a:t>Attach a .deb, a bag file, or the test report to a GitHub Release so results are citable in six months.</a:t>
-            </a:r>
-            <a:endParaRPr lang="en-US" sz="1400" dirty="0"/>
-          </a:p>
-        </p:txBody>
-      </p:sp>
-      <p:sp>
-        <p:nvSpPr>
-          <p:cNvPr id="14" name="Shape 12"/>
-          <p:cNvSpPr/>
-          <p:nvPr/>
-        </p:nvSpPr>
-        <p:spPr>
-          <a:xfrm>
-            <a:off x="640080" y="4654296"/>
-            <a:ext cx="10911535" cy="1325880"/>
-          </a:xfrm>
-          <a:prstGeom prst="roundRect">
-            <a:avLst>
-              <a:gd name="adj" fmla="val 3448"/>
-            </a:avLst>
-          </a:prstGeom>
-          <a:solidFill>
-            <a:srgbClr val="EDF2F6"/>
-          </a:solidFill>
-          <a:ln/>
-        </p:spPr>
-      </p:sp>
-      <p:sp>
-        <p:nvSpPr>
-          <p:cNvPr id="15" name="Shape 13"/>
-          <p:cNvSpPr/>
-          <p:nvPr/>
-        </p:nvSpPr>
-        <p:spPr>
-          <a:xfrm>
-            <a:off x="932688" y="5093208"/>
-            <a:ext cx="420624" cy="420624"/>
-          </a:xfrm>
-          <a:prstGeom prst="ellipse">
-            <a:avLst/>
-          </a:prstGeom>
-          <a:solidFill>
-            <a:srgbClr val="D98B2B"/>
-          </a:solidFill>
-          <a:ln/>
-        </p:spPr>
-      </p:sp>
-      <p:sp>
-        <p:nvSpPr>
-          <p:cNvPr id="16" name="Text 14"/>
-          <p:cNvSpPr/>
-          <p:nvPr/>
-        </p:nvSpPr>
-        <p:spPr>
-          <a:xfrm>
-            <a:off x="932688" y="5093208"/>
-            <a:ext cx="420624" cy="420624"/>
-          </a:xfrm>
-          <a:prstGeom prst="rect">
-            <a:avLst/>
-          </a:prstGeom>
-          <a:noFill/>
-          <a:ln/>
-        </p:spPr>
-        <p:txBody>
-          <a:bodyPr wrap="square" lIns="0" tIns="0" rIns="0" bIns="0" rtlCol="0" anchor="ctr"/>
-          <a:lstStyle/>
-          <a:p>
-            <a:pPr algn="ctr" indent="0" marL="0">
-              <a:buNone/>
-            </a:pPr>
-            <a:r>
-              <a:rPr lang="en-US" sz="1500" b="1" dirty="0">
-                <a:solidFill>
-                  <a:srgbClr val="FFFFFF"/>
-                </a:solidFill>
-                <a:latin typeface="Arial" pitchFamily="34" charset="0"/>
-                <a:ea typeface="Arial" pitchFamily="34" charset="-122"/>
-                <a:cs typeface="Arial" pitchFamily="34" charset="-120"/>
-              </a:rPr>
-              <a:t>3</a:t>
-            </a:r>
-            <a:endParaRPr lang="en-US" sz="1500" dirty="0"/>
-          </a:p>
-        </p:txBody>
-      </p:sp>
-      <p:sp>
-        <p:nvSpPr>
-          <p:cNvPr id="17" name="Text 15"/>
-          <p:cNvSpPr/>
-          <p:nvPr/>
-        </p:nvSpPr>
-        <p:spPr>
-          <a:xfrm>
-            <a:off x="1554480" y="4837176"/>
-            <a:ext cx="3291840" cy="411480"/>
-          </a:xfrm>
-          <a:prstGeom prst="rect">
-            <a:avLst/>
-          </a:prstGeom>
-          <a:noFill/>
-          <a:ln/>
-        </p:spPr>
-        <p:txBody>
-          <a:bodyPr wrap="square" lIns="0" tIns="0" rIns="0" bIns="0" rtlCol="0" anchor="ctr"/>
-          <a:lstStyle/>
-          <a:p>
-            <a:pPr indent="0" marL="0">
-              <a:buNone/>
-            </a:pPr>
-            <a:r>
-              <a:rPr lang="en-US" sz="1700" b="1" dirty="0">
-                <a:solidFill>
-                  <a:srgbClr val="0E2233"/>
-                </a:solidFill>
-                <a:latin typeface="Arial" pitchFamily="34" charset="0"/>
-                <a:ea typeface="Arial" pitchFamily="34" charset="-122"/>
-                <a:cs typeface="Arial" pitchFamily="34" charset="-120"/>
-              </a:rPr>
-              <a:t>A runner in the lab</a:t>
-            </a:r>
-            <a:endParaRPr lang="en-US" sz="1700" dirty="0"/>
-          </a:p>
-        </p:txBody>
-      </p:sp>
-      <p:sp>
-        <p:nvSpPr>
-          <p:cNvPr id="18" name="Text 16"/>
-          <p:cNvSpPr/>
-          <p:nvPr/>
-        </p:nvSpPr>
-        <p:spPr>
-          <a:xfrm>
-            <a:off x="1554480" y="5257800"/>
-            <a:ext cx="9326880" cy="594360"/>
-          </a:xfrm>
-          <a:prstGeom prst="rect">
-            <a:avLst/>
-          </a:prstGeom>
-          <a:noFill/>
-          <a:ln/>
-        </p:spPr>
-        <p:txBody>
-          <a:bodyPr wrap="square" lIns="0" tIns="0" rIns="0" bIns="0" rtlCol="0" anchor="t"/>
-          <a:lstStyle/>
-          <a:p>
-            <a:pPr indent="0" marL="0">
-              <a:lnSpc>
-                <a:spcPts val="2000"/>
-              </a:lnSpc>
-              <a:buNone/>
-            </a:pPr>
-            <a:r>
-              <a:rPr lang="en-US" sz="1400" dirty="0">
-                <a:solidFill>
-                  <a:srgbClr val="5E7789"/>
-                </a:solidFill>
-                <a:latin typeface="Calibri" pitchFamily="34" charset="0"/>
-                <a:ea typeface="Calibri" pitchFamily="34" charset="-122"/>
-                <a:cs typeface="Calibri" pitchFamily="34" charset="-120"/>
-              </a:rPr>
-              <a:t>Self-hosted runner on real hardware, for the integration tests that genuinely need a robot. Nightly, or on a label.</a:t>
-            </a:r>
-            <a:endParaRPr lang="en-US" sz="1400" dirty="0"/>
-          </a:p>
-        </p:txBody>
-      </p:sp>
-      <p:sp>
-        <p:nvSpPr>
-          <p:cNvPr id="19" name="Text 17"/>
-          <p:cNvSpPr/>
-          <p:nvPr/>
-        </p:nvSpPr>
-        <p:spPr>
-          <a:xfrm>
-            <a:off x="640080" y="6172200"/>
-            <a:ext cx="10911535" cy="457200"/>
-          </a:xfrm>
-          <a:prstGeom prst="rect">
-            <a:avLst/>
-          </a:prstGeom>
-          <a:noFill/>
-          <a:ln/>
-        </p:spPr>
-        <p:txBody>
-          <a:bodyPr wrap="square" lIns="0" tIns="0" rIns="0" bIns="0" rtlCol="0" anchor="ctr"/>
-          <a:lstStyle/>
-          <a:p>
-            <a:pPr indent="0" marL="0">
-              <a:buNone/>
-            </a:pPr>
-            <a:r>
-              <a:rPr lang="en-US" sz="1600" b="1" dirty="0">
-                <a:solidFill>
-                  <a:srgbClr val="D9434B"/>
-                </a:solidFill>
-                <a:latin typeface="Arial" pitchFamily="34" charset="0"/>
-                <a:ea typeface="Arial" pitchFamily="34" charset="-122"/>
-                <a:cs typeface="Arial" pitchFamily="34" charset="-120"/>
-              </a:rPr>
-              <a:t>Never put "deploy to the robot" on push: main without a human in the loop.</a:t>
-            </a:r>
-            <a:endParaRPr lang="en-US" sz="1600" dirty="0"/>
           </a:p>
         </p:txBody>
       </p:sp>
@@ -7980,7 +8067,7 @@
                 <a:ea typeface="Calibri" pitchFamily="34" charset="-122"/>
                 <a:cs typeface="Calibri" pitchFamily="34" charset="-120"/>
               </a:rPr>
-              <a:t>DO THIS BEFORE NEXT WEEK</a:t>
+              <a:t>THE LAST 5 MINUTES</a:t>
             </a:r>
             <a:endParaRPr lang="en-US" sz="1100" dirty="0"/>
           </a:p>
@@ -8019,7 +8106,7 @@
                 <a:ea typeface="Arial" pitchFamily="34" charset="-122"/>
                 <a:cs typeface="Arial" pitchFamily="34" charset="-120"/>
               </a:rPr>
-              <a:t>Your turn</a:t>
+              <a:t>Where the "CD" hooks on later</a:t>
             </a:r>
             <a:endParaRPr lang="en-US" sz="3400" dirty="0"/>
           </a:p>
@@ -8033,12 +8120,12 @@
         </p:nvSpPr>
         <p:spPr>
           <a:xfrm>
-            <a:off x="640080" y="1645920"/>
-            <a:ext cx="10911535" cy="676656"/>
+            <a:off x="640080" y="1691640"/>
+            <a:ext cx="10911535" cy="1325880"/>
           </a:xfrm>
           <a:prstGeom prst="roundRect">
             <a:avLst>
-              <a:gd name="adj" fmla="val 6757"/>
+              <a:gd name="adj" fmla="val 3448"/>
             </a:avLst>
           </a:prstGeom>
           <a:solidFill>
@@ -8055,14 +8142,14 @@
         </p:nvSpPr>
         <p:spPr>
           <a:xfrm>
-            <a:off x="896112" y="1773936"/>
-            <a:ext cx="402336" cy="402336"/>
+            <a:off x="932688" y="2130552"/>
+            <a:ext cx="420624" cy="420624"/>
           </a:xfrm>
           <a:prstGeom prst="ellipse">
             <a:avLst/>
           </a:prstGeom>
           <a:solidFill>
-            <a:srgbClr val="0E2233"/>
+            <a:srgbClr val="D98B2B"/>
           </a:solidFill>
           <a:ln/>
         </p:spPr>
@@ -8075,8 +8162,8 @@
         </p:nvSpPr>
         <p:spPr>
           <a:xfrm>
-            <a:off x="896112" y="1773936"/>
-            <a:ext cx="402336" cy="402336"/>
+            <a:off x="932688" y="2130552"/>
+            <a:ext cx="420624" cy="420624"/>
           </a:xfrm>
           <a:prstGeom prst="rect">
             <a:avLst/>
@@ -8114,51 +8201,93 @@
         </p:nvSpPr>
         <p:spPr>
           <a:xfrm>
-            <a:off x="1508760" y="1645920"/>
-            <a:ext cx="7498080" cy="676656"/>
-          </a:xfrm>
-          <a:prstGeom prst="rect">
-            <a:avLst/>
-          </a:prstGeom>
-          <a:noFill/>
-          <a:ln/>
-        </p:spPr>
-        <p:txBody>
-          <a:bodyPr wrap="square" lIns="0" tIns="0" rIns="0" bIns="0" rtlCol="0" anchor="ctr"/>
-          <a:lstStyle/>
-          <a:p>
-            <a:pPr indent="0" marL="0">
-              <a:buNone/>
-            </a:pPr>
-            <a:r>
-              <a:rPr lang="en-US" sz="1550" dirty="0">
+            <a:off x="1554480" y="1874520"/>
+            <a:ext cx="3291840" cy="411480"/>
+          </a:xfrm>
+          <a:prstGeom prst="rect">
+            <a:avLst/>
+          </a:prstGeom>
+          <a:noFill/>
+          <a:ln/>
+        </p:spPr>
+        <p:txBody>
+          <a:bodyPr wrap="square" lIns="0" tIns="0" rIns="0" bIns="0" rtlCol="0" anchor="ctr"/>
+          <a:lstStyle/>
+          <a:p>
+            <a:pPr indent="0" marL="0">
+              <a:buNone/>
+            </a:pPr>
+            <a:r>
+              <a:rPr lang="en-US" sz="1700" b="1" dirty="0">
                 <a:solidFill>
                   <a:srgbClr val="0E2233"/>
+                </a:solidFill>
+                <a:latin typeface="Arial" pitchFamily="34" charset="0"/>
+                <a:ea typeface="Arial" pitchFamily="34" charset="-122"/>
+                <a:cs typeface="Arial" pitchFamily="34" charset="-120"/>
+              </a:rPr>
+              <a:t>Publish a container</a:t>
+            </a:r>
+            <a:endParaRPr lang="en-US" sz="1700" dirty="0"/>
+          </a:p>
+        </p:txBody>
+      </p:sp>
+      <p:sp>
+        <p:nvSpPr>
+          <p:cNvPr id="8" name="Text 6"/>
+          <p:cNvSpPr/>
+          <p:nvPr/>
+        </p:nvSpPr>
+        <p:spPr>
+          <a:xfrm>
+            <a:off x="1554480" y="2295144"/>
+            <a:ext cx="9326880" cy="594360"/>
+          </a:xfrm>
+          <a:prstGeom prst="rect">
+            <a:avLst/>
+          </a:prstGeom>
+          <a:noFill/>
+          <a:ln/>
+        </p:spPr>
+        <p:txBody>
+          <a:bodyPr wrap="square" lIns="0" tIns="0" rIns="0" bIns="0" rtlCol="0" anchor="t"/>
+          <a:lstStyle/>
+          <a:p>
+            <a:pPr indent="0" marL="0">
+              <a:lnSpc>
+                <a:spcPts val="2000"/>
+              </a:lnSpc>
+              <a:buNone/>
+            </a:pPr>
+            <a:r>
+              <a:rPr lang="en-US" sz="1400" dirty="0">
+                <a:solidFill>
+                  <a:srgbClr val="5E7789"/>
                 </a:solidFill>
                 <a:latin typeface="Calibri" pitchFamily="34" charset="0"/>
                 <a:ea typeface="Calibri" pitchFamily="34" charset="-122"/>
                 <a:cs typeface="Calibri" pitchFamily="34" charset="-120"/>
               </a:rPr>
-              <a:t>Fork turtle_guard, or pick one of your own ROS 2 repos.</a:t>
-            </a:r>
-            <a:endParaRPr lang="en-US" sz="1550" dirty="0"/>
-          </a:p>
-        </p:txBody>
-      </p:sp>
-      <p:sp>
-        <p:nvSpPr>
-          <p:cNvPr id="8" name="Shape 6"/>
-          <p:cNvSpPr/>
-          <p:nvPr/>
-        </p:nvSpPr>
-        <p:spPr>
-          <a:xfrm>
-            <a:off x="640080" y="2404872"/>
-            <a:ext cx="10911535" cy="676656"/>
+              <a:t>Build a Docker image of the workspace and push it to GHCR when you tag a release. Now everyone runs the same environment.</a:t>
+            </a:r>
+            <a:endParaRPr lang="en-US" sz="1400" dirty="0"/>
+          </a:p>
+        </p:txBody>
+      </p:sp>
+      <p:sp>
+        <p:nvSpPr>
+          <p:cNvPr id="9" name="Shape 7"/>
+          <p:cNvSpPr/>
+          <p:nvPr/>
+        </p:nvSpPr>
+        <p:spPr>
+          <a:xfrm>
+            <a:off x="640080" y="3172968"/>
+            <a:ext cx="10911535" cy="1325880"/>
           </a:xfrm>
           <a:prstGeom prst="roundRect">
             <a:avLst>
-              <a:gd name="adj" fmla="val 6757"/>
+              <a:gd name="adj" fmla="val 3448"/>
             </a:avLst>
           </a:prstGeom>
           <a:solidFill>
@@ -8169,34 +8298,34 @@
       </p:sp>
       <p:sp>
         <p:nvSpPr>
-          <p:cNvPr id="9" name="Shape 7"/>
-          <p:cNvSpPr/>
-          <p:nvPr/>
-        </p:nvSpPr>
-        <p:spPr>
-          <a:xfrm>
-            <a:off x="896112" y="2532888"/>
-            <a:ext cx="402336" cy="402336"/>
+          <p:cNvPr id="10" name="Shape 8"/>
+          <p:cNvSpPr/>
+          <p:nvPr/>
+        </p:nvSpPr>
+        <p:spPr>
+          <a:xfrm>
+            <a:off x="932688" y="3611880"/>
+            <a:ext cx="420624" cy="420624"/>
           </a:xfrm>
           <a:prstGeom prst="ellipse">
             <a:avLst/>
           </a:prstGeom>
           <a:solidFill>
-            <a:srgbClr val="0E2233"/>
+            <a:srgbClr val="D98B2B"/>
           </a:solidFill>
           <a:ln/>
         </p:spPr>
       </p:sp>
       <p:sp>
         <p:nvSpPr>
-          <p:cNvPr id="10" name="Text 8"/>
-          <p:cNvSpPr/>
-          <p:nvPr/>
-        </p:nvSpPr>
-        <p:spPr>
-          <a:xfrm>
-            <a:off x="896112" y="2532888"/>
-            <a:ext cx="402336" cy="402336"/>
+          <p:cNvPr id="11" name="Text 9"/>
+          <p:cNvSpPr/>
+          <p:nvPr/>
+        </p:nvSpPr>
+        <p:spPr>
+          <a:xfrm>
+            <a:off x="932688" y="3611880"/>
+            <a:ext cx="420624" cy="420624"/>
           </a:xfrm>
           <a:prstGeom prst="rect">
             <a:avLst/>
@@ -8228,57 +8357,99 @@
       </p:sp>
       <p:sp>
         <p:nvSpPr>
-          <p:cNvPr id="11" name="Text 9"/>
-          <p:cNvSpPr/>
-          <p:nvPr/>
-        </p:nvSpPr>
-        <p:spPr>
-          <a:xfrm>
-            <a:off x="1508760" y="2404872"/>
-            <a:ext cx="7498080" cy="676656"/>
-          </a:xfrm>
-          <a:prstGeom prst="rect">
-            <a:avLst/>
-          </a:prstGeom>
-          <a:noFill/>
-          <a:ln/>
-        </p:spPr>
-        <p:txBody>
-          <a:bodyPr wrap="square" lIns="0" tIns="0" rIns="0" bIns="0" rtlCol="0" anchor="ctr"/>
-          <a:lstStyle/>
-          <a:p>
-            <a:pPr indent="0" marL="0">
-              <a:buNone/>
-            </a:pPr>
-            <a:r>
-              <a:rPr lang="en-US" sz="1550" dirty="0">
+          <p:cNvPr id="12" name="Text 10"/>
+          <p:cNvSpPr/>
+          <p:nvPr/>
+        </p:nvSpPr>
+        <p:spPr>
+          <a:xfrm>
+            <a:off x="1554480" y="3355848"/>
+            <a:ext cx="3291840" cy="411480"/>
+          </a:xfrm>
+          <a:prstGeom prst="rect">
+            <a:avLst/>
+          </a:prstGeom>
+          <a:noFill/>
+          <a:ln/>
+        </p:spPr>
+        <p:txBody>
+          <a:bodyPr wrap="square" lIns="0" tIns="0" rIns="0" bIns="0" rtlCol="0" anchor="ctr"/>
+          <a:lstStyle/>
+          <a:p>
+            <a:pPr indent="0" marL="0">
+              <a:buNone/>
+            </a:pPr>
+            <a:r>
+              <a:rPr lang="en-US" sz="1700" b="1" dirty="0">
                 <a:solidFill>
                   <a:srgbClr val="0E2233"/>
+                </a:solidFill>
+                <a:latin typeface="Arial" pitchFamily="34" charset="0"/>
+                <a:ea typeface="Arial" pitchFamily="34" charset="-122"/>
+                <a:cs typeface="Arial" pitchFamily="34" charset="-120"/>
+              </a:rPr>
+              <a:t>Cut a release</a:t>
+            </a:r>
+            <a:endParaRPr lang="en-US" sz="1700" dirty="0"/>
+          </a:p>
+        </p:txBody>
+      </p:sp>
+      <p:sp>
+        <p:nvSpPr>
+          <p:cNvPr id="13" name="Text 11"/>
+          <p:cNvSpPr/>
+          <p:nvPr/>
+        </p:nvSpPr>
+        <p:spPr>
+          <a:xfrm>
+            <a:off x="1554480" y="3776472"/>
+            <a:ext cx="9326880" cy="594360"/>
+          </a:xfrm>
+          <a:prstGeom prst="rect">
+            <a:avLst/>
+          </a:prstGeom>
+          <a:noFill/>
+          <a:ln/>
+        </p:spPr>
+        <p:txBody>
+          <a:bodyPr wrap="square" lIns="0" tIns="0" rIns="0" bIns="0" rtlCol="0" anchor="t"/>
+          <a:lstStyle/>
+          <a:p>
+            <a:pPr indent="0" marL="0">
+              <a:lnSpc>
+                <a:spcPts val="2000"/>
+              </a:lnSpc>
+              <a:buNone/>
+            </a:pPr>
+            <a:r>
+              <a:rPr lang="en-US" sz="1400" dirty="0">
+                <a:solidFill>
+                  <a:srgbClr val="5E7789"/>
                 </a:solidFill>
                 <a:latin typeface="Calibri" pitchFamily="34" charset="0"/>
                 <a:ea typeface="Calibri" pitchFamily="34" charset="-122"/>
                 <a:cs typeface="Calibri" pitchFamily="34" charset="-120"/>
               </a:rPr>
-              <a:t>Copy 02-ros2-build-test.yml into .github/workflows/</a:t>
-            </a:r>
-            <a:endParaRPr lang="en-US" sz="1550" dirty="0"/>
-          </a:p>
-        </p:txBody>
-      </p:sp>
-      <p:sp>
-        <p:nvSpPr>
-          <p:cNvPr id="12" name="Shape 10"/>
-          <p:cNvSpPr/>
-          <p:nvPr/>
-        </p:nvSpPr>
-        <p:spPr>
-          <a:xfrm>
-            <a:off x="640080" y="3163824"/>
-            <a:ext cx="10911535" cy="676656"/>
+              <a:t>Attach a .deb, a bag file, or the test report to a GitHub Release so results are citable in six months.</a:t>
+            </a:r>
+            <a:endParaRPr lang="en-US" sz="1400" dirty="0"/>
+          </a:p>
+        </p:txBody>
+      </p:sp>
+      <p:sp>
+        <p:nvSpPr>
+          <p:cNvPr id="14" name="Shape 12"/>
+          <p:cNvSpPr/>
+          <p:nvPr/>
+        </p:nvSpPr>
+        <p:spPr>
+          <a:xfrm>
+            <a:off x="640080" y="4654296"/>
+            <a:ext cx="10911535" cy="1325880"/>
           </a:xfrm>
           <a:prstGeom prst="roundRect">
             <a:avLst>
-              <a:gd name="adj" fmla="val 6757"/>
+              <a:gd name="adj" fmla="val 3448"/>
             </a:avLst>
           </a:prstGeom>
           <a:solidFill>
@@ -8289,34 +8460,34 @@
       </p:sp>
       <p:sp>
         <p:nvSpPr>
-          <p:cNvPr id="13" name="Shape 11"/>
-          <p:cNvSpPr/>
-          <p:nvPr/>
-        </p:nvSpPr>
-        <p:spPr>
-          <a:xfrm>
-            <a:off x="896112" y="3291840"/>
-            <a:ext cx="402336" cy="402336"/>
+          <p:cNvPr id="15" name="Shape 13"/>
+          <p:cNvSpPr/>
+          <p:nvPr/>
+        </p:nvSpPr>
+        <p:spPr>
+          <a:xfrm>
+            <a:off x="932688" y="5093208"/>
+            <a:ext cx="420624" cy="420624"/>
           </a:xfrm>
           <a:prstGeom prst="ellipse">
             <a:avLst/>
           </a:prstGeom>
           <a:solidFill>
-            <a:srgbClr val="0E2233"/>
+            <a:srgbClr val="D98B2B"/>
           </a:solidFill>
           <a:ln/>
         </p:spPr>
       </p:sp>
       <p:sp>
         <p:nvSpPr>
-          <p:cNvPr id="14" name="Text 12"/>
-          <p:cNvSpPr/>
-          <p:nvPr/>
-        </p:nvSpPr>
-        <p:spPr>
-          <a:xfrm>
-            <a:off x="896112" y="3291840"/>
-            <a:ext cx="402336" cy="402336"/>
+          <p:cNvPr id="16" name="Text 14"/>
+          <p:cNvSpPr/>
+          <p:nvPr/>
+        </p:nvSpPr>
+        <p:spPr>
+          <a:xfrm>
+            <a:off x="932688" y="5093208"/>
+            <a:ext cx="420624" cy="420624"/>
           </a:xfrm>
           <a:prstGeom prst="rect">
             <a:avLst/>
@@ -8348,478 +8519,121 @@
       </p:sp>
       <p:sp>
         <p:nvSpPr>
-          <p:cNvPr id="15" name="Text 13"/>
-          <p:cNvSpPr/>
-          <p:nvPr/>
-        </p:nvSpPr>
-        <p:spPr>
-          <a:xfrm>
-            <a:off x="1508760" y="3163824"/>
-            <a:ext cx="7498080" cy="676656"/>
-          </a:xfrm>
-          <a:prstGeom prst="rect">
-            <a:avLst/>
-          </a:prstGeom>
-          <a:noFill/>
-          <a:ln/>
-        </p:spPr>
-        <p:txBody>
-          <a:bodyPr wrap="square" lIns="0" tIns="0" rIns="0" bIns="0" rtlCol="0" anchor="ctr"/>
-          <a:lstStyle/>
-          <a:p>
-            <a:pPr indent="0" marL="0">
-              <a:buNone/>
-            </a:pPr>
-            <a:r>
-              <a:rPr lang="en-US" sz="1550" dirty="0">
+          <p:cNvPr id="17" name="Text 15"/>
+          <p:cNvSpPr/>
+          <p:nvPr/>
+        </p:nvSpPr>
+        <p:spPr>
+          <a:xfrm>
+            <a:off x="1554480" y="4837176"/>
+            <a:ext cx="3291840" cy="411480"/>
+          </a:xfrm>
+          <a:prstGeom prst="rect">
+            <a:avLst/>
+          </a:prstGeom>
+          <a:noFill/>
+          <a:ln/>
+        </p:spPr>
+        <p:txBody>
+          <a:bodyPr wrap="square" lIns="0" tIns="0" rIns="0" bIns="0" rtlCol="0" anchor="ctr"/>
+          <a:lstStyle/>
+          <a:p>
+            <a:pPr indent="0" marL="0">
+              <a:buNone/>
+            </a:pPr>
+            <a:r>
+              <a:rPr lang="en-US" sz="1700" b="1" dirty="0">
                 <a:solidFill>
                   <a:srgbClr val="0E2233"/>
+                </a:solidFill>
+                <a:latin typeface="Arial" pitchFamily="34" charset="0"/>
+                <a:ea typeface="Arial" pitchFamily="34" charset="-122"/>
+                <a:cs typeface="Arial" pitchFamily="34" charset="-120"/>
+              </a:rPr>
+              <a:t>A runner in the lab</a:t>
+            </a:r>
+            <a:endParaRPr lang="en-US" sz="1700" dirty="0"/>
+          </a:p>
+        </p:txBody>
+      </p:sp>
+      <p:sp>
+        <p:nvSpPr>
+          <p:cNvPr id="18" name="Text 16"/>
+          <p:cNvSpPr/>
+          <p:nvPr/>
+        </p:nvSpPr>
+        <p:spPr>
+          <a:xfrm>
+            <a:off x="1554480" y="5257800"/>
+            <a:ext cx="9326880" cy="594360"/>
+          </a:xfrm>
+          <a:prstGeom prst="rect">
+            <a:avLst/>
+          </a:prstGeom>
+          <a:noFill/>
+          <a:ln/>
+        </p:spPr>
+        <p:txBody>
+          <a:bodyPr wrap="square" lIns="0" tIns="0" rIns="0" bIns="0" rtlCol="0" anchor="t"/>
+          <a:lstStyle/>
+          <a:p>
+            <a:pPr indent="0" marL="0">
+              <a:lnSpc>
+                <a:spcPts val="2000"/>
+              </a:lnSpc>
+              <a:buNone/>
+            </a:pPr>
+            <a:r>
+              <a:rPr lang="en-US" sz="1400" dirty="0">
+                <a:solidFill>
+                  <a:srgbClr val="5E7789"/>
                 </a:solidFill>
                 <a:latin typeface="Calibri" pitchFamily="34" charset="0"/>
                 <a:ea typeface="Calibri" pitchFamily="34" charset="-122"/>
                 <a:cs typeface="Calibri" pitchFamily="34" charset="-120"/>
               </a:rPr>
-              <a:t>Change --packages-select turtle_guard to your package name.</a:t>
-            </a:r>
-            <a:endParaRPr lang="en-US" sz="1550" dirty="0"/>
-          </a:p>
-        </p:txBody>
-      </p:sp>
-      <p:sp>
-        <p:nvSpPr>
-          <p:cNvPr id="16" name="Shape 14"/>
-          <p:cNvSpPr/>
-          <p:nvPr/>
-        </p:nvSpPr>
-        <p:spPr>
-          <a:xfrm>
-            <a:off x="640080" y="3922776"/>
-            <a:ext cx="10911535" cy="676656"/>
-          </a:xfrm>
-          <a:prstGeom prst="roundRect">
-            <a:avLst>
-              <a:gd name="adj" fmla="val 6757"/>
-            </a:avLst>
-          </a:prstGeom>
-          <a:solidFill>
-            <a:srgbClr val="FBECED"/>
-          </a:solidFill>
-          <a:ln/>
-        </p:spPr>
-      </p:sp>
-      <p:sp>
-        <p:nvSpPr>
-          <p:cNvPr id="17" name="Shape 15"/>
-          <p:cNvSpPr/>
-          <p:nvPr/>
-        </p:nvSpPr>
-        <p:spPr>
-          <a:xfrm>
-            <a:off x="896112" y="4050792"/>
-            <a:ext cx="402336" cy="402336"/>
-          </a:xfrm>
-          <a:prstGeom prst="ellipse">
-            <a:avLst/>
-          </a:prstGeom>
-          <a:solidFill>
-            <a:srgbClr val="D9434B"/>
-          </a:solidFill>
-          <a:ln/>
-        </p:spPr>
-      </p:sp>
-      <p:sp>
-        <p:nvSpPr>
-          <p:cNvPr id="18" name="Text 16"/>
-          <p:cNvSpPr/>
-          <p:nvPr/>
-        </p:nvSpPr>
-        <p:spPr>
-          <a:xfrm>
-            <a:off x="896112" y="4050792"/>
-            <a:ext cx="402336" cy="402336"/>
-          </a:xfrm>
-          <a:prstGeom prst="rect">
-            <a:avLst/>
-          </a:prstGeom>
-          <a:noFill/>
-          <a:ln/>
-        </p:spPr>
-        <p:txBody>
-          <a:bodyPr wrap="square" lIns="0" tIns="0" rIns="0" bIns="0" rtlCol="0" anchor="ctr"/>
-          <a:lstStyle/>
-          <a:p>
-            <a:pPr algn="ctr" indent="0" marL="0">
-              <a:buNone/>
-            </a:pPr>
-            <a:r>
-              <a:rPr lang="en-US" sz="1500" b="1" dirty="0">
-                <a:solidFill>
-                  <a:srgbClr val="FFFFFF"/>
+              <a:t>Self-hosted runner on real hardware, for the integration tests that genuinely need a robot. Nightly, or on a label.</a:t>
+            </a:r>
+            <a:endParaRPr lang="en-US" sz="1400" dirty="0"/>
+          </a:p>
+        </p:txBody>
+      </p:sp>
+      <p:sp>
+        <p:nvSpPr>
+          <p:cNvPr id="19" name="Text 17"/>
+          <p:cNvSpPr/>
+          <p:nvPr/>
+        </p:nvSpPr>
+        <p:spPr>
+          <a:xfrm>
+            <a:off x="640080" y="6172200"/>
+            <a:ext cx="10911535" cy="457200"/>
+          </a:xfrm>
+          <a:prstGeom prst="rect">
+            <a:avLst/>
+          </a:prstGeom>
+          <a:noFill/>
+          <a:ln/>
+        </p:spPr>
+        <p:txBody>
+          <a:bodyPr wrap="square" lIns="0" tIns="0" rIns="0" bIns="0" rtlCol="0" anchor="ctr"/>
+          <a:lstStyle/>
+          <a:p>
+            <a:pPr indent="0" marL="0">
+              <a:buNone/>
+            </a:pPr>
+            <a:r>
+              <a:rPr lang="en-US" sz="1600" b="1" dirty="0">
+                <a:solidFill>
+                  <a:srgbClr val="D9434B"/>
                 </a:solidFill>
                 <a:latin typeface="Arial" pitchFamily="34" charset="0"/>
                 <a:ea typeface="Arial" pitchFamily="34" charset="-122"/>
                 <a:cs typeface="Arial" pitchFamily="34" charset="-120"/>
               </a:rPr>
-              <a:t>4</a:t>
-            </a:r>
-            <a:endParaRPr lang="en-US" sz="1500" dirty="0"/>
-          </a:p>
-        </p:txBody>
-      </p:sp>
-      <p:sp>
-        <p:nvSpPr>
-          <p:cNvPr id="19" name="Text 17"/>
-          <p:cNvSpPr/>
-          <p:nvPr/>
-        </p:nvSpPr>
-        <p:spPr>
-          <a:xfrm>
-            <a:off x="1508760" y="3922776"/>
-            <a:ext cx="7498080" cy="676656"/>
-          </a:xfrm>
-          <a:prstGeom prst="rect">
-            <a:avLst/>
-          </a:prstGeom>
-          <a:noFill/>
-          <a:ln/>
-        </p:spPr>
-        <p:txBody>
-          <a:bodyPr wrap="square" lIns="0" tIns="0" rIns="0" bIns="0" rtlCol="0" anchor="ctr"/>
-          <a:lstStyle/>
-          <a:p>
-            <a:pPr indent="0" marL="0">
-              <a:buNone/>
-            </a:pPr>
-            <a:r>
-              <a:rPr lang="en-US" sz="1550" b="1" dirty="0">
-                <a:solidFill>
-                  <a:srgbClr val="0E2233"/>
-                </a:solidFill>
-                <a:latin typeface="Calibri" pitchFamily="34" charset="0"/>
-                <a:ea typeface="Calibri" pitchFamily="34" charset="-122"/>
-                <a:cs typeface="Calibri" pitchFamily="34" charset="-120"/>
-              </a:rPr>
-              <a:t>Push. Watch it fail.</a:t>
-            </a:r>
-            <a:endParaRPr lang="en-US" sz="1550" dirty="0"/>
-          </a:p>
-        </p:txBody>
-      </p:sp>
-      <p:sp>
-        <p:nvSpPr>
-          <p:cNvPr id="20" name="Text 18"/>
-          <p:cNvSpPr/>
-          <p:nvPr/>
-        </p:nvSpPr>
-        <p:spPr>
-          <a:xfrm>
-            <a:off x="9052560" y="3922776"/>
-            <a:ext cx="2468880" cy="676656"/>
-          </a:xfrm>
-          <a:prstGeom prst="rect">
-            <a:avLst/>
-          </a:prstGeom>
-          <a:noFill/>
-          <a:ln/>
-        </p:spPr>
-        <p:txBody>
-          <a:bodyPr wrap="square" lIns="0" tIns="0" rIns="0" bIns="0" rtlCol="0" anchor="ctr"/>
-          <a:lstStyle/>
-          <a:p>
-            <a:pPr algn="r" indent="0" marL="0">
-              <a:buNone/>
-            </a:pPr>
-            <a:r>
-              <a:rPr lang="en-US" sz="1200" i="1" dirty="0">
-                <a:solidFill>
-                  <a:srgbClr val="D9434B"/>
-                </a:solidFill>
-                <a:latin typeface="Calibri" pitchFamily="34" charset="0"/>
-                <a:ea typeface="Calibri" pitchFamily="34" charset="-122"/>
-                <a:cs typeface="Calibri" pitchFamily="34" charset="-120"/>
-              </a:rPr>
-              <a:t>it will fail — usually a missing &lt;depend&gt;</a:t>
-            </a:r>
-            <a:endParaRPr lang="en-US" sz="1200" dirty="0"/>
-          </a:p>
-        </p:txBody>
-      </p:sp>
-      <p:sp>
-        <p:nvSpPr>
-          <p:cNvPr id="21" name="Shape 19"/>
-          <p:cNvSpPr/>
-          <p:nvPr/>
-        </p:nvSpPr>
-        <p:spPr>
-          <a:xfrm>
-            <a:off x="640080" y="4681728"/>
-            <a:ext cx="10911535" cy="676656"/>
-          </a:xfrm>
-          <a:prstGeom prst="roundRect">
-            <a:avLst>
-              <a:gd name="adj" fmla="val 6757"/>
-            </a:avLst>
-          </a:prstGeom>
-          <a:solidFill>
-            <a:srgbClr val="EDF2F6"/>
-          </a:solidFill>
-          <a:ln/>
-        </p:spPr>
-      </p:sp>
-      <p:sp>
-        <p:nvSpPr>
-          <p:cNvPr id="22" name="Shape 20"/>
-          <p:cNvSpPr/>
-          <p:nvPr/>
-        </p:nvSpPr>
-        <p:spPr>
-          <a:xfrm>
-            <a:off x="896112" y="4809744"/>
-            <a:ext cx="402336" cy="402336"/>
-          </a:xfrm>
-          <a:prstGeom prst="ellipse">
-            <a:avLst/>
-          </a:prstGeom>
-          <a:solidFill>
-            <a:srgbClr val="0E2233"/>
-          </a:solidFill>
-          <a:ln/>
-        </p:spPr>
-      </p:sp>
-      <p:sp>
-        <p:nvSpPr>
-          <p:cNvPr id="23" name="Text 21"/>
-          <p:cNvSpPr/>
-          <p:nvPr/>
-        </p:nvSpPr>
-        <p:spPr>
-          <a:xfrm>
-            <a:off x="896112" y="4809744"/>
-            <a:ext cx="402336" cy="402336"/>
-          </a:xfrm>
-          <a:prstGeom prst="rect">
-            <a:avLst/>
-          </a:prstGeom>
-          <a:noFill/>
-          <a:ln/>
-        </p:spPr>
-        <p:txBody>
-          <a:bodyPr wrap="square" lIns="0" tIns="0" rIns="0" bIns="0" rtlCol="0" anchor="ctr"/>
-          <a:lstStyle/>
-          <a:p>
-            <a:pPr algn="ctr" indent="0" marL="0">
-              <a:buNone/>
-            </a:pPr>
-            <a:r>
-              <a:rPr lang="en-US" sz="1500" b="1" dirty="0">
-                <a:solidFill>
-                  <a:srgbClr val="FFFFFF"/>
-                </a:solidFill>
-                <a:latin typeface="Arial" pitchFamily="34" charset="0"/>
-                <a:ea typeface="Arial" pitchFamily="34" charset="-122"/>
-                <a:cs typeface="Arial" pitchFamily="34" charset="-120"/>
-              </a:rPr>
-              <a:t>5</a:t>
-            </a:r>
-            <a:endParaRPr lang="en-US" sz="1500" dirty="0"/>
-          </a:p>
-        </p:txBody>
-      </p:sp>
-      <p:sp>
-        <p:nvSpPr>
-          <p:cNvPr id="24" name="Text 22"/>
-          <p:cNvSpPr/>
-          <p:nvPr/>
-        </p:nvSpPr>
-        <p:spPr>
-          <a:xfrm>
-            <a:off x="1508760" y="4681728"/>
-            <a:ext cx="7498080" cy="676656"/>
-          </a:xfrm>
-          <a:prstGeom prst="rect">
-            <a:avLst/>
-          </a:prstGeom>
-          <a:noFill/>
-          <a:ln/>
-        </p:spPr>
-        <p:txBody>
-          <a:bodyPr wrap="square" lIns="0" tIns="0" rIns="0" bIns="0" rtlCol="0" anchor="ctr"/>
-          <a:lstStyle/>
-          <a:p>
-            <a:pPr indent="0" marL="0">
-              <a:buNone/>
-            </a:pPr>
-            <a:r>
-              <a:rPr lang="en-US" sz="1550" dirty="0">
-                <a:solidFill>
-                  <a:srgbClr val="0E2233"/>
-                </a:solidFill>
-                <a:latin typeface="Calibri" pitchFamily="34" charset="0"/>
-                <a:ea typeface="Calibri" pitchFamily="34" charset="-122"/>
-                <a:cs typeface="Calibri" pitchFamily="34" charset="-120"/>
-              </a:rPr>
-              <a:t>Fix that. The fix is real, and it was a real bug.</a:t>
-            </a:r>
-            <a:endParaRPr lang="en-US" sz="1550" dirty="0"/>
-          </a:p>
-        </p:txBody>
-      </p:sp>
-      <p:sp>
-        <p:nvSpPr>
-          <p:cNvPr id="25" name="Shape 23"/>
-          <p:cNvSpPr/>
-          <p:nvPr/>
-        </p:nvSpPr>
-        <p:spPr>
-          <a:xfrm>
-            <a:off x="640080" y="5440680"/>
-            <a:ext cx="10911535" cy="676656"/>
-          </a:xfrm>
-          <a:prstGeom prst="roundRect">
-            <a:avLst>
-              <a:gd name="adj" fmla="val 6757"/>
-            </a:avLst>
-          </a:prstGeom>
-          <a:solidFill>
-            <a:srgbClr val="EDF2F6"/>
-          </a:solidFill>
-          <a:ln/>
-        </p:spPr>
-      </p:sp>
-      <p:sp>
-        <p:nvSpPr>
-          <p:cNvPr id="26" name="Shape 24"/>
-          <p:cNvSpPr/>
-          <p:nvPr/>
-        </p:nvSpPr>
-        <p:spPr>
-          <a:xfrm>
-            <a:off x="896112" y="5568696"/>
-            <a:ext cx="402336" cy="402336"/>
-          </a:xfrm>
-          <a:prstGeom prst="ellipse">
-            <a:avLst/>
-          </a:prstGeom>
-          <a:solidFill>
-            <a:srgbClr val="0E2233"/>
-          </a:solidFill>
-          <a:ln/>
-        </p:spPr>
-      </p:sp>
-      <p:sp>
-        <p:nvSpPr>
-          <p:cNvPr id="27" name="Text 25"/>
-          <p:cNvSpPr/>
-          <p:nvPr/>
-        </p:nvSpPr>
-        <p:spPr>
-          <a:xfrm>
-            <a:off x="896112" y="5568696"/>
-            <a:ext cx="402336" cy="402336"/>
-          </a:xfrm>
-          <a:prstGeom prst="rect">
-            <a:avLst/>
-          </a:prstGeom>
-          <a:noFill/>
-          <a:ln/>
-        </p:spPr>
-        <p:txBody>
-          <a:bodyPr wrap="square" lIns="0" tIns="0" rIns="0" bIns="0" rtlCol="0" anchor="ctr"/>
-          <a:lstStyle/>
-          <a:p>
-            <a:pPr algn="ctr" indent="0" marL="0">
-              <a:buNone/>
-            </a:pPr>
-            <a:r>
-              <a:rPr lang="en-US" sz="1500" b="1" dirty="0">
-                <a:solidFill>
-                  <a:srgbClr val="FFFFFF"/>
-                </a:solidFill>
-                <a:latin typeface="Arial" pitchFamily="34" charset="0"/>
-                <a:ea typeface="Arial" pitchFamily="34" charset="-122"/>
-                <a:cs typeface="Arial" pitchFamily="34" charset="-120"/>
-              </a:rPr>
-              <a:t>6</a:t>
-            </a:r>
-            <a:endParaRPr lang="en-US" sz="1500" dirty="0"/>
-          </a:p>
-        </p:txBody>
-      </p:sp>
-      <p:sp>
-        <p:nvSpPr>
-          <p:cNvPr id="28" name="Text 26"/>
-          <p:cNvSpPr/>
-          <p:nvPr/>
-        </p:nvSpPr>
-        <p:spPr>
-          <a:xfrm>
-            <a:off x="1508760" y="5440680"/>
-            <a:ext cx="7498080" cy="676656"/>
-          </a:xfrm>
-          <a:prstGeom prst="rect">
-            <a:avLst/>
-          </a:prstGeom>
-          <a:noFill/>
-          <a:ln/>
-        </p:spPr>
-        <p:txBody>
-          <a:bodyPr wrap="square" lIns="0" tIns="0" rIns="0" bIns="0" rtlCol="0" anchor="ctr"/>
-          <a:lstStyle/>
-          <a:p>
-            <a:pPr indent="0" marL="0">
-              <a:buNone/>
-            </a:pPr>
-            <a:r>
-              <a:rPr lang="en-US" sz="1550" dirty="0">
-                <a:solidFill>
-                  <a:srgbClr val="0E2233"/>
-                </a:solidFill>
-                <a:latin typeface="Calibri" pitchFamily="34" charset="0"/>
-                <a:ea typeface="Calibri" pitchFamily="34" charset="-122"/>
-                <a:cs typeface="Calibri" pitchFamily="34" charset="-120"/>
-              </a:rPr>
-              <a:t>Turn on branch protection for main.</a:t>
-            </a:r>
-            <a:endParaRPr lang="en-US" sz="1550" dirty="0"/>
-          </a:p>
-        </p:txBody>
-      </p:sp>
-      <p:sp>
-        <p:nvSpPr>
-          <p:cNvPr id="29" name="Text 27"/>
-          <p:cNvSpPr/>
-          <p:nvPr/>
-        </p:nvSpPr>
-        <p:spPr>
-          <a:xfrm>
-            <a:off x="640080" y="6217920"/>
-            <a:ext cx="10911535" cy="411480"/>
-          </a:xfrm>
-          <a:prstGeom prst="rect">
-            <a:avLst/>
-          </a:prstGeom>
-          <a:noFill/>
-          <a:ln/>
-        </p:spPr>
-        <p:txBody>
-          <a:bodyPr wrap="square" lIns="0" tIns="0" rIns="0" bIns="0" rtlCol="0" anchor="ctr"/>
-          <a:lstStyle/>
-          <a:p>
-            <a:pPr indent="0" marL="0">
-              <a:buNone/>
-            </a:pPr>
-            <a:r>
-              <a:rPr lang="en-US" sz="1400" i="1" dirty="0">
-                <a:solidFill>
-                  <a:srgbClr val="5E7789"/>
-                </a:solidFill>
-                <a:latin typeface="Calibri" pitchFamily="34" charset="0"/>
-                <a:ea typeface="Calibri" pitchFamily="34" charset="-122"/>
-                <a:cs typeface="Calibri" pitchFamily="34" charset="-120"/>
-              </a:rPr>
-              <a:t>Come and pair with me if you get stuck on step 4. That step is the whole workshop.</a:t>
-            </a:r>
-            <a:endParaRPr lang="en-US" sz="1400" dirty="0"/>
+              <a:t>Never put "deploy to the robot" on push: main without a human in the loop.</a:t>
+            </a:r>
+            <a:endParaRPr lang="en-US" sz="1600" dirty="0"/>
           </a:p>
         </p:txBody>
       </p:sp>
@@ -9383,6 +9197,914 @@
 <file path=ppt/slides/slide20.xml><?xml version="1.0" encoding="utf-8"?>
 <p:sld xmlns:a="http://schemas.openxmlformats.org/drawingml/2006/main" xmlns:r="http://schemas.openxmlformats.org/officeDocument/2006/relationships" xmlns:p="http://schemas.openxmlformats.org/presentationml/2006/main">
   <p:cSld name="Slide 20">
+    <p:bg>
+      <p:bgPr>
+        <a:solidFill>
+          <a:srgbClr val="FFFFFF"/>
+        </a:solidFill>
+      </p:bgPr>
+    </p:bg>
+    <p:spTree>
+      <p:nvGrpSpPr>
+        <p:cNvPr id="1" name=""/>
+        <p:cNvGrpSpPr/>
+        <p:nvPr/>
+      </p:nvGrpSpPr>
+      <p:grpSpPr>
+        <a:xfrm>
+          <a:off x="0" y="0"/>
+          <a:ext cx="0" cy="0"/>
+          <a:chOff x="0" y="0"/>
+          <a:chExt cx="0" cy="0"/>
+        </a:xfrm>
+      </p:grpSpPr>
+      <p:sp>
+        <p:nvSpPr>
+          <p:cNvPr id="2" name="Text 0"/>
+          <p:cNvSpPr/>
+          <p:nvPr/>
+        </p:nvSpPr>
+        <p:spPr>
+          <a:xfrm>
+            <a:off x="640080" y="146304"/>
+            <a:ext cx="10911535" cy="274320"/>
+          </a:xfrm>
+          <a:prstGeom prst="rect">
+            <a:avLst/>
+          </a:prstGeom>
+          <a:noFill/>
+          <a:ln/>
+        </p:spPr>
+        <p:txBody>
+          <a:bodyPr wrap="square" lIns="0" tIns="0" rIns="0" bIns="0" rtlCol="0" anchor="ctr"/>
+          <a:lstStyle/>
+          <a:p>
+            <a:pPr indent="0" marL="0">
+              <a:buNone/>
+            </a:pPr>
+            <a:r>
+              <a:rPr lang="en-US" sz="1100" b="1" spc="200" kern="0" dirty="0">
+                <a:solidFill>
+                  <a:srgbClr val="5E7789"/>
+                </a:solidFill>
+                <a:latin typeface="Calibri" pitchFamily="34" charset="0"/>
+                <a:ea typeface="Calibri" pitchFamily="34" charset="-122"/>
+                <a:cs typeface="Calibri" pitchFamily="34" charset="-120"/>
+              </a:rPr>
+              <a:t>DO THIS BEFORE NEXT WEEK</a:t>
+            </a:r>
+            <a:endParaRPr lang="en-US" sz="1100" dirty="0"/>
+          </a:p>
+        </p:txBody>
+      </p:sp>
+      <p:sp>
+        <p:nvSpPr>
+          <p:cNvPr id="3" name="Text 1"/>
+          <p:cNvSpPr/>
+          <p:nvPr/>
+        </p:nvSpPr>
+        <p:spPr>
+          <a:xfrm>
+            <a:off x="640080" y="411480"/>
+            <a:ext cx="10911535" cy="777240"/>
+          </a:xfrm>
+          <a:prstGeom prst="rect">
+            <a:avLst/>
+          </a:prstGeom>
+          <a:noFill/>
+          <a:ln/>
+        </p:spPr>
+        <p:txBody>
+          <a:bodyPr wrap="square" lIns="0" tIns="0" rIns="0" bIns="0" rtlCol="0" anchor="ctr"/>
+          <a:lstStyle/>
+          <a:p>
+            <a:pPr algn="l" indent="0" marL="0">
+              <a:buNone/>
+            </a:pPr>
+            <a:r>
+              <a:rPr lang="en-US" sz="3400" b="1" dirty="0">
+                <a:solidFill>
+                  <a:srgbClr val="0E2233"/>
+                </a:solidFill>
+                <a:latin typeface="Arial" pitchFamily="34" charset="0"/>
+                <a:ea typeface="Arial" pitchFamily="34" charset="-122"/>
+                <a:cs typeface="Arial" pitchFamily="34" charset="-120"/>
+              </a:rPr>
+              <a:t>Your turn</a:t>
+            </a:r>
+            <a:endParaRPr lang="en-US" sz="3400" dirty="0"/>
+          </a:p>
+        </p:txBody>
+      </p:sp>
+      <p:sp>
+        <p:nvSpPr>
+          <p:cNvPr id="4" name="Shape 2"/>
+          <p:cNvSpPr/>
+          <p:nvPr/>
+        </p:nvSpPr>
+        <p:spPr>
+          <a:xfrm>
+            <a:off x="640080" y="1645920"/>
+            <a:ext cx="10911535" cy="676656"/>
+          </a:xfrm>
+          <a:prstGeom prst="roundRect">
+            <a:avLst>
+              <a:gd name="adj" fmla="val 6757"/>
+            </a:avLst>
+          </a:prstGeom>
+          <a:solidFill>
+            <a:srgbClr val="EDF2F6"/>
+          </a:solidFill>
+          <a:ln/>
+        </p:spPr>
+      </p:sp>
+      <p:sp>
+        <p:nvSpPr>
+          <p:cNvPr id="5" name="Shape 3"/>
+          <p:cNvSpPr/>
+          <p:nvPr/>
+        </p:nvSpPr>
+        <p:spPr>
+          <a:xfrm>
+            <a:off x="896112" y="1773936"/>
+            <a:ext cx="402336" cy="402336"/>
+          </a:xfrm>
+          <a:prstGeom prst="ellipse">
+            <a:avLst/>
+          </a:prstGeom>
+          <a:solidFill>
+            <a:srgbClr val="0E2233"/>
+          </a:solidFill>
+          <a:ln/>
+        </p:spPr>
+      </p:sp>
+      <p:sp>
+        <p:nvSpPr>
+          <p:cNvPr id="6" name="Text 4"/>
+          <p:cNvSpPr/>
+          <p:nvPr/>
+        </p:nvSpPr>
+        <p:spPr>
+          <a:xfrm>
+            <a:off x="896112" y="1773936"/>
+            <a:ext cx="402336" cy="402336"/>
+          </a:xfrm>
+          <a:prstGeom prst="rect">
+            <a:avLst/>
+          </a:prstGeom>
+          <a:noFill/>
+          <a:ln/>
+        </p:spPr>
+        <p:txBody>
+          <a:bodyPr wrap="square" lIns="0" tIns="0" rIns="0" bIns="0" rtlCol="0" anchor="ctr"/>
+          <a:lstStyle/>
+          <a:p>
+            <a:pPr algn="ctr" indent="0" marL="0">
+              <a:buNone/>
+            </a:pPr>
+            <a:r>
+              <a:rPr lang="en-US" sz="1500" b="1" dirty="0">
+                <a:solidFill>
+                  <a:srgbClr val="FFFFFF"/>
+                </a:solidFill>
+                <a:latin typeface="Arial" pitchFamily="34" charset="0"/>
+                <a:ea typeface="Arial" pitchFamily="34" charset="-122"/>
+                <a:cs typeface="Arial" pitchFamily="34" charset="-120"/>
+              </a:rPr>
+              <a:t>1</a:t>
+            </a:r>
+            <a:endParaRPr lang="en-US" sz="1500" dirty="0"/>
+          </a:p>
+        </p:txBody>
+      </p:sp>
+      <p:sp>
+        <p:nvSpPr>
+          <p:cNvPr id="7" name="Text 5"/>
+          <p:cNvSpPr/>
+          <p:nvPr/>
+        </p:nvSpPr>
+        <p:spPr>
+          <a:xfrm>
+            <a:off x="1508760" y="1645920"/>
+            <a:ext cx="7498080" cy="676656"/>
+          </a:xfrm>
+          <a:prstGeom prst="rect">
+            <a:avLst/>
+          </a:prstGeom>
+          <a:noFill/>
+          <a:ln/>
+        </p:spPr>
+        <p:txBody>
+          <a:bodyPr wrap="square" lIns="0" tIns="0" rIns="0" bIns="0" rtlCol="0" anchor="ctr"/>
+          <a:lstStyle/>
+          <a:p>
+            <a:pPr indent="0" marL="0">
+              <a:buNone/>
+            </a:pPr>
+            <a:r>
+              <a:rPr lang="en-US" sz="1550" dirty="0">
+                <a:solidFill>
+                  <a:srgbClr val="0E2233"/>
+                </a:solidFill>
+                <a:latin typeface="Calibri" pitchFamily="34" charset="0"/>
+                <a:ea typeface="Calibri" pitchFamily="34" charset="-122"/>
+                <a:cs typeface="Calibri" pitchFamily="34" charset="-120"/>
+              </a:rPr>
+              <a:t>Fork turtle_guard, or pick one of your own ROS 2 repos.</a:t>
+            </a:r>
+            <a:endParaRPr lang="en-US" sz="1550" dirty="0"/>
+          </a:p>
+        </p:txBody>
+      </p:sp>
+      <p:sp>
+        <p:nvSpPr>
+          <p:cNvPr id="8" name="Shape 6"/>
+          <p:cNvSpPr/>
+          <p:nvPr/>
+        </p:nvSpPr>
+        <p:spPr>
+          <a:xfrm>
+            <a:off x="640080" y="2404872"/>
+            <a:ext cx="10911535" cy="676656"/>
+          </a:xfrm>
+          <a:prstGeom prst="roundRect">
+            <a:avLst>
+              <a:gd name="adj" fmla="val 6757"/>
+            </a:avLst>
+          </a:prstGeom>
+          <a:solidFill>
+            <a:srgbClr val="EDF2F6"/>
+          </a:solidFill>
+          <a:ln/>
+        </p:spPr>
+      </p:sp>
+      <p:sp>
+        <p:nvSpPr>
+          <p:cNvPr id="9" name="Shape 7"/>
+          <p:cNvSpPr/>
+          <p:nvPr/>
+        </p:nvSpPr>
+        <p:spPr>
+          <a:xfrm>
+            <a:off x="896112" y="2532888"/>
+            <a:ext cx="402336" cy="402336"/>
+          </a:xfrm>
+          <a:prstGeom prst="ellipse">
+            <a:avLst/>
+          </a:prstGeom>
+          <a:solidFill>
+            <a:srgbClr val="0E2233"/>
+          </a:solidFill>
+          <a:ln/>
+        </p:spPr>
+      </p:sp>
+      <p:sp>
+        <p:nvSpPr>
+          <p:cNvPr id="10" name="Text 8"/>
+          <p:cNvSpPr/>
+          <p:nvPr/>
+        </p:nvSpPr>
+        <p:spPr>
+          <a:xfrm>
+            <a:off x="896112" y="2532888"/>
+            <a:ext cx="402336" cy="402336"/>
+          </a:xfrm>
+          <a:prstGeom prst="rect">
+            <a:avLst/>
+          </a:prstGeom>
+          <a:noFill/>
+          <a:ln/>
+        </p:spPr>
+        <p:txBody>
+          <a:bodyPr wrap="square" lIns="0" tIns="0" rIns="0" bIns="0" rtlCol="0" anchor="ctr"/>
+          <a:lstStyle/>
+          <a:p>
+            <a:pPr algn="ctr" indent="0" marL="0">
+              <a:buNone/>
+            </a:pPr>
+            <a:r>
+              <a:rPr lang="en-US" sz="1500" b="1" dirty="0">
+                <a:solidFill>
+                  <a:srgbClr val="FFFFFF"/>
+                </a:solidFill>
+                <a:latin typeface="Arial" pitchFamily="34" charset="0"/>
+                <a:ea typeface="Arial" pitchFamily="34" charset="-122"/>
+                <a:cs typeface="Arial" pitchFamily="34" charset="-120"/>
+              </a:rPr>
+              <a:t>2</a:t>
+            </a:r>
+            <a:endParaRPr lang="en-US" sz="1500" dirty="0"/>
+          </a:p>
+        </p:txBody>
+      </p:sp>
+      <p:sp>
+        <p:nvSpPr>
+          <p:cNvPr id="11" name="Text 9"/>
+          <p:cNvSpPr/>
+          <p:nvPr/>
+        </p:nvSpPr>
+        <p:spPr>
+          <a:xfrm>
+            <a:off x="1508760" y="2404872"/>
+            <a:ext cx="7498080" cy="676656"/>
+          </a:xfrm>
+          <a:prstGeom prst="rect">
+            <a:avLst/>
+          </a:prstGeom>
+          <a:noFill/>
+          <a:ln/>
+        </p:spPr>
+        <p:txBody>
+          <a:bodyPr wrap="square" lIns="0" tIns="0" rIns="0" bIns="0" rtlCol="0" anchor="ctr"/>
+          <a:lstStyle/>
+          <a:p>
+            <a:pPr indent="0" marL="0">
+              <a:buNone/>
+            </a:pPr>
+            <a:r>
+              <a:rPr lang="en-US" sz="1550" dirty="0">
+                <a:solidFill>
+                  <a:srgbClr val="0E2233"/>
+                </a:solidFill>
+                <a:latin typeface="Calibri" pitchFamily="34" charset="0"/>
+                <a:ea typeface="Calibri" pitchFamily="34" charset="-122"/>
+                <a:cs typeface="Calibri" pitchFamily="34" charset="-120"/>
+              </a:rPr>
+              <a:t>Copy 02-ros2-build-test.yml into .github/workflows/</a:t>
+            </a:r>
+            <a:endParaRPr lang="en-US" sz="1550" dirty="0"/>
+          </a:p>
+        </p:txBody>
+      </p:sp>
+      <p:sp>
+        <p:nvSpPr>
+          <p:cNvPr id="12" name="Shape 10"/>
+          <p:cNvSpPr/>
+          <p:nvPr/>
+        </p:nvSpPr>
+        <p:spPr>
+          <a:xfrm>
+            <a:off x="640080" y="3163824"/>
+            <a:ext cx="10911535" cy="676656"/>
+          </a:xfrm>
+          <a:prstGeom prst="roundRect">
+            <a:avLst>
+              <a:gd name="adj" fmla="val 6757"/>
+            </a:avLst>
+          </a:prstGeom>
+          <a:solidFill>
+            <a:srgbClr val="EDF2F6"/>
+          </a:solidFill>
+          <a:ln/>
+        </p:spPr>
+      </p:sp>
+      <p:sp>
+        <p:nvSpPr>
+          <p:cNvPr id="13" name="Shape 11"/>
+          <p:cNvSpPr/>
+          <p:nvPr/>
+        </p:nvSpPr>
+        <p:spPr>
+          <a:xfrm>
+            <a:off x="896112" y="3291840"/>
+            <a:ext cx="402336" cy="402336"/>
+          </a:xfrm>
+          <a:prstGeom prst="ellipse">
+            <a:avLst/>
+          </a:prstGeom>
+          <a:solidFill>
+            <a:srgbClr val="0E2233"/>
+          </a:solidFill>
+          <a:ln/>
+        </p:spPr>
+      </p:sp>
+      <p:sp>
+        <p:nvSpPr>
+          <p:cNvPr id="14" name="Text 12"/>
+          <p:cNvSpPr/>
+          <p:nvPr/>
+        </p:nvSpPr>
+        <p:spPr>
+          <a:xfrm>
+            <a:off x="896112" y="3291840"/>
+            <a:ext cx="402336" cy="402336"/>
+          </a:xfrm>
+          <a:prstGeom prst="rect">
+            <a:avLst/>
+          </a:prstGeom>
+          <a:noFill/>
+          <a:ln/>
+        </p:spPr>
+        <p:txBody>
+          <a:bodyPr wrap="square" lIns="0" tIns="0" rIns="0" bIns="0" rtlCol="0" anchor="ctr"/>
+          <a:lstStyle/>
+          <a:p>
+            <a:pPr algn="ctr" indent="0" marL="0">
+              <a:buNone/>
+            </a:pPr>
+            <a:r>
+              <a:rPr lang="en-US" sz="1500" b="1" dirty="0">
+                <a:solidFill>
+                  <a:srgbClr val="FFFFFF"/>
+                </a:solidFill>
+                <a:latin typeface="Arial" pitchFamily="34" charset="0"/>
+                <a:ea typeface="Arial" pitchFamily="34" charset="-122"/>
+                <a:cs typeface="Arial" pitchFamily="34" charset="-120"/>
+              </a:rPr>
+              <a:t>3</a:t>
+            </a:r>
+            <a:endParaRPr lang="en-US" sz="1500" dirty="0"/>
+          </a:p>
+        </p:txBody>
+      </p:sp>
+      <p:sp>
+        <p:nvSpPr>
+          <p:cNvPr id="15" name="Text 13"/>
+          <p:cNvSpPr/>
+          <p:nvPr/>
+        </p:nvSpPr>
+        <p:spPr>
+          <a:xfrm>
+            <a:off x="1508760" y="3163824"/>
+            <a:ext cx="7498080" cy="676656"/>
+          </a:xfrm>
+          <a:prstGeom prst="rect">
+            <a:avLst/>
+          </a:prstGeom>
+          <a:noFill/>
+          <a:ln/>
+        </p:spPr>
+        <p:txBody>
+          <a:bodyPr wrap="square" lIns="0" tIns="0" rIns="0" bIns="0" rtlCol="0" anchor="ctr"/>
+          <a:lstStyle/>
+          <a:p>
+            <a:pPr indent="0" marL="0">
+              <a:buNone/>
+            </a:pPr>
+            <a:r>
+              <a:rPr lang="en-US" sz="1550" dirty="0">
+                <a:solidFill>
+                  <a:srgbClr val="0E2233"/>
+                </a:solidFill>
+                <a:latin typeface="Calibri" pitchFamily="34" charset="0"/>
+                <a:ea typeface="Calibri" pitchFamily="34" charset="-122"/>
+                <a:cs typeface="Calibri" pitchFamily="34" charset="-120"/>
+              </a:rPr>
+              <a:t>Change --packages-select turtle_guard to your package name.</a:t>
+            </a:r>
+            <a:endParaRPr lang="en-US" sz="1550" dirty="0"/>
+          </a:p>
+        </p:txBody>
+      </p:sp>
+      <p:sp>
+        <p:nvSpPr>
+          <p:cNvPr id="16" name="Shape 14"/>
+          <p:cNvSpPr/>
+          <p:nvPr/>
+        </p:nvSpPr>
+        <p:spPr>
+          <a:xfrm>
+            <a:off x="640080" y="3922776"/>
+            <a:ext cx="10911535" cy="676656"/>
+          </a:xfrm>
+          <a:prstGeom prst="roundRect">
+            <a:avLst>
+              <a:gd name="adj" fmla="val 6757"/>
+            </a:avLst>
+          </a:prstGeom>
+          <a:solidFill>
+            <a:srgbClr val="FBECED"/>
+          </a:solidFill>
+          <a:ln/>
+        </p:spPr>
+      </p:sp>
+      <p:sp>
+        <p:nvSpPr>
+          <p:cNvPr id="17" name="Shape 15"/>
+          <p:cNvSpPr/>
+          <p:nvPr/>
+        </p:nvSpPr>
+        <p:spPr>
+          <a:xfrm>
+            <a:off x="896112" y="4050792"/>
+            <a:ext cx="402336" cy="402336"/>
+          </a:xfrm>
+          <a:prstGeom prst="ellipse">
+            <a:avLst/>
+          </a:prstGeom>
+          <a:solidFill>
+            <a:srgbClr val="D9434B"/>
+          </a:solidFill>
+          <a:ln/>
+        </p:spPr>
+      </p:sp>
+      <p:sp>
+        <p:nvSpPr>
+          <p:cNvPr id="18" name="Text 16"/>
+          <p:cNvSpPr/>
+          <p:nvPr/>
+        </p:nvSpPr>
+        <p:spPr>
+          <a:xfrm>
+            <a:off x="896112" y="4050792"/>
+            <a:ext cx="402336" cy="402336"/>
+          </a:xfrm>
+          <a:prstGeom prst="rect">
+            <a:avLst/>
+          </a:prstGeom>
+          <a:noFill/>
+          <a:ln/>
+        </p:spPr>
+        <p:txBody>
+          <a:bodyPr wrap="square" lIns="0" tIns="0" rIns="0" bIns="0" rtlCol="0" anchor="ctr"/>
+          <a:lstStyle/>
+          <a:p>
+            <a:pPr algn="ctr" indent="0" marL="0">
+              <a:buNone/>
+            </a:pPr>
+            <a:r>
+              <a:rPr lang="en-US" sz="1500" b="1" dirty="0">
+                <a:solidFill>
+                  <a:srgbClr val="FFFFFF"/>
+                </a:solidFill>
+                <a:latin typeface="Arial" pitchFamily="34" charset="0"/>
+                <a:ea typeface="Arial" pitchFamily="34" charset="-122"/>
+                <a:cs typeface="Arial" pitchFamily="34" charset="-120"/>
+              </a:rPr>
+              <a:t>4</a:t>
+            </a:r>
+            <a:endParaRPr lang="en-US" sz="1500" dirty="0"/>
+          </a:p>
+        </p:txBody>
+      </p:sp>
+      <p:sp>
+        <p:nvSpPr>
+          <p:cNvPr id="19" name="Text 17"/>
+          <p:cNvSpPr/>
+          <p:nvPr/>
+        </p:nvSpPr>
+        <p:spPr>
+          <a:xfrm>
+            <a:off x="1508760" y="3922776"/>
+            <a:ext cx="7498080" cy="676656"/>
+          </a:xfrm>
+          <a:prstGeom prst="rect">
+            <a:avLst/>
+          </a:prstGeom>
+          <a:noFill/>
+          <a:ln/>
+        </p:spPr>
+        <p:txBody>
+          <a:bodyPr wrap="square" lIns="0" tIns="0" rIns="0" bIns="0" rtlCol="0" anchor="ctr"/>
+          <a:lstStyle/>
+          <a:p>
+            <a:pPr indent="0" marL="0">
+              <a:buNone/>
+            </a:pPr>
+            <a:r>
+              <a:rPr lang="en-US" sz="1550" b="1" dirty="0">
+                <a:solidFill>
+                  <a:srgbClr val="0E2233"/>
+                </a:solidFill>
+                <a:latin typeface="Calibri" pitchFamily="34" charset="0"/>
+                <a:ea typeface="Calibri" pitchFamily="34" charset="-122"/>
+                <a:cs typeface="Calibri" pitchFamily="34" charset="-120"/>
+              </a:rPr>
+              <a:t>Push. Watch it fail.</a:t>
+            </a:r>
+            <a:endParaRPr lang="en-US" sz="1550" dirty="0"/>
+          </a:p>
+        </p:txBody>
+      </p:sp>
+      <p:sp>
+        <p:nvSpPr>
+          <p:cNvPr id="20" name="Text 18"/>
+          <p:cNvSpPr/>
+          <p:nvPr/>
+        </p:nvSpPr>
+        <p:spPr>
+          <a:xfrm>
+            <a:off x="9052560" y="3922776"/>
+            <a:ext cx="2468880" cy="676656"/>
+          </a:xfrm>
+          <a:prstGeom prst="rect">
+            <a:avLst/>
+          </a:prstGeom>
+          <a:noFill/>
+          <a:ln/>
+        </p:spPr>
+        <p:txBody>
+          <a:bodyPr wrap="square" lIns="0" tIns="0" rIns="0" bIns="0" rtlCol="0" anchor="ctr"/>
+          <a:lstStyle/>
+          <a:p>
+            <a:pPr algn="r" indent="0" marL="0">
+              <a:buNone/>
+            </a:pPr>
+            <a:r>
+              <a:rPr lang="en-US" sz="1200" i="1" dirty="0">
+                <a:solidFill>
+                  <a:srgbClr val="D9434B"/>
+                </a:solidFill>
+                <a:latin typeface="Calibri" pitchFamily="34" charset="0"/>
+                <a:ea typeface="Calibri" pitchFamily="34" charset="-122"/>
+                <a:cs typeface="Calibri" pitchFamily="34" charset="-120"/>
+              </a:rPr>
+              <a:t>it will fail — usually a missing &lt;depend&gt;</a:t>
+            </a:r>
+            <a:endParaRPr lang="en-US" sz="1200" dirty="0"/>
+          </a:p>
+        </p:txBody>
+      </p:sp>
+      <p:sp>
+        <p:nvSpPr>
+          <p:cNvPr id="21" name="Shape 19"/>
+          <p:cNvSpPr/>
+          <p:nvPr/>
+        </p:nvSpPr>
+        <p:spPr>
+          <a:xfrm>
+            <a:off x="640080" y="4681728"/>
+            <a:ext cx="10911535" cy="676656"/>
+          </a:xfrm>
+          <a:prstGeom prst="roundRect">
+            <a:avLst>
+              <a:gd name="adj" fmla="val 6757"/>
+            </a:avLst>
+          </a:prstGeom>
+          <a:solidFill>
+            <a:srgbClr val="EDF2F6"/>
+          </a:solidFill>
+          <a:ln/>
+        </p:spPr>
+      </p:sp>
+      <p:sp>
+        <p:nvSpPr>
+          <p:cNvPr id="22" name="Shape 20"/>
+          <p:cNvSpPr/>
+          <p:nvPr/>
+        </p:nvSpPr>
+        <p:spPr>
+          <a:xfrm>
+            <a:off x="896112" y="4809744"/>
+            <a:ext cx="402336" cy="402336"/>
+          </a:xfrm>
+          <a:prstGeom prst="ellipse">
+            <a:avLst/>
+          </a:prstGeom>
+          <a:solidFill>
+            <a:srgbClr val="0E2233"/>
+          </a:solidFill>
+          <a:ln/>
+        </p:spPr>
+      </p:sp>
+      <p:sp>
+        <p:nvSpPr>
+          <p:cNvPr id="23" name="Text 21"/>
+          <p:cNvSpPr/>
+          <p:nvPr/>
+        </p:nvSpPr>
+        <p:spPr>
+          <a:xfrm>
+            <a:off x="896112" y="4809744"/>
+            <a:ext cx="402336" cy="402336"/>
+          </a:xfrm>
+          <a:prstGeom prst="rect">
+            <a:avLst/>
+          </a:prstGeom>
+          <a:noFill/>
+          <a:ln/>
+        </p:spPr>
+        <p:txBody>
+          <a:bodyPr wrap="square" lIns="0" tIns="0" rIns="0" bIns="0" rtlCol="0" anchor="ctr"/>
+          <a:lstStyle/>
+          <a:p>
+            <a:pPr algn="ctr" indent="0" marL="0">
+              <a:buNone/>
+            </a:pPr>
+            <a:r>
+              <a:rPr lang="en-US" sz="1500" b="1" dirty="0">
+                <a:solidFill>
+                  <a:srgbClr val="FFFFFF"/>
+                </a:solidFill>
+                <a:latin typeface="Arial" pitchFamily="34" charset="0"/>
+                <a:ea typeface="Arial" pitchFamily="34" charset="-122"/>
+                <a:cs typeface="Arial" pitchFamily="34" charset="-120"/>
+              </a:rPr>
+              <a:t>5</a:t>
+            </a:r>
+            <a:endParaRPr lang="en-US" sz="1500" dirty="0"/>
+          </a:p>
+        </p:txBody>
+      </p:sp>
+      <p:sp>
+        <p:nvSpPr>
+          <p:cNvPr id="24" name="Text 22"/>
+          <p:cNvSpPr/>
+          <p:nvPr/>
+        </p:nvSpPr>
+        <p:spPr>
+          <a:xfrm>
+            <a:off x="1508760" y="4681728"/>
+            <a:ext cx="7498080" cy="676656"/>
+          </a:xfrm>
+          <a:prstGeom prst="rect">
+            <a:avLst/>
+          </a:prstGeom>
+          <a:noFill/>
+          <a:ln/>
+        </p:spPr>
+        <p:txBody>
+          <a:bodyPr wrap="square" lIns="0" tIns="0" rIns="0" bIns="0" rtlCol="0" anchor="ctr"/>
+          <a:lstStyle/>
+          <a:p>
+            <a:pPr indent="0" marL="0">
+              <a:buNone/>
+            </a:pPr>
+            <a:r>
+              <a:rPr lang="en-US" sz="1550" dirty="0">
+                <a:solidFill>
+                  <a:srgbClr val="0E2233"/>
+                </a:solidFill>
+                <a:latin typeface="Calibri" pitchFamily="34" charset="0"/>
+                <a:ea typeface="Calibri" pitchFamily="34" charset="-122"/>
+                <a:cs typeface="Calibri" pitchFamily="34" charset="-120"/>
+              </a:rPr>
+              <a:t>Fix that. The fix is real, and it was a real bug.</a:t>
+            </a:r>
+            <a:endParaRPr lang="en-US" sz="1550" dirty="0"/>
+          </a:p>
+        </p:txBody>
+      </p:sp>
+      <p:sp>
+        <p:nvSpPr>
+          <p:cNvPr id="25" name="Shape 23"/>
+          <p:cNvSpPr/>
+          <p:nvPr/>
+        </p:nvSpPr>
+        <p:spPr>
+          <a:xfrm>
+            <a:off x="640080" y="5440680"/>
+            <a:ext cx="10911535" cy="676656"/>
+          </a:xfrm>
+          <a:prstGeom prst="roundRect">
+            <a:avLst>
+              <a:gd name="adj" fmla="val 6757"/>
+            </a:avLst>
+          </a:prstGeom>
+          <a:solidFill>
+            <a:srgbClr val="EDF2F6"/>
+          </a:solidFill>
+          <a:ln/>
+        </p:spPr>
+      </p:sp>
+      <p:sp>
+        <p:nvSpPr>
+          <p:cNvPr id="26" name="Shape 24"/>
+          <p:cNvSpPr/>
+          <p:nvPr/>
+        </p:nvSpPr>
+        <p:spPr>
+          <a:xfrm>
+            <a:off x="896112" y="5568696"/>
+            <a:ext cx="402336" cy="402336"/>
+          </a:xfrm>
+          <a:prstGeom prst="ellipse">
+            <a:avLst/>
+          </a:prstGeom>
+          <a:solidFill>
+            <a:srgbClr val="0E2233"/>
+          </a:solidFill>
+          <a:ln/>
+        </p:spPr>
+      </p:sp>
+      <p:sp>
+        <p:nvSpPr>
+          <p:cNvPr id="27" name="Text 25"/>
+          <p:cNvSpPr/>
+          <p:nvPr/>
+        </p:nvSpPr>
+        <p:spPr>
+          <a:xfrm>
+            <a:off x="896112" y="5568696"/>
+            <a:ext cx="402336" cy="402336"/>
+          </a:xfrm>
+          <a:prstGeom prst="rect">
+            <a:avLst/>
+          </a:prstGeom>
+          <a:noFill/>
+          <a:ln/>
+        </p:spPr>
+        <p:txBody>
+          <a:bodyPr wrap="square" lIns="0" tIns="0" rIns="0" bIns="0" rtlCol="0" anchor="ctr"/>
+          <a:lstStyle/>
+          <a:p>
+            <a:pPr algn="ctr" indent="0" marL="0">
+              <a:buNone/>
+            </a:pPr>
+            <a:r>
+              <a:rPr lang="en-US" sz="1500" b="1" dirty="0">
+                <a:solidFill>
+                  <a:srgbClr val="FFFFFF"/>
+                </a:solidFill>
+                <a:latin typeface="Arial" pitchFamily="34" charset="0"/>
+                <a:ea typeface="Arial" pitchFamily="34" charset="-122"/>
+                <a:cs typeface="Arial" pitchFamily="34" charset="-120"/>
+              </a:rPr>
+              <a:t>6</a:t>
+            </a:r>
+            <a:endParaRPr lang="en-US" sz="1500" dirty="0"/>
+          </a:p>
+        </p:txBody>
+      </p:sp>
+      <p:sp>
+        <p:nvSpPr>
+          <p:cNvPr id="28" name="Text 26"/>
+          <p:cNvSpPr/>
+          <p:nvPr/>
+        </p:nvSpPr>
+        <p:spPr>
+          <a:xfrm>
+            <a:off x="1508760" y="5440680"/>
+            <a:ext cx="7498080" cy="676656"/>
+          </a:xfrm>
+          <a:prstGeom prst="rect">
+            <a:avLst/>
+          </a:prstGeom>
+          <a:noFill/>
+          <a:ln/>
+        </p:spPr>
+        <p:txBody>
+          <a:bodyPr wrap="square" lIns="0" tIns="0" rIns="0" bIns="0" rtlCol="0" anchor="ctr"/>
+          <a:lstStyle/>
+          <a:p>
+            <a:pPr indent="0" marL="0">
+              <a:buNone/>
+            </a:pPr>
+            <a:r>
+              <a:rPr lang="en-US" sz="1550" dirty="0">
+                <a:solidFill>
+                  <a:srgbClr val="0E2233"/>
+                </a:solidFill>
+                <a:latin typeface="Calibri" pitchFamily="34" charset="0"/>
+                <a:ea typeface="Calibri" pitchFamily="34" charset="-122"/>
+                <a:cs typeface="Calibri" pitchFamily="34" charset="-120"/>
+              </a:rPr>
+              <a:t>Turn on branch protection for main.</a:t>
+            </a:r>
+            <a:endParaRPr lang="en-US" sz="1550" dirty="0"/>
+          </a:p>
+        </p:txBody>
+      </p:sp>
+      <p:sp>
+        <p:nvSpPr>
+          <p:cNvPr id="29" name="Text 27"/>
+          <p:cNvSpPr/>
+          <p:nvPr/>
+        </p:nvSpPr>
+        <p:spPr>
+          <a:xfrm>
+            <a:off x="640080" y="6217920"/>
+            <a:ext cx="10911535" cy="411480"/>
+          </a:xfrm>
+          <a:prstGeom prst="rect">
+            <a:avLst/>
+          </a:prstGeom>
+          <a:noFill/>
+          <a:ln/>
+        </p:spPr>
+        <p:txBody>
+          <a:bodyPr wrap="square" lIns="0" tIns="0" rIns="0" bIns="0" rtlCol="0" anchor="ctr"/>
+          <a:lstStyle/>
+          <a:p>
+            <a:pPr indent="0" marL="0">
+              <a:buNone/>
+            </a:pPr>
+            <a:r>
+              <a:rPr lang="en-US" sz="1400" i="1" dirty="0">
+                <a:solidFill>
+                  <a:srgbClr val="5E7789"/>
+                </a:solidFill>
+                <a:latin typeface="Calibri" pitchFamily="34" charset="0"/>
+                <a:ea typeface="Calibri" pitchFamily="34" charset="-122"/>
+                <a:cs typeface="Calibri" pitchFamily="34" charset="-120"/>
+              </a:rPr>
+              <a:t>Come and pair with me if you get stuck on step 4. That step is the whole workshop.</a:t>
+            </a:r>
+            <a:endParaRPr lang="en-US" sz="1400" dirty="0"/>
+          </a:p>
+        </p:txBody>
+      </p:sp>
+    </p:spTree>
+  </p:cSld>
+  <p:clrMapOvr>
+    <a:masterClrMapping/>
+  </p:clrMapOvr>
+</p:sld>
+</file>
+
+<file path=ppt/slides/slide21.xml><?xml version="1.0" encoding="utf-8"?>
+<p:sld xmlns:a="http://schemas.openxmlformats.org/drawingml/2006/main" xmlns:r="http://schemas.openxmlformats.org/officeDocument/2006/relationships" xmlns:p="http://schemas.openxmlformats.org/presentationml/2006/main">
+  <p:cSld name="Slide 21">
     <p:bg>
       <p:bgPr>
         <a:solidFill>
